--- a/docs/ahg-2026/slides.pptx
+++ b/docs/ahg-2026/slides.pptx
@@ -543,7 +543,13 @@
           <a:p/>
           <a:p>
             <a:r>
-              <a:t>Open with the promise on the next slide before anything else. It is the sentence that lets the person with no laptop stay in the room.</a:t>
+              <a:t>The proctor introduces the session. Put the microphone on before you say a word, and keep it on all day: when a volunteer speaks, pass them a mic or say what they said back into yours before you answer. Some people in this room hear you only through it.</a:t>
+            </a:r>
+          </a:p>
+          <a:p/>
+          <a:p>
+            <a:r>
+              <a:t>Say the key point once, before any logistics, in one sentence: the work is not fixing documents, it is making more people who can. Then the promise on the next slide.</a:t>
             </a:r>
           </a:p>
         </p:txBody>
@@ -1181,7 +1187,7 @@
           <a:p/>
           <a:p>
             <a:r>
-              <a:t>Check the AI usage panel before you eat. If the room is burning through the budget, you want to know at lunch and not at three o'clock.</a:t>
+              <a:t>Eat. Nothing in the afternoon depends on a model answering, so there is nothing to watch over lunch.</a:t>
             </a:r>
           </a:p>
         </p:txBody>
@@ -1257,7 +1263,7 @@
           <a:p/>
           <a:p>
             <a:r>
-              <a:t>Project the facilitator dashboard. Counts only - it never carries anyone's work.</a:t>
+              <a:t>Project the facilitator dashboard. Counts only - it never carries anyone's work. Read the counts aloud; the screen is not the only way into the room.</a:t>
             </a:r>
           </a:p>
           <a:p/>
@@ -1430,6 +1436,12 @@
               <a:t>The upload rule matters: free accounts allow roughly two image uploads a day and do not publish the number. An instruction that fails at 1:40 is worse than one nobody followed.</a:t>
             </a:r>
           </a:p>
+          <a:p/>
+          <a:p>
+            <a:r>
+              <a:t>The privacy half matters more. Say what private means here: student records, health or disability information, anyone's name. A free assistant may keep what is pasted into it. Use the scenarios, or strip the details out first.</a:t>
+            </a:r>
+          </a:p>
         </p:txBody>
       </p:sp>
       <p:sp>
@@ -1807,7 +1819,7 @@
           <a:lstStyle/>
           <a:p>
             <a:r>
-              <a:t>[Peer review - 15 minutes - gallery]</a:t>
+              <a:t>[Peer review - 10 minutes - gallery]</a:t>
             </a:r>
           </a:p>
           <a:p/>
@@ -2129,7 +2141,7 @@
           <a:lstStyle/>
           <a:p>
             <a:r>
-              <a:t>[4:25]</a:t>
+              <a:t>[4:20]</a:t>
             </a:r>
           </a:p>
           <a:p/>
@@ -2141,7 +2153,7 @@
           <a:p/>
           <a:p>
             <a:r>
-              <a:t>Then say thank you and stop. Ending early is a gift.</a:t>
+              <a:t>Then go straight to what happens next. The last five minutes belong to the session evaluation.</a:t>
             </a:r>
           </a:p>
         </p:txBody>
@@ -2305,7 +2317,13 @@
           <a:p/>
           <a:p>
             <a:r>
-              <a:t>Say the last bullet slowly. It sets the tone for whether anyone asks for anything all day.</a:t>
+              <a:t>Say the last bullet slowly, then add: that is not an interruption of this workshop - it is this workshop. It sets the tone for whether anyone asks for anything all day.</a:t>
+            </a:r>
+          </a:p>
+          <a:p/>
+          <a:p>
+            <a:r>
+              <a:t>The worksheet pack was published before today for anyone who wanted to print their own. Say so for the person who did.</a:t>
             </a:r>
           </a:p>
         </p:txBody>
@@ -2381,7 +2399,13 @@
           <a:p/>
           <a:p>
             <a:r>
-              <a:t>Last slide. Say it, thank them, and let them go. Do not add a Q and A block here - answer at the tables while people pack up.</a:t>
+              <a:t>Last slide. Say it, thank them, and hand over to the proctor for the session evaluation. Then stop talking while people fill it in - the five minutes are theirs.</a:t>
+            </a:r>
+          </a:p>
+          <a:p/>
+          <a:p>
+            <a:r>
+              <a:t>Do not add a Q and A block here - answer at the tables while people pack up.</a:t>
             </a:r>
           </a:p>
         </p:txBody>
@@ -2463,6 +2487,12 @@
           <a:p/>
           <a:p>
             <a:r>
+              <a:t>Say what is on the screen: the address and nothing else. The QR code is on the table cards, not here, so nobody hunts the slide for it.</a:t>
+            </a:r>
+          </a:p>
+          <a:p/>
+          <a:p>
+            <a:r>
               <a:t>Signage is printed from the facilitator dashboard: session, then signage.</a:t>
             </a:r>
           </a:p>
@@ -2697,7 +2727,7 @@
           <a:lstStyle/>
           <a:p>
             <a:r>
-              <a:t>[The framework]</a:t>
+              <a:t>[Four words for the day]</a:t>
             </a:r>
           </a:p>
           <a:p/>
@@ -2785,6 +2815,18 @@
           <a:p/>
           <a:p>
             <a:r>
+              <a:t>Set the AI context here, in under a minute. What this session covers: where AI can help in accessibility work, and the human review that has to follow it. What it does not: comparing vendors, building software, or requiring anyone to use AI at all.</a:t>
+            </a:r>
+          </a:p>
+          <a:p/>
+          <a:p>
+            <a:r>
+              <a:t>Say what makes it different from the other AI sessions this week: it is about people making more people who can, and AI stays optional throughout. Name the reasons people hesitate - privacy, accuracy, other people's jobs - without dwelling on them. The boundary on this slide is the answer to each.</a:t>
+            </a:r>
+          </a:p>
+          <a:p/>
+          <a:p>
+            <a:r>
               <a:t>The generated prompts put the participant's own review step inside the prompt as an instruction, not as a closing remark. Mention that at activity 5, not here.</a:t>
             </a:r>
           </a:p>
@@ -2861,13 +2903,13 @@
           <a:p/>
           <a:p>
             <a:r>
-              <a:t>Thirty seconds. Do not narrate the table; people can read it. Point at the last two rows and say "that is what you take home".</a:t>
+              <a:t>Thirty seconds. Read the three parts out loud - not everyone can read the screen. Then say "the last part is what you take home".</a:t>
             </a:r>
           </a:p>
           <a:p/>
           <a:p>
             <a:r>
-              <a:t>This table is generated from the workshop agenda, so it cannot drift from the time each activity page shows a participant.</a:t>
+              <a:t>The full timetable, every break included, is on the workshop home page on every device. These times come from the workshop agenda, so they cannot drift from what each activity page shows.</a:t>
             </a:r>
           </a:p>
         </p:txBody>
@@ -5883,7 +5925,12 @@
             <p:ph type="title"/>
           </p:nvPr>
         </p:nvSpPr>
-        <p:spPr/>
+        <p:spPr>
+          <a:xfrm>
+            <a:off x="548640" y="365760"/>
+            <a:ext cx="11064240" cy="1097280"/>
+          </a:xfrm>
+        </p:spPr>
         <p:txBody>
           <a:bodyPr/>
           <a:lstStyle/>
@@ -5907,21 +5954,30 @@
             <p:ph idx="1"/>
           </p:nvPr>
         </p:nvSpPr>
-        <p:spPr/>
+        <p:spPr>
+          <a:xfrm>
+            <a:off x="548640" y="1554480"/>
+            <a:ext cx="11064240" cy="4937760"/>
+          </a:xfrm>
+        </p:spPr>
         <p:txBody>
           <a:bodyPr wrap="square"/>
           <a:lstStyle/>
           <a:p>
-            <a:pPr/>
-            <a:r>
-              <a:rPr sz="1600" b="0">
+            <a:pPr marL="0" indent="0">
+              <a:buNone/>
+            </a:pPr>
+            <a:r>
+              <a:rPr sz="1800" b="0">
                 <a:latin typeface="Arial"/>
               </a:rPr>
               <a:t>Accessing Higher Ground 2026</a:t>
             </a:r>
           </a:p>
           <a:p>
-            <a:pPr/>
+            <a:pPr marL="0" indent="0">
+              <a:buNone/>
+            </a:pPr>
             <a:r>
               <a:rPr sz="2400" b="0">
                 <a:latin typeface="Arial"/>
@@ -5930,7 +5986,9 @@
             </a:r>
           </a:p>
           <a:p>
-            <a:pPr/>
+            <a:pPr marL="0" indent="0">
+              <a:buNone/>
+            </a:pPr>
             <a:r>
               <a:rPr sz="2400" b="0">
                 <a:latin typeface="Arial"/>
@@ -5939,9 +5997,11 @@
             </a:r>
           </a:p>
           <a:p>
-            <a:pPr/>
-            <a:r>
-              <a:rPr sz="1600" b="0">
+            <a:pPr marL="0" indent="0">
+              <a:buNone/>
+            </a:pPr>
+            <a:r>
+              <a:rPr sz="2000" b="0">
                 <a:latin typeface="Arial"/>
               </a:rPr>
               <a:t>Jeff Bishop - BITS, an affiliate of the American Council of the Blind - letitglow.app</a:t>
@@ -5977,7 +6037,12 @@
             <p:ph type="title"/>
           </p:nvPr>
         </p:nvSpPr>
-        <p:spPr/>
+        <p:spPr>
+          <a:xfrm>
+            <a:off x="548640" y="365760"/>
+            <a:ext cx="11064240" cy="1097280"/>
+          </a:xfrm>
+        </p:spPr>
         <p:txBody>
           <a:bodyPr/>
           <a:lstStyle/>
@@ -6001,21 +6066,30 @@
             <p:ph idx="1"/>
           </p:nvPr>
         </p:nvSpPr>
-        <p:spPr/>
+        <p:spPr>
+          <a:xfrm>
+            <a:off x="548640" y="1554480"/>
+            <a:ext cx="11064240" cy="4937760"/>
+          </a:xfrm>
+        </p:spPr>
         <p:txBody>
           <a:bodyPr wrap="square"/>
           <a:lstStyle/>
           <a:p>
-            <a:pPr/>
-            <a:r>
-              <a:rPr sz="1600" b="0">
+            <a:pPr marL="0" indent="0">
+              <a:buNone/>
+            </a:pPr>
+            <a:r>
+              <a:rPr sz="1800" b="0">
                 <a:latin typeface="Arial"/>
               </a:rPr>
               <a:t>Activity 1 - 20 minutes - /w/ahg-2026/1</a:t>
             </a:r>
           </a:p>
           <a:p>
-            <a:pPr/>
+            <a:pPr marL="0" indent="0">
+              <a:buNone/>
+            </a:pPr>
             <a:r>
               <a:rPr sz="2000" b="0">
                 <a:latin typeface="Arial"/>
@@ -6024,7 +6098,9 @@
             </a:r>
           </a:p>
           <a:p>
-            <a:pPr/>
+            <a:pPr marL="0" indent="0">
+              <a:buNone/>
+            </a:pPr>
             <a:r>
               <a:rPr sz="2000" b="0">
                 <a:latin typeface="Arial"/>
@@ -6062,7 +6138,12 @@
             <p:ph type="title"/>
           </p:nvPr>
         </p:nvSpPr>
-        <p:spPr/>
+        <p:spPr>
+          <a:xfrm>
+            <a:off x="548640" y="365760"/>
+            <a:ext cx="11064240" cy="1097280"/>
+          </a:xfrm>
+        </p:spPr>
         <p:txBody>
           <a:bodyPr/>
           <a:lstStyle/>
@@ -6086,21 +6167,30 @@
             <p:ph idx="1"/>
           </p:nvPr>
         </p:nvSpPr>
-        <p:spPr/>
+        <p:spPr>
+          <a:xfrm>
+            <a:off x="548640" y="1554480"/>
+            <a:ext cx="11064240" cy="4937760"/>
+          </a:xfrm>
+        </p:spPr>
         <p:txBody>
           <a:bodyPr wrap="square"/>
           <a:lstStyle/>
           <a:p>
-            <a:pPr/>
-            <a:r>
-              <a:rPr sz="1600" b="0">
+            <a:pPr marL="0" indent="0">
+              <a:buNone/>
+            </a:pPr>
+            <a:r>
+              <a:rPr sz="1800" b="0">
                 <a:latin typeface="Arial"/>
               </a:rPr>
               <a:t>Activity 2 - 30 minutes - /w/ahg-2026/2</a:t>
             </a:r>
           </a:p>
           <a:p>
-            <a:pPr/>
+            <a:pPr marL="0" indent="0">
+              <a:buNone/>
+            </a:pPr>
             <a:r>
               <a:rPr sz="2000" b="0">
                 <a:latin typeface="Arial"/>
@@ -6109,7 +6199,9 @@
             </a:r>
           </a:p>
           <a:p>
-            <a:pPr/>
+            <a:pPr marL="0" indent="0">
+              <a:buNone/>
+            </a:pPr>
             <a:r>
               <a:rPr sz="2000" b="0">
                 <a:latin typeface="Arial"/>
@@ -6118,7 +6210,9 @@
             </a:r>
           </a:p>
           <a:p>
-            <a:pPr/>
+            <a:pPr marL="0" indent="0">
+              <a:buNone/>
+            </a:pPr>
             <a:r>
               <a:rPr sz="2800" b="1">
                 <a:latin typeface="Arial"/>
@@ -6156,7 +6250,12 @@
             <p:ph type="title"/>
           </p:nvPr>
         </p:nvSpPr>
-        <p:spPr/>
+        <p:spPr>
+          <a:xfrm>
+            <a:off x="548640" y="365760"/>
+            <a:ext cx="11064240" cy="1097280"/>
+          </a:xfrm>
+        </p:spPr>
         <p:txBody>
           <a:bodyPr/>
           <a:lstStyle/>
@@ -6180,21 +6279,30 @@
             <p:ph idx="1"/>
           </p:nvPr>
         </p:nvSpPr>
-        <p:spPr/>
+        <p:spPr>
+          <a:xfrm>
+            <a:off x="548640" y="1554480"/>
+            <a:ext cx="11064240" cy="4937760"/>
+          </a:xfrm>
+        </p:spPr>
         <p:txBody>
           <a:bodyPr wrap="square"/>
           <a:lstStyle/>
           <a:p>
-            <a:pPr/>
-            <a:r>
-              <a:rPr sz="1600" b="0">
+            <a:pPr marL="0" indent="0">
+              <a:buNone/>
+            </a:pPr>
+            <a:r>
+              <a:rPr sz="1800" b="0">
                 <a:latin typeface="Arial"/>
               </a:rPr>
               <a:t>Activity 3 - 30 minutes - /w/ahg-2026/3</a:t>
             </a:r>
           </a:p>
           <a:p>
-            <a:pPr/>
+            <a:pPr marL="0" indent="0">
+              <a:buNone/>
+            </a:pPr>
             <a:r>
               <a:rPr sz="2000" b="0">
                 <a:latin typeface="Arial"/>
@@ -6203,7 +6311,9 @@
             </a:r>
           </a:p>
           <a:p>
-            <a:pPr/>
+            <a:pPr marL="0" indent="0">
+              <a:buNone/>
+            </a:pPr>
             <a:r>
               <a:rPr sz="2000" b="0">
                 <a:latin typeface="Arial"/>
@@ -6250,7 +6360,12 @@
             <p:ph type="title"/>
           </p:nvPr>
         </p:nvSpPr>
-        <p:spPr/>
+        <p:spPr>
+          <a:xfrm>
+            <a:off x="548640" y="365760"/>
+            <a:ext cx="11064240" cy="1097280"/>
+          </a:xfrm>
+        </p:spPr>
         <p:txBody>
           <a:bodyPr/>
           <a:lstStyle/>
@@ -6274,21 +6389,30 @@
             <p:ph idx="1"/>
           </p:nvPr>
         </p:nvSpPr>
-        <p:spPr/>
+        <p:spPr>
+          <a:xfrm>
+            <a:off x="548640" y="1554480"/>
+            <a:ext cx="11064240" cy="4937760"/>
+          </a:xfrm>
+        </p:spPr>
         <p:txBody>
           <a:bodyPr wrap="square"/>
           <a:lstStyle/>
           <a:p>
-            <a:pPr/>
-            <a:r>
-              <a:rPr sz="1600" b="0">
+            <a:pPr marL="0" indent="0">
+              <a:buNone/>
+            </a:pPr>
+            <a:r>
+              <a:rPr sz="1800" b="0">
                 <a:latin typeface="Arial"/>
               </a:rPr>
               <a:t>Break - 15 minutes</a:t>
             </a:r>
           </a:p>
           <a:p>
-            <a:pPr/>
+            <a:pPr marL="0" indent="0">
+              <a:buNone/>
+            </a:pPr>
             <a:r>
               <a:rPr sz="2000" b="0">
                 <a:latin typeface="Arial"/>
@@ -6326,7 +6450,12 @@
             <p:ph type="title"/>
           </p:nvPr>
         </p:nvSpPr>
-        <p:spPr/>
+        <p:spPr>
+          <a:xfrm>
+            <a:off x="548640" y="365760"/>
+            <a:ext cx="11064240" cy="1097280"/>
+          </a:xfrm>
+        </p:spPr>
         <p:txBody>
           <a:bodyPr/>
           <a:lstStyle/>
@@ -6349,7 +6478,7 @@
         <p:spPr>
           <a:xfrm>
             <a:off x="548640" y="1463040"/>
-            <a:ext cx="11064240" cy="822960"/>
+            <a:ext cx="11064240" cy="1234440"/>
           </a:xfrm>
           <a:prstGeom prst="rect">
             <a:avLst/>
@@ -6363,10 +6492,26 @@
           <a:lstStyle/>
           <a:p>
             <a:r>
-              <a:rPr sz="1600">
-                <a:latin typeface="Arial"/>
-              </a:rPr>
-              <a:t>Activity 4 - 30 minutes - /w/ahg-2026/4 Sort your own tasks into three piles. Then write the safeguard that makes the middle pile safe. The three piles</a:t>
+              <a:rPr sz="1800">
+                <a:latin typeface="Arial"/>
+              </a:rPr>
+              <a:t>Activity 4 - 30 minutes - /w/ahg-2026/4</a:t>
+            </a:r>
+          </a:p>
+          <a:p>
+            <a:r>
+              <a:rPr sz="1800">
+                <a:latin typeface="Arial"/>
+              </a:rPr>
+              <a:t>Sort your own tasks into three piles. Then write the safeguard that makes the middle pile safe.</a:t>
+            </a:r>
+          </a:p>
+          <a:p>
+            <a:r>
+              <a:rPr sz="1800">
+                <a:latin typeface="Arial"/>
+              </a:rPr>
+              <a:t>The three piles</a:t>
             </a:r>
           </a:p>
         </p:txBody>
@@ -6380,8 +6525,8 @@
           <p:nvPr/>
         </p:nvGraphicFramePr>
         <p:xfrm>
-          <a:off x="548640" y="2286000"/>
-          <a:ext cx="11064240" cy="1444752"/>
+          <a:off x="548640" y="2971800"/>
+          <a:ext cx="11064240" cy="1920240"/>
         </p:xfrm>
         <a:graphic>
           <a:graphicData uri="http://schemas.openxmlformats.org/drawingml/2006/table">
@@ -6393,14 +6538,14 @@
                 <a:gridCol w="5532120"/>
                 <a:gridCol w="5532120"/>
               </a:tblGrid>
-              <a:tr h="361188">
+              <a:tr h="480060">
                 <a:tc>
                   <a:txBody>
                     <a:bodyPr/>
                     <a:lstStyle/>
                     <a:p>
                       <a:r>
-                        <a:rPr sz="1400" b="1">
+                        <a:rPr sz="1800" b="1">
                           <a:latin typeface="Arial"/>
                         </a:rPr>
                         <a:t>Pile</a:t>
@@ -6415,7 +6560,7 @@
                     <a:lstStyle/>
                     <a:p>
                       <a:r>
-                        <a:rPr sz="1400" b="1">
+                        <a:rPr sz="1800" b="1">
                           <a:latin typeface="Arial"/>
                         </a:rPr>
                         <a:t>Example</a:t>
@@ -6425,14 +6570,14 @@
                   <a:tcPr/>
                 </a:tc>
               </a:tr>
-              <a:tr h="361188">
+              <a:tr h="480060">
                 <a:tc>
                   <a:txBody>
                     <a:bodyPr/>
                     <a:lstStyle/>
                     <a:p>
                       <a:r>
-                        <a:rPr sz="1400">
+                        <a:rPr sz="1800">
                           <a:latin typeface="Arial"/>
                         </a:rPr>
                         <a:t>Helpful for AI</a:t>
@@ -6447,7 +6592,7 @@
                     <a:lstStyle/>
                     <a:p>
                       <a:r>
-                        <a:rPr sz="1400">
+                        <a:rPr sz="1800">
                           <a:latin typeface="Arial"/>
                         </a:rPr>
                         <a:t>Drafting alt text for a chart you wrote</a:t>
@@ -6457,14 +6602,14 @@
                   <a:tcPr/>
                 </a:tc>
               </a:tr>
-              <a:tr h="361188">
+              <a:tr h="480060">
                 <a:tc>
                   <a:txBody>
                     <a:bodyPr/>
                     <a:lstStyle/>
                     <a:p>
                       <a:r>
-                        <a:rPr sz="1400">
+                        <a:rPr sz="1800">
                           <a:latin typeface="Arial"/>
                         </a:rPr>
                         <a:t>Risky without review</a:t>
@@ -6479,7 +6624,7 @@
                     <a:lstStyle/>
                     <a:p>
                       <a:r>
-                        <a:rPr sz="1400">
+                        <a:rPr sz="1800">
                           <a:latin typeface="Arial"/>
                         </a:rPr>
                         <a:t>Summarising a policy document</a:t>
@@ -6489,14 +6634,14 @@
                   <a:tcPr/>
                 </a:tc>
               </a:tr>
-              <a:tr h="361188">
+              <a:tr h="480060">
                 <a:tc>
                   <a:txBody>
                     <a:bodyPr/>
                     <a:lstStyle/>
                     <a:p>
                       <a:r>
-                        <a:rPr sz="1400">
+                        <a:rPr sz="1800">
                           <a:latin typeface="Arial"/>
                         </a:rPr>
                         <a:t>Human required</a:t>
@@ -6511,7 +6656,7 @@
                     <a:lstStyle/>
                     <a:p>
                       <a:r>
-                        <a:rPr sz="1400">
+                        <a:rPr sz="1800">
                           <a:latin typeface="Arial"/>
                         </a:rPr>
                         <a:t>Deciding what an image is for</a:t>
@@ -6553,7 +6698,12 @@
             <p:ph type="title"/>
           </p:nvPr>
         </p:nvSpPr>
-        <p:spPr/>
+        <p:spPr>
+          <a:xfrm>
+            <a:off x="548640" y="365760"/>
+            <a:ext cx="11064240" cy="1097280"/>
+          </a:xfrm>
+        </p:spPr>
         <p:txBody>
           <a:bodyPr/>
           <a:lstStyle/>
@@ -6577,14 +6727,21 @@
             <p:ph idx="1"/>
           </p:nvPr>
         </p:nvSpPr>
-        <p:spPr/>
+        <p:spPr>
+          <a:xfrm>
+            <a:off x="548640" y="1554480"/>
+            <a:ext cx="11064240" cy="4937760"/>
+          </a:xfrm>
+        </p:spPr>
         <p:txBody>
           <a:bodyPr wrap="square"/>
           <a:lstStyle/>
           <a:p>
-            <a:pPr/>
-            <a:r>
-              <a:rPr sz="1600" b="0">
+            <a:pPr marL="0" indent="0">
+              <a:buNone/>
+            </a:pPr>
+            <a:r>
+              <a:rPr sz="1800" b="0">
                 <a:latin typeface="Arial"/>
               </a:rPr>
               <a:t>Activity 5 - 35 minutes - /w/ahg-2026/5</a:t>
@@ -6636,7 +6793,9 @@
             </a:r>
           </a:p>
           <a:p>
-            <a:pPr/>
+            <a:pPr marL="0" indent="0">
+              <a:buNone/>
+            </a:pPr>
             <a:r>
               <a:rPr sz="2000" b="0">
                 <a:latin typeface="Arial"/>
@@ -6674,7 +6833,12 @@
             <p:ph type="title"/>
           </p:nvPr>
         </p:nvSpPr>
-        <p:spPr/>
+        <p:spPr>
+          <a:xfrm>
+            <a:off x="548640" y="365760"/>
+            <a:ext cx="11064240" cy="1097280"/>
+          </a:xfrm>
+        </p:spPr>
         <p:txBody>
           <a:bodyPr/>
           <a:lstStyle/>
@@ -6698,21 +6862,30 @@
             <p:ph idx="1"/>
           </p:nvPr>
         </p:nvSpPr>
-        <p:spPr/>
+        <p:spPr>
+          <a:xfrm>
+            <a:off x="548640" y="1554480"/>
+            <a:ext cx="11064240" cy="4937760"/>
+          </a:xfrm>
+        </p:spPr>
         <p:txBody>
           <a:bodyPr wrap="square"/>
           <a:lstStyle/>
           <a:p>
-            <a:pPr/>
-            <a:r>
-              <a:rPr sz="1600" b="0">
+            <a:pPr marL="0" indent="0">
+              <a:buNone/>
+            </a:pPr>
+            <a:r>
+              <a:rPr sz="1800" b="0">
                 <a:latin typeface="Arial"/>
               </a:rPr>
               <a:t>Lab 1 - 45 minutes - /w/ahg-2026/6</a:t>
             </a:r>
           </a:p>
           <a:p>
-            <a:pPr/>
+            <a:pPr marL="0" indent="0">
+              <a:buNone/>
+            </a:pPr>
             <a:r>
               <a:rPr sz="2000" b="0">
                 <a:latin typeface="Arial"/>
@@ -6757,7 +6930,9 @@
             </a:r>
           </a:p>
           <a:p>
-            <a:pPr/>
+            <a:pPr marL="0" indent="0">
+              <a:buNone/>
+            </a:pPr>
             <a:r>
               <a:rPr sz="2000" b="0">
                 <a:latin typeface="Arial"/>
@@ -6795,7 +6970,12 @@
             <p:ph type="title"/>
           </p:nvPr>
         </p:nvSpPr>
-        <p:spPr/>
+        <p:spPr>
+          <a:xfrm>
+            <a:off x="548640" y="365760"/>
+            <a:ext cx="11064240" cy="1097280"/>
+          </a:xfrm>
+        </p:spPr>
         <p:txBody>
           <a:bodyPr/>
           <a:lstStyle/>
@@ -6819,21 +6999,30 @@
             <p:ph idx="1"/>
           </p:nvPr>
         </p:nvSpPr>
-        <p:spPr/>
+        <p:spPr>
+          <a:xfrm>
+            <a:off x="548640" y="1554480"/>
+            <a:ext cx="11064240" cy="4937760"/>
+          </a:xfrm>
+        </p:spPr>
         <p:txBody>
           <a:bodyPr wrap="square"/>
           <a:lstStyle/>
           <a:p>
-            <a:pPr/>
-            <a:r>
-              <a:rPr sz="1600" b="0">
+            <a:pPr marL="0" indent="0">
+              <a:buNone/>
+            </a:pPr>
+            <a:r>
+              <a:rPr sz="1800" b="0">
                 <a:latin typeface="Arial"/>
               </a:rPr>
               <a:t>Lunch - 12:15-1:15</a:t>
             </a:r>
           </a:p>
           <a:p>
-            <a:pPr/>
+            <a:pPr marL="0" indent="0">
+              <a:buNone/>
+            </a:pPr>
             <a:r>
               <a:rPr sz="2000" b="0">
                 <a:latin typeface="Arial"/>
@@ -6842,7 +7031,9 @@
             </a:r>
           </a:p>
           <a:p>
-            <a:pPr/>
+            <a:pPr marL="0" indent="0">
+              <a:buNone/>
+            </a:pPr>
             <a:r>
               <a:rPr sz="2000" b="0">
                 <a:latin typeface="Arial"/>
@@ -6880,7 +7071,12 @@
             <p:ph type="title"/>
           </p:nvPr>
         </p:nvSpPr>
-        <p:spPr/>
+        <p:spPr>
+          <a:xfrm>
+            <a:off x="548640" y="365760"/>
+            <a:ext cx="11064240" cy="1097280"/>
+          </a:xfrm>
+        </p:spPr>
         <p:txBody>
           <a:bodyPr/>
           <a:lstStyle/>
@@ -6904,21 +7100,30 @@
             <p:ph idx="1"/>
           </p:nvPr>
         </p:nvSpPr>
-        <p:spPr/>
+        <p:spPr>
+          <a:xfrm>
+            <a:off x="548640" y="1554480"/>
+            <a:ext cx="11064240" cy="4937760"/>
+          </a:xfrm>
+        </p:spPr>
         <p:txBody>
           <a:bodyPr wrap="square"/>
           <a:lstStyle/>
           <a:p>
-            <a:pPr/>
-            <a:r>
-              <a:rPr sz="1600" b="0">
+            <a:pPr marL="0" indent="0">
+              <a:buNone/>
+            </a:pPr>
+            <a:r>
+              <a:rPr sz="1800" b="0">
                 <a:latin typeface="Arial"/>
               </a:rPr>
               <a:t>1:15 - Re-entry</a:t>
             </a:r>
           </a:p>
           <a:p>
-            <a:pPr/>
+            <a:pPr marL="0" indent="0">
+              <a:buNone/>
+            </a:pPr>
             <a:r>
               <a:rPr sz="2000" b="0">
                 <a:latin typeface="Arial"/>
@@ -6927,7 +7132,9 @@
             </a:r>
           </a:p>
           <a:p>
-            <a:pPr/>
+            <a:pPr marL="0" indent="0">
+              <a:buNone/>
+            </a:pPr>
             <a:r>
               <a:rPr sz="2800" b="1">
                 <a:latin typeface="Arial"/>
@@ -6965,7 +7172,12 @@
             <p:ph type="title"/>
           </p:nvPr>
         </p:nvSpPr>
-        <p:spPr/>
+        <p:spPr>
+          <a:xfrm>
+            <a:off x="548640" y="365760"/>
+            <a:ext cx="11064240" cy="1097280"/>
+          </a:xfrm>
+        </p:spPr>
         <p:txBody>
           <a:bodyPr/>
           <a:lstStyle/>
@@ -6989,21 +7201,30 @@
             <p:ph idx="1"/>
           </p:nvPr>
         </p:nvSpPr>
-        <p:spPr/>
+        <p:spPr>
+          <a:xfrm>
+            <a:off x="548640" y="1554480"/>
+            <a:ext cx="11064240" cy="4937760"/>
+          </a:xfrm>
+        </p:spPr>
         <p:txBody>
           <a:bodyPr wrap="square"/>
           <a:lstStyle/>
           <a:p>
-            <a:pPr/>
-            <a:r>
-              <a:rPr sz="1600" b="0">
+            <a:pPr marL="0" indent="0">
+              <a:buNone/>
+            </a:pPr>
+            <a:r>
+              <a:rPr sz="1800" b="0">
                 <a:latin typeface="Arial"/>
               </a:rPr>
               <a:t>Lab 2 - 45 minutes - /w/ahg-2026/7</a:t>
             </a:r>
           </a:p>
           <a:p>
-            <a:pPr/>
+            <a:pPr marL="0" indent="0">
+              <a:buNone/>
+            </a:pPr>
             <a:r>
               <a:rPr sz="2000" b="0">
                 <a:latin typeface="Arial"/>
@@ -7012,7 +7233,9 @@
             </a:r>
           </a:p>
           <a:p>
-            <a:pPr/>
+            <a:pPr marL="0" indent="0">
+              <a:buNone/>
+            </a:pPr>
             <a:r>
               <a:rPr sz="2800" b="1">
                 <a:latin typeface="Arial"/>
@@ -7021,7 +7244,9 @@
             </a:r>
           </a:p>
           <a:p>
-            <a:pPr/>
+            <a:pPr marL="0" indent="0">
+              <a:buNone/>
+            </a:pPr>
             <a:r>
               <a:rPr sz="2000" b="0">
                 <a:latin typeface="Arial"/>
@@ -7059,7 +7284,12 @@
             <p:ph type="title"/>
           </p:nvPr>
         </p:nvSpPr>
-        <p:spPr/>
+        <p:spPr>
+          <a:xfrm>
+            <a:off x="548640" y="365760"/>
+            <a:ext cx="11064240" cy="1097280"/>
+          </a:xfrm>
+        </p:spPr>
         <p:txBody>
           <a:bodyPr/>
           <a:lstStyle/>
@@ -7083,21 +7313,30 @@
             <p:ph idx="1"/>
           </p:nvPr>
         </p:nvSpPr>
-        <p:spPr/>
+        <p:spPr>
+          <a:xfrm>
+            <a:off x="548640" y="1554480"/>
+            <a:ext cx="11064240" cy="4937760"/>
+          </a:xfrm>
+        </p:spPr>
         <p:txBody>
           <a:bodyPr wrap="square"/>
           <a:lstStyle/>
           <a:p>
-            <a:pPr/>
-            <a:r>
-              <a:rPr sz="1600" b="0">
+            <a:pPr marL="0" indent="0">
+              <a:buNone/>
+            </a:pPr>
+            <a:r>
+              <a:rPr sz="1800" b="0">
                 <a:latin typeface="Arial"/>
               </a:rPr>
               <a:t>The promise</a:t>
             </a:r>
           </a:p>
           <a:p>
-            <a:pPr lvl="1"/>
+            <a:pPr lvl="1">
+              <a:buNone/>
+            </a:pPr>
             <a:r>
               <a:rPr sz="2000" b="0">
                 <a:latin typeface="Arial"/>
@@ -7106,7 +7345,9 @@
             </a:r>
           </a:p>
           <a:p>
-            <a:pPr lvl="1"/>
+            <a:pPr lvl="1">
+              <a:buNone/>
+            </a:pPr>
             <a:r>
               <a:rPr sz="2000" b="0">
                 <a:latin typeface="Arial"/>
@@ -7115,7 +7356,9 @@
             </a:r>
           </a:p>
           <a:p>
-            <a:pPr/>
+            <a:pPr marL="0" indent="0">
+              <a:buNone/>
+            </a:pPr>
             <a:r>
               <a:rPr sz="2800" b="1">
                 <a:latin typeface="Arial"/>
@@ -7124,12 +7367,14 @@
             </a:r>
           </a:p>
           <a:p>
-            <a:pPr/>
+            <a:pPr marL="0" indent="0">
+              <a:buNone/>
+            </a:pPr>
             <a:r>
               <a:rPr sz="2000" b="0">
                 <a:latin typeface="Arial"/>
               </a:rPr>
-              <a:t>One rule if you use an assistant: paste the text. Do not upload files - free accounts limit uploads and do not limit text.</a:t>
+              <a:t>One rule if you use an assistant: paste text, never upload files - and never paste anything private.</a:t>
             </a:r>
           </a:p>
         </p:txBody>
@@ -7162,7 +7407,12 @@
             <p:ph type="title"/>
           </p:nvPr>
         </p:nvSpPr>
-        <p:spPr/>
+        <p:spPr>
+          <a:xfrm>
+            <a:off x="548640" y="365760"/>
+            <a:ext cx="11064240" cy="1097280"/>
+          </a:xfrm>
+        </p:spPr>
         <p:txBody>
           <a:bodyPr/>
           <a:lstStyle/>
@@ -7186,21 +7436,30 @@
             <p:ph idx="1"/>
           </p:nvPr>
         </p:nvSpPr>
-        <p:spPr/>
+        <p:spPr>
+          <a:xfrm>
+            <a:off x="548640" y="1554480"/>
+            <a:ext cx="11064240" cy="4937760"/>
+          </a:xfrm>
+        </p:spPr>
         <p:txBody>
           <a:bodyPr wrap="square"/>
           <a:lstStyle/>
           <a:p>
-            <a:pPr/>
-            <a:r>
-              <a:rPr sz="1600" b="0">
+            <a:pPr marL="0" indent="0">
+              <a:buNone/>
+            </a:pPr>
+            <a:r>
+              <a:rPr sz="1800" b="0">
                 <a:latin typeface="Arial"/>
               </a:rPr>
               <a:t>Lab 2 - the method</a:t>
             </a:r>
           </a:p>
           <a:p>
-            <a:pPr lvl="1"/>
+            <a:pPr lvl="1">
+              <a:buNone/>
+            </a:pPr>
             <a:r>
               <a:rPr sz="2000" b="0">
                 <a:latin typeface="Arial"/>
@@ -7209,7 +7468,9 @@
             </a:r>
           </a:p>
           <a:p>
-            <a:pPr lvl="1"/>
+            <a:pPr lvl="1">
+              <a:buNone/>
+            </a:pPr>
             <a:r>
               <a:rPr sz="2000" b="0">
                 <a:latin typeface="Arial"/>
@@ -7218,7 +7479,9 @@
             </a:r>
           </a:p>
           <a:p>
-            <a:pPr lvl="1"/>
+            <a:pPr lvl="1">
+              <a:buNone/>
+            </a:pPr>
             <a:r>
               <a:rPr sz="2000" b="0">
                 <a:latin typeface="Arial"/>
@@ -7227,7 +7490,9 @@
             </a:r>
           </a:p>
           <a:p>
-            <a:pPr lvl="1"/>
+            <a:pPr lvl="1">
+              <a:buNone/>
+            </a:pPr>
             <a:r>
               <a:rPr sz="2000" b="0">
                 <a:latin typeface="Arial"/>
@@ -7236,7 +7501,9 @@
             </a:r>
           </a:p>
           <a:p>
-            <a:pPr/>
+            <a:pPr marL="0" indent="0">
+              <a:buNone/>
+            </a:pPr>
             <a:r>
               <a:rPr sz="2000" b="0">
                 <a:latin typeface="Arial"/>
@@ -7274,7 +7541,12 @@
             <p:ph type="title"/>
           </p:nvPr>
         </p:nvSpPr>
-        <p:spPr/>
+        <p:spPr>
+          <a:xfrm>
+            <a:off x="548640" y="365760"/>
+            <a:ext cx="11064240" cy="1097280"/>
+          </a:xfrm>
+        </p:spPr>
         <p:txBody>
           <a:bodyPr/>
           <a:lstStyle/>
@@ -7298,21 +7570,30 @@
             <p:ph idx="1"/>
           </p:nvPr>
         </p:nvSpPr>
-        <p:spPr/>
+        <p:spPr>
+          <a:xfrm>
+            <a:off x="548640" y="1554480"/>
+            <a:ext cx="11064240" cy="4937760"/>
+          </a:xfrm>
+        </p:spPr>
         <p:txBody>
           <a:bodyPr wrap="square"/>
           <a:lstStyle/>
           <a:p>
-            <a:pPr/>
-            <a:r>
-              <a:rPr sz="1600" b="0">
+            <a:pPr marL="0" indent="0">
+              <a:buNone/>
+            </a:pPr>
+            <a:r>
+              <a:rPr sz="1800" b="0">
                 <a:latin typeface="Arial"/>
               </a:rPr>
               <a:t>Lab 3 - 45 minutes - /w/ahg-2026/8</a:t>
             </a:r>
           </a:p>
           <a:p>
-            <a:pPr/>
+            <a:pPr marL="0" indent="0">
+              <a:buNone/>
+            </a:pPr>
             <a:r>
               <a:rPr sz="2000" b="0">
                 <a:latin typeface="Arial"/>
@@ -7321,7 +7602,9 @@
             </a:r>
           </a:p>
           <a:p>
-            <a:pPr/>
+            <a:pPr marL="0" indent="0">
+              <a:buNone/>
+            </a:pPr>
             <a:r>
               <a:rPr sz="2800" b="1">
                 <a:latin typeface="Arial"/>
@@ -7330,7 +7613,9 @@
             </a:r>
           </a:p>
           <a:p>
-            <a:pPr/>
+            <a:pPr marL="0" indent="0">
+              <a:buNone/>
+            </a:pPr>
             <a:r>
               <a:rPr sz="2000" b="0">
                 <a:latin typeface="Arial"/>
@@ -7368,7 +7653,12 @@
             <p:ph type="title"/>
           </p:nvPr>
         </p:nvSpPr>
-        <p:spPr/>
+        <p:spPr>
+          <a:xfrm>
+            <a:off x="548640" y="365760"/>
+            <a:ext cx="11064240" cy="1097280"/>
+          </a:xfrm>
+        </p:spPr>
         <p:txBody>
           <a:bodyPr/>
           <a:lstStyle/>
@@ -7392,21 +7682,30 @@
             <p:ph idx="1"/>
           </p:nvPr>
         </p:nvSpPr>
-        <p:spPr/>
+        <p:spPr>
+          <a:xfrm>
+            <a:off x="548640" y="1554480"/>
+            <a:ext cx="11064240" cy="4937760"/>
+          </a:xfrm>
+        </p:spPr>
         <p:txBody>
           <a:bodyPr wrap="square"/>
           <a:lstStyle/>
           <a:p>
-            <a:pPr/>
-            <a:r>
-              <a:rPr sz="1600" b="0">
+            <a:pPr marL="0" indent="0">
+              <a:buNone/>
+            </a:pPr>
+            <a:r>
+              <a:rPr sz="1800" b="0">
                 <a:latin typeface="Arial"/>
               </a:rPr>
               <a:t>Break - 10 minutes</a:t>
             </a:r>
           </a:p>
           <a:p>
-            <a:pPr/>
+            <a:pPr marL="0" indent="0">
+              <a:buNone/>
+            </a:pPr>
             <a:r>
               <a:rPr sz="2000" b="0">
                 <a:latin typeface="Arial"/>
@@ -7444,7 +7743,12 @@
             <p:ph type="title"/>
           </p:nvPr>
         </p:nvSpPr>
-        <p:spPr/>
+        <p:spPr>
+          <a:xfrm>
+            <a:off x="548640" y="365760"/>
+            <a:ext cx="11064240" cy="1097280"/>
+          </a:xfrm>
+        </p:spPr>
         <p:txBody>
           <a:bodyPr/>
           <a:lstStyle/>
@@ -7468,21 +7772,30 @@
             <p:ph idx="1"/>
           </p:nvPr>
         </p:nvSpPr>
-        <p:spPr/>
+        <p:spPr>
+          <a:xfrm>
+            <a:off x="548640" y="1554480"/>
+            <a:ext cx="11064240" cy="4937760"/>
+          </a:xfrm>
+        </p:spPr>
         <p:txBody>
           <a:bodyPr wrap="square"/>
           <a:lstStyle/>
           <a:p>
-            <a:pPr/>
-            <a:r>
-              <a:rPr sz="1600" b="0">
+            <a:pPr marL="0" indent="0">
+              <a:buNone/>
+            </a:pPr>
+            <a:r>
+              <a:rPr sz="1800" b="0">
                 <a:latin typeface="Arial"/>
               </a:rPr>
               <a:t>Studio - 40 minutes - /w/ahg-2026/9</a:t>
             </a:r>
           </a:p>
           <a:p>
-            <a:pPr/>
+            <a:pPr marL="0" indent="0">
+              <a:buNone/>
+            </a:pPr>
             <a:r>
               <a:rPr sz="2000" b="0">
                 <a:latin typeface="Arial"/>
@@ -7518,7 +7831,9 @@
             </a:r>
           </a:p>
           <a:p>
-            <a:pPr/>
+            <a:pPr marL="0" indent="0">
+              <a:buNone/>
+            </a:pPr>
             <a:r>
               <a:rPr sz="2800" b="1">
                 <a:latin typeface="Arial"/>
@@ -7556,7 +7871,12 @@
             <p:ph type="title"/>
           </p:nvPr>
         </p:nvSpPr>
-        <p:spPr/>
+        <p:spPr>
+          <a:xfrm>
+            <a:off x="548640" y="365760"/>
+            <a:ext cx="11064240" cy="1097280"/>
+          </a:xfrm>
+        </p:spPr>
         <p:txBody>
           <a:bodyPr/>
           <a:lstStyle/>
@@ -7580,21 +7900,30 @@
             <p:ph idx="1"/>
           </p:nvPr>
         </p:nvSpPr>
-        <p:spPr/>
+        <p:spPr>
+          <a:xfrm>
+            <a:off x="548640" y="1554480"/>
+            <a:ext cx="11064240" cy="4937760"/>
+          </a:xfrm>
+        </p:spPr>
         <p:txBody>
           <a:bodyPr wrap="square"/>
           <a:lstStyle/>
           <a:p>
-            <a:pPr/>
-            <a:r>
-              <a:rPr sz="1600" b="0">
-                <a:latin typeface="Arial"/>
-              </a:rPr>
-              <a:t>Peer review - 15 minutes - gallery</a:t>
-            </a:r>
-          </a:p>
-          <a:p>
-            <a:pPr lvl="1"/>
+            <a:pPr marL="0" indent="0">
+              <a:buNone/>
+            </a:pPr>
+            <a:r>
+              <a:rPr sz="1800" b="0">
+                <a:latin typeface="Arial"/>
+              </a:rPr>
+              <a:t>Peer review - 10 minutes - gallery</a:t>
+            </a:r>
+          </a:p>
+          <a:p>
+            <a:pPr lvl="1">
+              <a:buNone/>
+            </a:pPr>
             <a:r>
               <a:rPr sz="2000" b="0">
                 <a:latin typeface="Arial"/>
@@ -7603,7 +7932,9 @@
             </a:r>
           </a:p>
           <a:p>
-            <a:pPr lvl="1"/>
+            <a:pPr lvl="1">
+              <a:buNone/>
+            </a:pPr>
             <a:r>
               <a:rPr sz="2000" b="0">
                 <a:latin typeface="Arial"/>
@@ -7612,7 +7943,9 @@
             </a:r>
           </a:p>
           <a:p>
-            <a:pPr lvl="1"/>
+            <a:pPr lvl="1">
+              <a:buNone/>
+            </a:pPr>
             <a:r>
               <a:rPr sz="2000" b="0">
                 <a:latin typeface="Arial"/>
@@ -7621,7 +7954,9 @@
             </a:r>
           </a:p>
           <a:p>
-            <a:pPr/>
+            <a:pPr marL="0" indent="0">
+              <a:buNone/>
+            </a:pPr>
             <a:r>
               <a:rPr sz="2000" b="0">
                 <a:latin typeface="Arial"/>
@@ -7659,7 +7994,12 @@
             <p:ph type="title"/>
           </p:nvPr>
         </p:nvSpPr>
-        <p:spPr/>
+        <p:spPr>
+          <a:xfrm>
+            <a:off x="548640" y="365760"/>
+            <a:ext cx="11064240" cy="1097280"/>
+          </a:xfrm>
+        </p:spPr>
         <p:txBody>
           <a:bodyPr/>
           <a:lstStyle/>
@@ -7683,21 +8023,30 @@
             <p:ph idx="1"/>
           </p:nvPr>
         </p:nvSpPr>
-        <p:spPr/>
+        <p:spPr>
+          <a:xfrm>
+            <a:off x="548640" y="1554480"/>
+            <a:ext cx="11064240" cy="4937760"/>
+          </a:xfrm>
+        </p:spPr>
         <p:txBody>
           <a:bodyPr wrap="square"/>
           <a:lstStyle/>
           <a:p>
-            <a:pPr/>
-            <a:r>
-              <a:rPr sz="1600" b="0">
+            <a:pPr marL="0" indent="0">
+              <a:buNone/>
+            </a:pPr>
+            <a:r>
+              <a:rPr sz="1800" b="0">
                 <a:latin typeface="Arial"/>
               </a:rPr>
               <a:t>Capstone - 15 minutes - /w/ahg-2026/10</a:t>
             </a:r>
           </a:p>
           <a:p>
-            <a:pPr/>
+            <a:pPr marL="0" indent="0">
+              <a:buNone/>
+            </a:pPr>
             <a:r>
               <a:rPr sz="2000" b="0">
                 <a:latin typeface="Arial"/>
@@ -7706,7 +8055,9 @@
             </a:r>
           </a:p>
           <a:p>
-            <a:pPr/>
+            <a:pPr marL="0" indent="0">
+              <a:buNone/>
+            </a:pPr>
             <a:r>
               <a:rPr sz="2000" b="0">
                 <a:latin typeface="Arial"/>
@@ -7744,7 +8095,12 @@
             <p:ph type="title"/>
           </p:nvPr>
         </p:nvSpPr>
-        <p:spPr/>
+        <p:spPr>
+          <a:xfrm>
+            <a:off x="548640" y="365760"/>
+            <a:ext cx="11064240" cy="1097280"/>
+          </a:xfrm>
+        </p:spPr>
         <p:txBody>
           <a:bodyPr/>
           <a:lstStyle/>
@@ -7768,21 +8124,30 @@
             <p:ph idx="1"/>
           </p:nvPr>
         </p:nvSpPr>
-        <p:spPr/>
+        <p:spPr>
+          <a:xfrm>
+            <a:off x="548640" y="1554480"/>
+            <a:ext cx="11064240" cy="4937760"/>
+          </a:xfrm>
+        </p:spPr>
         <p:txBody>
           <a:bodyPr wrap="square"/>
           <a:lstStyle/>
           <a:p>
-            <a:pPr/>
-            <a:r>
-              <a:rPr sz="1600" b="0">
+            <a:pPr marL="0" indent="0">
+              <a:buNone/>
+            </a:pPr>
+            <a:r>
+              <a:rPr sz="1800" b="0">
                 <a:latin typeface="Arial"/>
               </a:rPr>
               <a:t>Take it with you</a:t>
             </a:r>
           </a:p>
           <a:p>
-            <a:pPr/>
+            <a:pPr marL="0" indent="0">
+              <a:buNone/>
+            </a:pPr>
             <a:r>
               <a:rPr sz="2000" b="0">
                 <a:latin typeface="Arial"/>
@@ -7809,7 +8174,9 @@
             </a:r>
           </a:p>
           <a:p>
-            <a:pPr/>
+            <a:pPr marL="0" indent="0">
+              <a:buNone/>
+            </a:pPr>
             <a:r>
               <a:rPr sz="2800" b="1">
                 <a:latin typeface="Arial"/>
@@ -7847,7 +8214,12 @@
             <p:ph type="title"/>
           </p:nvPr>
         </p:nvSpPr>
-        <p:spPr/>
+        <p:spPr>
+          <a:xfrm>
+            <a:off x="548640" y="365760"/>
+            <a:ext cx="11064240" cy="1097280"/>
+          </a:xfrm>
+        </p:spPr>
         <p:txBody>
           <a:bodyPr/>
           <a:lstStyle/>
@@ -7871,14 +8243,21 @@
             <p:ph idx="1"/>
           </p:nvPr>
         </p:nvSpPr>
-        <p:spPr/>
+        <p:spPr>
+          <a:xfrm>
+            <a:off x="548640" y="1554480"/>
+            <a:ext cx="11064240" cy="4937760"/>
+          </a:xfrm>
+        </p:spPr>
         <p:txBody>
           <a:bodyPr wrap="square"/>
           <a:lstStyle/>
           <a:p>
-            <a:pPr/>
-            <a:r>
-              <a:rPr sz="1600" b="0">
+            <a:pPr marL="0" indent="0">
+              <a:buNone/>
+            </a:pPr>
+            <a:r>
+              <a:rPr sz="1800" b="0">
                 <a:latin typeface="Arial"/>
               </a:rPr>
               <a:t>Activity 11 - 10 minutes - /w/ahg-2026/11</a:t>
@@ -7968,7 +8347,12 @@
             <p:ph type="title"/>
           </p:nvPr>
         </p:nvSpPr>
-        <p:spPr/>
+        <p:spPr>
+          <a:xfrm>
+            <a:off x="548640" y="365760"/>
+            <a:ext cx="11064240" cy="1097280"/>
+          </a:xfrm>
+        </p:spPr>
         <p:txBody>
           <a:bodyPr/>
           <a:lstStyle/>
@@ -7992,21 +8376,30 @@
             <p:ph idx="1"/>
           </p:nvPr>
         </p:nvSpPr>
-        <p:spPr/>
+        <p:spPr>
+          <a:xfrm>
+            <a:off x="548640" y="1554480"/>
+            <a:ext cx="11064240" cy="4937760"/>
+          </a:xfrm>
+        </p:spPr>
         <p:txBody>
           <a:bodyPr wrap="square"/>
           <a:lstStyle/>
           <a:p>
-            <a:pPr/>
-            <a:r>
-              <a:rPr sz="1600" b="0">
-                <a:latin typeface="Arial"/>
-              </a:rPr>
-              <a:t>4:25</a:t>
-            </a:r>
-          </a:p>
-          <a:p>
-            <a:pPr/>
+            <a:pPr marL="0" indent="0">
+              <a:buNone/>
+            </a:pPr>
+            <a:r>
+              <a:rPr sz="1800" b="0">
+                <a:latin typeface="Arial"/>
+              </a:rPr>
+              <a:t>4:20</a:t>
+            </a:r>
+          </a:p>
+          <a:p>
+            <a:pPr marL="0" indent="0">
+              <a:buNone/>
+            </a:pPr>
             <a:r>
               <a:rPr sz="2000" b="0">
                 <a:latin typeface="Arial"/>
@@ -8015,7 +8408,9 @@
             </a:r>
           </a:p>
           <a:p>
-            <a:pPr/>
+            <a:pPr marL="0" indent="0">
+              <a:buNone/>
+            </a:pPr>
             <a:r>
               <a:rPr sz="2000" b="0">
                 <a:latin typeface="Arial"/>
@@ -8053,7 +8448,12 @@
             <p:ph type="title"/>
           </p:nvPr>
         </p:nvSpPr>
-        <p:spPr/>
+        <p:spPr>
+          <a:xfrm>
+            <a:off x="548640" y="365760"/>
+            <a:ext cx="11064240" cy="1097280"/>
+          </a:xfrm>
+        </p:spPr>
         <p:txBody>
           <a:bodyPr/>
           <a:lstStyle/>
@@ -8077,14 +8477,21 @@
             <p:ph idx="1"/>
           </p:nvPr>
         </p:nvSpPr>
-        <p:spPr/>
+        <p:spPr>
+          <a:xfrm>
+            <a:off x="548640" y="1554480"/>
+            <a:ext cx="11064240" cy="4937760"/>
+          </a:xfrm>
+        </p:spPr>
         <p:txBody>
           <a:bodyPr wrap="square"/>
           <a:lstStyle/>
           <a:p>
-            <a:pPr/>
-            <a:r>
-              <a:rPr sz="1600" b="0">
+            <a:pPr marL="0" indent="0">
+              <a:buNone/>
+            </a:pPr>
+            <a:r>
+              <a:rPr sz="1800" b="0">
                 <a:latin typeface="Arial"/>
               </a:rPr>
               <a:t>After today</a:t>
@@ -8127,7 +8534,9 @@
             </a:r>
           </a:p>
           <a:p>
-            <a:pPr/>
+            <a:pPr marL="0" indent="0">
+              <a:buNone/>
+            </a:pPr>
             <a:r>
               <a:rPr sz="3200" b="1">
                 <a:latin typeface="Arial"/>
@@ -8165,7 +8574,12 @@
             <p:ph type="title"/>
           </p:nvPr>
         </p:nvSpPr>
-        <p:spPr/>
+        <p:spPr>
+          <a:xfrm>
+            <a:off x="548640" y="365760"/>
+            <a:ext cx="11064240" cy="1097280"/>
+          </a:xfrm>
+        </p:spPr>
         <p:txBody>
           <a:bodyPr/>
           <a:lstStyle/>
@@ -8189,14 +8603,21 @@
             <p:ph idx="1"/>
           </p:nvPr>
         </p:nvSpPr>
-        <p:spPr/>
+        <p:spPr>
+          <a:xfrm>
+            <a:off x="548640" y="1554480"/>
+            <a:ext cx="11064240" cy="4937760"/>
+          </a:xfrm>
+        </p:spPr>
         <p:txBody>
           <a:bodyPr wrap="square"/>
           <a:lstStyle/>
           <a:p>
-            <a:pPr/>
-            <a:r>
-              <a:rPr sz="1600" b="0">
+            <a:pPr marL="0" indent="0">
+              <a:buNone/>
+            </a:pPr>
+            <a:r>
+              <a:rPr sz="1800" b="0">
                 <a:latin typeface="Arial"/>
               </a:rPr>
               <a:t>Housekeeping</a:t>
@@ -8226,7 +8647,7 @@
               <a:rPr sz="2000" b="0">
                 <a:latin typeface="Arial"/>
               </a:rPr>
-              <a:t>You need a device - a phone is fine. The worksheet pack was published before today if you would rather work from your own printout.</a:t>
+              <a:t>Any device, a phone included. Nothing to install, so a locked-down work laptop is fine.</a:t>
             </a:r>
           </a:p>
           <a:p>
@@ -8244,7 +8665,7 @@
               <a:rPr sz="2000" b="0">
                 <a:latin typeface="Arial"/>
               </a:rPr>
-              <a:t>Ask for anything you need at any time - large print, a different seat, a pause, a repeat. That is not an interruption of this workshop. It is this workshop.</a:t>
+              <a:t>Ask for anything, any time - large print, a seat, a pause, a repeat.</a:t>
             </a:r>
           </a:p>
         </p:txBody>
@@ -8277,7 +8698,12 @@
             <p:ph type="title"/>
           </p:nvPr>
         </p:nvSpPr>
-        <p:spPr/>
+        <p:spPr>
+          <a:xfrm>
+            <a:off x="548640" y="365760"/>
+            <a:ext cx="11064240" cy="1097280"/>
+          </a:xfrm>
+        </p:spPr>
         <p:txBody>
           <a:bodyPr/>
           <a:lstStyle/>
@@ -8301,21 +8727,30 @@
             <p:ph idx="1"/>
           </p:nvPr>
         </p:nvSpPr>
-        <p:spPr/>
+        <p:spPr>
+          <a:xfrm>
+            <a:off x="548640" y="1554480"/>
+            <a:ext cx="11064240" cy="4937760"/>
+          </a:xfrm>
+        </p:spPr>
         <p:txBody>
           <a:bodyPr wrap="square"/>
           <a:lstStyle/>
           <a:p>
-            <a:pPr/>
-            <a:r>
-              <a:rPr sz="1600" b="0">
+            <a:pPr marL="0" indent="0">
+              <a:buNone/>
+            </a:pPr>
+            <a:r>
+              <a:rPr sz="1800" b="0">
                 <a:latin typeface="Arial"/>
               </a:rPr>
               <a:t>Thank you</a:t>
             </a:r>
           </a:p>
           <a:p>
-            <a:pPr/>
+            <a:pPr marL="0" indent="0">
+              <a:buNone/>
+            </a:pPr>
             <a:r>
               <a:rPr sz="2400" b="0">
                 <a:latin typeface="Arial"/>
@@ -8324,7 +8759,9 @@
             </a:r>
           </a:p>
           <a:p>
-            <a:pPr/>
+            <a:pPr marL="0" indent="0">
+              <a:buNone/>
+            </a:pPr>
             <a:r>
               <a:rPr sz="2800" b="1">
                 <a:latin typeface="Arial"/>
@@ -8333,9 +8770,22 @@
             </a:r>
           </a:p>
           <a:p>
-            <a:pPr/>
-            <a:r>
-              <a:rPr sz="1600" b="0">
+            <a:pPr marL="0" indent="0">
+              <a:buNone/>
+            </a:pPr>
+            <a:r>
+              <a:rPr sz="2000" b="0">
+                <a:latin typeface="Arial"/>
+              </a:rPr>
+              <a:t>Before you go: the session evaluation. It shapes next year's conference.</a:t>
+            </a:r>
+          </a:p>
+          <a:p>
+            <a:pPr marL="0" indent="0">
+              <a:buNone/>
+            </a:pPr>
+            <a:r>
+              <a:rPr sz="2000" b="0">
                 <a:latin typeface="Arial"/>
               </a:rPr>
               <a:t>GLOW is a community project of BITS, an affiliate of the American Council of the Blind.</a:t>
@@ -8371,7 +8821,12 @@
             <p:ph type="title"/>
           </p:nvPr>
         </p:nvSpPr>
-        <p:spPr/>
+        <p:spPr>
+          <a:xfrm>
+            <a:off x="548640" y="365760"/>
+            <a:ext cx="11064240" cy="1097280"/>
+          </a:xfrm>
+        </p:spPr>
         <p:txBody>
           <a:bodyPr/>
           <a:lstStyle/>
@@ -8395,21 +8850,30 @@
             <p:ph idx="1"/>
           </p:nvPr>
         </p:nvSpPr>
-        <p:spPr/>
+        <p:spPr>
+          <a:xfrm>
+            <a:off x="548640" y="1554480"/>
+            <a:ext cx="11064240" cy="4937760"/>
+          </a:xfrm>
+        </p:spPr>
         <p:txBody>
           <a:bodyPr wrap="square"/>
           <a:lstStyle/>
           <a:p>
-            <a:pPr/>
-            <a:r>
-              <a:rPr sz="1600" b="0">
+            <a:pPr marL="0" indent="0">
+              <a:buNone/>
+            </a:pPr>
+            <a:r>
+              <a:rPr sz="1800" b="0">
                 <a:latin typeface="Arial"/>
               </a:rPr>
               <a:t>Join the room</a:t>
             </a:r>
           </a:p>
           <a:p>
-            <a:pPr/>
+            <a:pPr marL="0" indent="0">
+              <a:buNone/>
+            </a:pPr>
             <a:r>
               <a:rPr sz="3200" b="1">
                 <a:latin typeface="Arial"/>
@@ -8418,7 +8882,9 @@
             </a:r>
           </a:p>
           <a:p>
-            <a:pPr/>
+            <a:pPr marL="0" indent="0">
+              <a:buNone/>
+            </a:pPr>
             <a:r>
               <a:rPr sz="2000" b="0">
                 <a:latin typeface="Arial"/>
@@ -8427,7 +8893,9 @@
             </a:r>
           </a:p>
           <a:p>
-            <a:pPr/>
+            <a:pPr marL="0" indent="0">
+              <a:buNone/>
+            </a:pPr>
             <a:r>
               <a:rPr sz="2000" b="0">
                 <a:latin typeface="Arial"/>
@@ -8465,7 +8933,12 @@
             <p:ph type="title"/>
           </p:nvPr>
         </p:nvSpPr>
-        <p:spPr/>
+        <p:spPr>
+          <a:xfrm>
+            <a:off x="548640" y="365760"/>
+            <a:ext cx="11064240" cy="1097280"/>
+          </a:xfrm>
+        </p:spPr>
         <p:txBody>
           <a:bodyPr/>
           <a:lstStyle/>
@@ -8489,21 +8962,30 @@
             <p:ph idx="1"/>
           </p:nvPr>
         </p:nvSpPr>
-        <p:spPr/>
+        <p:spPr>
+          <a:xfrm>
+            <a:off x="548640" y="1554480"/>
+            <a:ext cx="11064240" cy="4937760"/>
+          </a:xfrm>
+        </p:spPr>
         <p:txBody>
           <a:bodyPr wrap="square"/>
           <a:lstStyle/>
           <a:p>
-            <a:pPr/>
-            <a:r>
-              <a:rPr sz="1600" b="0">
+            <a:pPr marL="0" indent="0">
+              <a:buNone/>
+            </a:pPr>
+            <a:r>
+              <a:rPr sz="1800" b="0">
                 <a:latin typeface="Arial"/>
               </a:rPr>
               <a:t>Do this early</a:t>
             </a:r>
           </a:p>
           <a:p>
-            <a:pPr/>
+            <a:pPr marL="0" indent="0">
+              <a:buNone/>
+            </a:pPr>
             <a:r>
               <a:rPr sz="2000" b="0">
                 <a:latin typeface="Arial"/>
@@ -8512,7 +8994,9 @@
             </a:r>
           </a:p>
           <a:p>
-            <a:pPr/>
+            <a:pPr marL="0" indent="0">
+              <a:buNone/>
+            </a:pPr>
             <a:r>
               <a:rPr sz="2000" b="0">
                 <a:latin typeface="Arial"/>
@@ -8577,7 +9061,12 @@
             <p:ph type="title"/>
           </p:nvPr>
         </p:nvSpPr>
-        <p:spPr/>
+        <p:spPr>
+          <a:xfrm>
+            <a:off x="548640" y="365760"/>
+            <a:ext cx="11064240" cy="1097280"/>
+          </a:xfrm>
+        </p:spPr>
         <p:txBody>
           <a:bodyPr/>
           <a:lstStyle/>
@@ -8601,21 +9090,30 @@
             <p:ph idx="1"/>
           </p:nvPr>
         </p:nvSpPr>
-        <p:spPr/>
+        <p:spPr>
+          <a:xfrm>
+            <a:off x="548640" y="1554480"/>
+            <a:ext cx="11064240" cy="4937760"/>
+          </a:xfrm>
+        </p:spPr>
         <p:txBody>
           <a:bodyPr wrap="square"/>
           <a:lstStyle/>
           <a:p>
-            <a:pPr/>
-            <a:r>
-              <a:rPr sz="1600" b="0">
+            <a:pPr marL="0" indent="0">
+              <a:buNone/>
+            </a:pPr>
+            <a:r>
+              <a:rPr sz="1800" b="0">
                 <a:latin typeface="Arial"/>
               </a:rPr>
               <a:t>Why we are here</a:t>
             </a:r>
           </a:p>
           <a:p>
-            <a:pPr/>
+            <a:pPr marL="0" indent="0">
+              <a:buNone/>
+            </a:pPr>
             <a:r>
               <a:rPr sz="2000" b="0">
                 <a:latin typeface="Arial"/>
@@ -8624,7 +9122,9 @@
             </a:r>
           </a:p>
           <a:p>
-            <a:pPr/>
+            <a:pPr marL="0" indent="0">
+              <a:buNone/>
+            </a:pPr>
             <a:r>
               <a:rPr sz="2800" b="1">
                 <a:latin typeface="Arial"/>
@@ -8662,7 +9162,12 @@
             <p:ph type="title"/>
           </p:nvPr>
         </p:nvSpPr>
-        <p:spPr/>
+        <p:spPr>
+          <a:xfrm>
+            <a:off x="548640" y="365760"/>
+            <a:ext cx="11064240" cy="1097280"/>
+          </a:xfrm>
+        </p:spPr>
         <p:txBody>
           <a:bodyPr/>
           <a:lstStyle/>
@@ -8671,7 +9176,7 @@
               <a:rPr sz="3600" b="1">
                 <a:latin typeface="Arial"/>
               </a:rPr>
-              <a:t>G L O W</a:t>
+              <a:t>The GLOW framework</a:t>
             </a:r>
           </a:p>
         </p:txBody>
@@ -8686,17 +9191,24 @@
             <p:ph idx="1"/>
           </p:nvPr>
         </p:nvSpPr>
-        <p:spPr/>
+        <p:spPr>
+          <a:xfrm>
+            <a:off x="548640" y="1554480"/>
+            <a:ext cx="11064240" cy="4937760"/>
+          </a:xfrm>
+        </p:spPr>
         <p:txBody>
           <a:bodyPr wrap="square"/>
           <a:lstStyle/>
           <a:p>
-            <a:pPr/>
-            <a:r>
-              <a:rPr sz="1600" b="0">
-                <a:latin typeface="Arial"/>
-              </a:rPr>
-              <a:t>The framework</a:t>
+            <a:pPr marL="0" indent="0">
+              <a:buNone/>
+            </a:pPr>
+            <a:r>
+              <a:rPr sz="1800" b="0">
+                <a:latin typeface="Arial"/>
+              </a:rPr>
+              <a:t>Four words for the day</a:t>
             </a:r>
           </a:p>
           <a:p>
@@ -8765,7 +9277,12 @@
             <p:ph type="title"/>
           </p:nvPr>
         </p:nvSpPr>
-        <p:spPr/>
+        <p:spPr>
+          <a:xfrm>
+            <a:off x="548640" y="365760"/>
+            <a:ext cx="11064240" cy="1097280"/>
+          </a:xfrm>
+        </p:spPr>
         <p:txBody>
           <a:bodyPr/>
           <a:lstStyle/>
@@ -8789,21 +9306,30 @@
             <p:ph idx="1"/>
           </p:nvPr>
         </p:nvSpPr>
-        <p:spPr/>
+        <p:spPr>
+          <a:xfrm>
+            <a:off x="548640" y="1554480"/>
+            <a:ext cx="11064240" cy="4937760"/>
+          </a:xfrm>
+        </p:spPr>
         <p:txBody>
           <a:bodyPr wrap="square"/>
           <a:lstStyle/>
           <a:p>
-            <a:pPr/>
-            <a:r>
-              <a:rPr sz="1600" b="0">
+            <a:pPr marL="0" indent="0">
+              <a:buNone/>
+            </a:pPr>
+            <a:r>
+              <a:rPr sz="1800" b="0">
                 <a:latin typeface="Arial"/>
               </a:rPr>
               <a:t>The boundary</a:t>
             </a:r>
           </a:p>
           <a:p>
-            <a:pPr/>
+            <a:pPr marL="0" indent="0">
+              <a:buNone/>
+            </a:pPr>
             <a:r>
               <a:rPr sz="2000" b="0">
                 <a:latin typeface="Arial"/>
@@ -8812,7 +9338,9 @@
             </a:r>
           </a:p>
           <a:p>
-            <a:pPr/>
+            <a:pPr marL="0" indent="0">
+              <a:buNone/>
+            </a:pPr>
             <a:r>
               <a:rPr sz="2000" b="0">
                 <a:latin typeface="Arial"/>
@@ -8821,7 +9349,9 @@
             </a:r>
           </a:p>
           <a:p>
-            <a:pPr/>
+            <a:pPr marL="0" indent="0">
+              <a:buNone/>
+            </a:pPr>
             <a:r>
               <a:rPr sz="2800" b="1">
                 <a:latin typeface="Arial"/>
@@ -8859,685 +9389,84 @@
             <p:ph type="title"/>
           </p:nvPr>
         </p:nvSpPr>
-        <p:spPr/>
-        <p:txBody>
-          <a:bodyPr/>
-          <a:lstStyle/>
-          <a:p>
-            <a:r>
-              <a:rPr sz="3600" b="1">
-                <a:latin typeface="Arial"/>
-              </a:rPr>
-              <a:t>Where we are going</a:t>
-            </a:r>
-          </a:p>
-        </p:txBody>
-      </p:sp>
-      <p:sp>
-        <p:nvSpPr>
-          <p:cNvPr id="3" name="TextBox 2"/>
-          <p:cNvSpPr txBox="1"/>
-          <p:nvPr/>
-        </p:nvSpPr>
         <p:spPr>
           <a:xfrm>
-            <a:off x="548640" y="1463040"/>
-            <a:ext cx="11064240" cy="822960"/>
+            <a:off x="548640" y="365760"/>
+            <a:ext cx="11064240" cy="1097280"/>
           </a:xfrm>
-          <a:prstGeom prst="rect">
-            <a:avLst/>
-          </a:prstGeom>
-          <a:noFill/>
         </p:spPr>
         <p:txBody>
-          <a:bodyPr wrap="square">
-            <a:spAutoFit/>
-          </a:bodyPr>
-          <a:lstStyle/>
-          <a:p>
-            <a:r>
-              <a:rPr sz="1600">
-                <a:latin typeface="Arial"/>
-              </a:rPr>
-              <a:t>The shape of the day Today, by the clock. Breaks and lunch included, so nobody has to ask.</a:t>
-            </a:r>
-          </a:p>
-        </p:txBody>
-      </p:sp>
-      <p:graphicFrame>
-        <p:nvGraphicFramePr>
-          <p:cNvPr id="4" name="Table 3" descr="Today, by the clock. Breaks and lunch included, so nobody has to ask."/>
-          <p:cNvGraphicFramePr>
-            <a:graphicFrameLocks noGrp="1"/>
-          </p:cNvGraphicFramePr>
-          <p:nvPr/>
-        </p:nvGraphicFramePr>
-        <p:xfrm>
-          <a:off x="548640" y="2286000"/>
-          <a:ext cx="11064240" cy="4206240"/>
-        </p:xfrm>
-        <a:graphic>
-          <a:graphicData uri="http://schemas.openxmlformats.org/drawingml/2006/table">
-            <a:tbl>
-              <a:tblPr firstRow="1" bandRow="1">
-                <a:tableStyleId>{5C22544A-7EE6-4342-B048-85BDC9FD1C3A}</a:tableStyleId>
-              </a:tblPr>
-              <a:tblGrid>
-                <a:gridCol w="5532120"/>
-                <a:gridCol w="5532120"/>
-              </a:tblGrid>
-              <a:tr h="221381">
-                <a:tc>
-                  <a:txBody>
-                    <a:bodyPr/>
-                    <a:lstStyle/>
-                    <a:p>
-                      <a:r>
-                        <a:rPr sz="1400" b="1">
-                          <a:latin typeface="Arial"/>
-                        </a:rPr>
-                        <a:t>Time</a:t>
-                      </a:r>
-                    </a:p>
-                  </a:txBody>
-                  <a:tcPr/>
-                </a:tc>
-                <a:tc>
-                  <a:txBody>
-                    <a:bodyPr/>
-                    <a:lstStyle/>
-                    <a:p>
-                      <a:r>
-                        <a:rPr sz="1400" b="1">
-                          <a:latin typeface="Arial"/>
-                        </a:rPr>
-                        <a:t>What</a:t>
-                      </a:r>
-                    </a:p>
-                  </a:txBody>
-                  <a:tcPr/>
-                </a:tc>
-              </a:tr>
-              <a:tr h="221381">
-                <a:tc>
-                  <a:txBody>
-                    <a:bodyPr/>
-                    <a:lstStyle/>
-                    <a:p>
-                      <a:r>
-                        <a:rPr sz="1400">
-                          <a:latin typeface="Arial"/>
-                        </a:rPr>
-                        <a:t>8:30-8:50</a:t>
-                      </a:r>
-                    </a:p>
-                  </a:txBody>
-                  <a:tcPr/>
-                </a:tc>
-                <a:tc>
-                  <a:txBody>
-                    <a:bodyPr/>
-                    <a:lstStyle/>
-                    <a:p>
-                      <a:r>
-                        <a:rPr sz="1400">
-                          <a:latin typeface="Arial"/>
-                        </a:rPr>
-                        <a:t>Welcome and how the day works</a:t>
-                      </a:r>
-                    </a:p>
-                  </a:txBody>
-                  <a:tcPr/>
-                </a:tc>
-              </a:tr>
-              <a:tr h="221381">
-                <a:tc>
-                  <a:txBody>
-                    <a:bodyPr/>
-                    <a:lstStyle/>
-                    <a:p>
-                      <a:r>
-                        <a:rPr sz="1400">
-                          <a:latin typeface="Arial"/>
-                        </a:rPr>
-                        <a:t>8:50-9:10</a:t>
-                      </a:r>
-                    </a:p>
-                  </a:txBody>
-                  <a:tcPr/>
-                </a:tc>
-                <a:tc>
-                  <a:txBody>
-                    <a:bodyPr/>
-                    <a:lstStyle/>
-                    <a:p>
-                      <a:r>
-                        <a:rPr sz="1400">
-                          <a:latin typeface="Arial"/>
-                        </a:rPr>
-                        <a:t>Accessibility Journey Check-In</a:t>
-                      </a:r>
-                    </a:p>
-                  </a:txBody>
-                  <a:tcPr/>
-                </a:tc>
-              </a:tr>
-              <a:tr h="221381">
-                <a:tc>
-                  <a:txBody>
-                    <a:bodyPr/>
-                    <a:lstStyle/>
-                    <a:p>
-                      <a:r>
-                        <a:rPr sz="1400">
-                          <a:latin typeface="Arial"/>
-                        </a:rPr>
-                        <a:t>9:10-9:40</a:t>
-                      </a:r>
-                    </a:p>
-                  </a:txBody>
-                  <a:tcPr/>
-                </a:tc>
-                <a:tc>
-                  <a:txBody>
-                    <a:bodyPr/>
-                    <a:lstStyle/>
-                    <a:p>
-                      <a:r>
-                        <a:rPr sz="1400">
-                          <a:latin typeface="Arial"/>
-                        </a:rPr>
-                        <a:t>What Problem Are We Solving?</a:t>
-                      </a:r>
-                    </a:p>
-                  </a:txBody>
-                  <a:tcPr/>
-                </a:tc>
-              </a:tr>
-              <a:tr h="221381">
-                <a:tc>
-                  <a:txBody>
-                    <a:bodyPr/>
-                    <a:lstStyle/>
-                    <a:p>
-                      <a:r>
-                        <a:rPr sz="1400">
-                          <a:latin typeface="Arial"/>
-                        </a:rPr>
-                        <a:t>9:40-10:10</a:t>
-                      </a:r>
-                    </a:p>
-                  </a:txBody>
-                  <a:tcPr/>
-                </a:tc>
-                <a:tc>
-                  <a:txBody>
-                    <a:bodyPr/>
-                    <a:lstStyle/>
-                    <a:p>
-                      <a:r>
-                        <a:rPr sz="1400">
-                          <a:latin typeface="Arial"/>
-                        </a:rPr>
-                        <a:t>Fix It for Me vs Teach Me to Improve It</a:t>
-                      </a:r>
-                    </a:p>
-                  </a:txBody>
-                  <a:tcPr/>
-                </a:tc>
-              </a:tr>
-              <a:tr h="221381">
-                <a:tc>
-                  <a:txBody>
-                    <a:bodyPr/>
-                    <a:lstStyle/>
-                    <a:p>
-                      <a:r>
-                        <a:rPr sz="1400">
-                          <a:latin typeface="Arial"/>
-                        </a:rPr>
-                        <a:t>10:10-10:25</a:t>
-                      </a:r>
-                    </a:p>
-                  </a:txBody>
-                  <a:tcPr/>
-                </a:tc>
-                <a:tc>
-                  <a:txBody>
-                    <a:bodyPr/>
-                    <a:lstStyle/>
-                    <a:p>
-                      <a:r>
-                        <a:rPr sz="1400">
-                          <a:latin typeface="Arial"/>
-                        </a:rPr>
-                        <a:t>Break</a:t>
-                      </a:r>
-                    </a:p>
-                  </a:txBody>
-                  <a:tcPr/>
-                </a:tc>
-              </a:tr>
-              <a:tr h="221381">
-                <a:tc>
-                  <a:txBody>
-                    <a:bodyPr/>
-                    <a:lstStyle/>
-                    <a:p>
-                      <a:r>
-                        <a:rPr sz="1400">
-                          <a:latin typeface="Arial"/>
-                        </a:rPr>
-                        <a:t>10:25-10:55</a:t>
-                      </a:r>
-                    </a:p>
-                  </a:txBody>
-                  <a:tcPr/>
-                </a:tc>
-                <a:tc>
-                  <a:txBody>
-                    <a:bodyPr/>
-                    <a:lstStyle/>
-                    <a:p>
-                      <a:r>
-                        <a:rPr sz="1400">
-                          <a:latin typeface="Arial"/>
-                        </a:rPr>
-                        <a:t>Helpful, Risky, or Human Required?</a:t>
-                      </a:r>
-                    </a:p>
-                  </a:txBody>
-                  <a:tcPr/>
-                </a:tc>
-              </a:tr>
-              <a:tr h="221381">
-                <a:tc>
-                  <a:txBody>
-                    <a:bodyPr/>
-                    <a:lstStyle/>
-                    <a:p>
-                      <a:r>
-                        <a:rPr sz="1400">
-                          <a:latin typeface="Arial"/>
-                        </a:rPr>
-                        <a:t>10:55-11:30</a:t>
-                      </a:r>
-                    </a:p>
-                  </a:txBody>
-                  <a:tcPr/>
-                </a:tc>
-                <a:tc>
-                  <a:txBody>
-                    <a:bodyPr/>
-                    <a:lstStyle/>
-                    <a:p>
-                      <a:r>
-                        <a:rPr sz="1400">
-                          <a:latin typeface="Arial"/>
-                        </a:rPr>
-                        <a:t>Accessibility Agent Formula</a:t>
-                      </a:r>
-                    </a:p>
-                  </a:txBody>
-                  <a:tcPr/>
-                </a:tc>
-              </a:tr>
-              <a:tr h="221381">
-                <a:tc>
-                  <a:txBody>
-                    <a:bodyPr/>
-                    <a:lstStyle/>
-                    <a:p>
-                      <a:r>
-                        <a:rPr sz="1400">
-                          <a:latin typeface="Arial"/>
-                        </a:rPr>
-                        <a:t>11:30-12:15</a:t>
-                      </a:r>
-                    </a:p>
-                  </a:txBody>
-                  <a:tcPr/>
-                </a:tc>
-                <a:tc>
-                  <a:txBody>
-                    <a:bodyPr/>
-                    <a:lstStyle/>
-                    <a:p>
-                      <a:r>
-                        <a:rPr sz="1400">
-                          <a:latin typeface="Arial"/>
-                        </a:rPr>
-                        <a:t>GLOW Lab 1: Accessible Communications</a:t>
-                      </a:r>
-                    </a:p>
-                  </a:txBody>
-                  <a:tcPr/>
-                </a:tc>
-              </a:tr>
-              <a:tr h="221381">
-                <a:tc>
-                  <a:txBody>
-                    <a:bodyPr/>
-                    <a:lstStyle/>
-                    <a:p>
-                      <a:r>
-                        <a:rPr sz="1400">
-                          <a:latin typeface="Arial"/>
-                        </a:rPr>
-                        <a:t>12:15-1:15</a:t>
-                      </a:r>
-                    </a:p>
-                  </a:txBody>
-                  <a:tcPr/>
-                </a:tc>
-                <a:tc>
-                  <a:txBody>
-                    <a:bodyPr/>
-                    <a:lstStyle/>
-                    <a:p>
-                      <a:r>
-                        <a:rPr sz="1400">
-                          <a:latin typeface="Arial"/>
-                        </a:rPr>
-                        <a:t>Lunch</a:t>
-                      </a:r>
-                    </a:p>
-                  </a:txBody>
-                  <a:tcPr/>
-                </a:tc>
-              </a:tr>
-              <a:tr h="221381">
-                <a:tc>
-                  <a:txBody>
-                    <a:bodyPr/>
-                    <a:lstStyle/>
-                    <a:p>
-                      <a:r>
-                        <a:rPr sz="1400">
-                          <a:latin typeface="Arial"/>
-                        </a:rPr>
-                        <a:t>1:15-1:25</a:t>
-                      </a:r>
-                    </a:p>
-                  </a:txBody>
-                  <a:tcPr/>
-                </a:tc>
-                <a:tc>
-                  <a:txBody>
-                    <a:bodyPr/>
-                    <a:lstStyle/>
-                    <a:p>
-                      <a:r>
-                        <a:rPr sz="1400">
-                          <a:latin typeface="Arial"/>
-                        </a:rPr>
-                        <a:t>Re-entry and room pulse</a:t>
-                      </a:r>
-                    </a:p>
-                  </a:txBody>
-                  <a:tcPr/>
-                </a:tc>
-              </a:tr>
-              <a:tr h="221381">
-                <a:tc>
-                  <a:txBody>
-                    <a:bodyPr/>
-                    <a:lstStyle/>
-                    <a:p>
-                      <a:r>
-                        <a:rPr sz="1400">
-                          <a:latin typeface="Arial"/>
-                        </a:rPr>
-                        <a:t>1:25-2:10</a:t>
-                      </a:r>
-                    </a:p>
-                  </a:txBody>
-                  <a:tcPr/>
-                </a:tc>
-                <a:tc>
-                  <a:txBody>
-                    <a:bodyPr/>
-                    <a:lstStyle/>
-                    <a:p>
-                      <a:r>
-                        <a:rPr sz="1400">
-                          <a:latin typeface="Arial"/>
-                        </a:rPr>
-                        <a:t>GLOW Lab 2: Alt Text and Human Judgment</a:t>
-                      </a:r>
-                    </a:p>
-                  </a:txBody>
-                  <a:tcPr/>
-                </a:tc>
-              </a:tr>
-              <a:tr h="221381">
-                <a:tc>
-                  <a:txBody>
-                    <a:bodyPr/>
-                    <a:lstStyle/>
-                    <a:p>
-                      <a:r>
-                        <a:rPr sz="1400">
-                          <a:latin typeface="Arial"/>
-                        </a:rPr>
-                        <a:t>2:10-2:55</a:t>
-                      </a:r>
-                    </a:p>
-                  </a:txBody>
-                  <a:tcPr/>
-                </a:tc>
-                <a:tc>
-                  <a:txBody>
-                    <a:bodyPr/>
-                    <a:lstStyle/>
-                    <a:p>
-                      <a:r>
-                        <a:rPr sz="1400">
-                          <a:latin typeface="Arial"/>
-                        </a:rPr>
-                        <a:t>GLOW Lab 3: Remediation Planning</a:t>
-                      </a:r>
-                    </a:p>
-                  </a:txBody>
-                  <a:tcPr/>
-                </a:tc>
-              </a:tr>
-              <a:tr h="221381">
-                <a:tc>
-                  <a:txBody>
-                    <a:bodyPr/>
-                    <a:lstStyle/>
-                    <a:p>
-                      <a:r>
-                        <a:rPr sz="1400">
-                          <a:latin typeface="Arial"/>
-                        </a:rPr>
-                        <a:t>2:55-3:05</a:t>
-                      </a:r>
-                    </a:p>
-                  </a:txBody>
-                  <a:tcPr/>
-                </a:tc>
-                <a:tc>
-                  <a:txBody>
-                    <a:bodyPr/>
-                    <a:lstStyle/>
-                    <a:p>
-                      <a:r>
-                        <a:rPr sz="1400">
-                          <a:latin typeface="Arial"/>
-                        </a:rPr>
-                        <a:t>Break</a:t>
-                      </a:r>
-                    </a:p>
-                  </a:txBody>
-                  <a:tcPr/>
-                </a:tc>
-              </a:tr>
-              <a:tr h="221381">
-                <a:tc>
-                  <a:txBody>
-                    <a:bodyPr/>
-                    <a:lstStyle/>
-                    <a:p>
-                      <a:r>
-                        <a:rPr sz="1400">
-                          <a:latin typeface="Arial"/>
-                        </a:rPr>
-                        <a:t>3:05-3:45</a:t>
-                      </a:r>
-                    </a:p>
-                  </a:txBody>
-                  <a:tcPr/>
-                </a:tc>
-                <a:tc>
-                  <a:txBody>
-                    <a:bodyPr/>
-                    <a:lstStyle/>
-                    <a:p>
-                      <a:r>
-                        <a:rPr sz="1400">
-                          <a:latin typeface="Arial"/>
-                        </a:rPr>
-                        <a:t>Accessibility Champion Studio</a:t>
-                      </a:r>
-                    </a:p>
-                  </a:txBody>
-                  <a:tcPr/>
-                </a:tc>
-              </a:tr>
-              <a:tr h="221381">
-                <a:tc>
-                  <a:txBody>
-                    <a:bodyPr/>
-                    <a:lstStyle/>
-                    <a:p>
-                      <a:r>
-                        <a:rPr sz="1400">
-                          <a:latin typeface="Arial"/>
-                        </a:rPr>
-                        <a:t>3:45-4:00</a:t>
-                      </a:r>
-                    </a:p>
-                  </a:txBody>
-                  <a:tcPr/>
-                </a:tc>
-                <a:tc>
-                  <a:txBody>
-                    <a:bodyPr/>
-                    <a:lstStyle/>
-                    <a:p>
-                      <a:r>
-                        <a:rPr sz="1400">
-                          <a:latin typeface="Arial"/>
-                        </a:rPr>
-                        <a:t>Peer review round</a:t>
-                      </a:r>
-                    </a:p>
-                  </a:txBody>
-                  <a:tcPr/>
-                </a:tc>
-              </a:tr>
-              <a:tr h="221381">
-                <a:tc>
-                  <a:txBody>
-                    <a:bodyPr/>
-                    <a:lstStyle/>
-                    <a:p>
-                      <a:r>
-                        <a:rPr sz="1400">
-                          <a:latin typeface="Arial"/>
-                        </a:rPr>
-                        <a:t>4:00-4:15</a:t>
-                      </a:r>
-                    </a:p>
-                  </a:txBody>
-                  <a:tcPr/>
-                </a:tc>
-                <a:tc>
-                  <a:txBody>
-                    <a:bodyPr/>
-                    <a:lstStyle/>
-                    <a:p>
-                      <a:r>
-                        <a:rPr sz="1400">
-                          <a:latin typeface="Arial"/>
-                        </a:rPr>
-                        <a:t>Capstone Share-Out</a:t>
-                      </a:r>
-                    </a:p>
-                  </a:txBody>
-                  <a:tcPr/>
-                </a:tc>
-              </a:tr>
-              <a:tr h="221381">
-                <a:tc>
-                  <a:txBody>
-                    <a:bodyPr/>
-                    <a:lstStyle/>
-                    <a:p>
-                      <a:r>
-                        <a:rPr sz="1400">
-                          <a:latin typeface="Arial"/>
-                        </a:rPr>
-                        <a:t>4:15-4:25</a:t>
-                      </a:r>
-                    </a:p>
-                  </a:txBody>
-                  <a:tcPr/>
-                </a:tc>
-                <a:tc>
-                  <a:txBody>
-                    <a:bodyPr/>
-                    <a:lstStyle/>
-                    <a:p>
-                      <a:r>
-                        <a:rPr sz="1400">
-                          <a:latin typeface="Arial"/>
-                        </a:rPr>
-                        <a:t>30-Day Action Plan</a:t>
-                      </a:r>
-                    </a:p>
-                  </a:txBody>
-                  <a:tcPr/>
-                </a:tc>
-              </a:tr>
-              <a:tr h="221382">
-                <a:tc>
-                  <a:txBody>
-                    <a:bodyPr/>
-                    <a:lstStyle/>
-                    <a:p>
-                      <a:r>
-                        <a:rPr sz="1400">
-                          <a:latin typeface="Arial"/>
-                        </a:rPr>
-                        <a:t>4:25-4:30</a:t>
-                      </a:r>
-                    </a:p>
-                  </a:txBody>
-                  <a:tcPr/>
-                </a:tc>
-                <a:tc>
-                  <a:txBody>
-                    <a:bodyPr/>
-                    <a:lstStyle/>
-                    <a:p>
-                      <a:r>
-                        <a:rPr sz="1400">
-                          <a:latin typeface="Arial"/>
-                        </a:rPr>
-                        <a:t>The commitment wall</a:t>
-                      </a:r>
-                    </a:p>
-                  </a:txBody>
-                  <a:tcPr/>
-                </a:tc>
-              </a:tr>
-            </a:tbl>
-          </a:graphicData>
-        </a:graphic>
-      </p:graphicFrame>
+          <a:bodyPr/>
+          <a:lstStyle/>
+          <a:p>
+            <a:r>
+              <a:rPr sz="3600" b="1">
+                <a:latin typeface="Arial"/>
+              </a:rPr>
+              <a:t>Where we are going</a:t>
+            </a:r>
+          </a:p>
+        </p:txBody>
+      </p:sp>
+      <p:sp>
+        <p:nvSpPr>
+          <p:cNvPr id="3" name="Content Placeholder 2"/>
+          <p:cNvSpPr>
+            <a:spLocks noGrp="1"/>
+          </p:cNvSpPr>
+          <p:nvPr>
+            <p:ph idx="1"/>
+          </p:nvPr>
+        </p:nvSpPr>
+        <p:spPr>
+          <a:xfrm>
+            <a:off x="548640" y="1554480"/>
+            <a:ext cx="11064240" cy="4937760"/>
+          </a:xfrm>
+        </p:spPr>
+        <p:txBody>
+          <a:bodyPr wrap="square"/>
+          <a:lstStyle/>
+          <a:p>
+            <a:pPr marL="0" indent="0">
+              <a:buNone/>
+            </a:pPr>
+            <a:r>
+              <a:rPr sz="1800" b="0">
+                <a:latin typeface="Arial"/>
+              </a:rPr>
+              <a:t>The shape of the day</a:t>
+            </a:r>
+          </a:p>
+          <a:p>
+            <a:pPr lvl="1"/>
+            <a:r>
+              <a:rPr sz="2000" b="0">
+                <a:latin typeface="Arial"/>
+              </a:rPr>
+              <a:t>Morning, 8:30-12:15: Why this work matters, five short activities, and Lab 1. Break at 10:10.</a:t>
+            </a:r>
+          </a:p>
+          <a:p>
+            <a:pPr lvl="1"/>
+            <a:r>
+              <a:rPr sz="2000" b="0">
+                <a:latin typeface="Arial"/>
+              </a:rPr>
+              <a:t>Afternoon, 1:15-3:05: Two labs: alt text, then remediation planning. Break at 2:55.</a:t>
+            </a:r>
+          </a:p>
+          <a:p>
+            <a:pPr lvl="1"/>
+            <a:r>
+              <a:rPr sz="2000" b="0">
+                <a:latin typeface="Arial"/>
+              </a:rPr>
+              <a:t>Close, 3:05-4:30: Your workflow, your take-home artifact, your 30-day plan, and the session evaluation.</a:t>
+            </a:r>
+          </a:p>
+        </p:txBody>
+      </p:sp>
     </p:spTree>
   </p:cSld>
   <p:clrMapOvr>

--- a/docs/ahg-2026/slides.pptx
+++ b/docs/ahg-2026/slides.pptx
@@ -31,10 +31,6 @@
     <p:sldId id="279" r:id="rId31"/>
     <p:sldId id="280" r:id="rId32"/>
     <p:sldId id="281" r:id="rId33"/>
-    <p:sldId id="282" r:id="rId34"/>
-    <p:sldId id="283" r:id="rId35"/>
-    <p:sldId id="284" r:id="rId36"/>
-    <p:sldId id="285" r:id="rId37"/>
   </p:sldIdLst>
   <p:sldSz cx="12191695" cy="6858000" type="screen4x3"/>
   <p:notesSz cx="6858000" cy="9144000"/>
@@ -537,19 +533,19 @@
           <a:p/>
           <a:p>
             <a:r>
-              <a:t>Do not start with the tool. Start with the room. Ask nothing yet - let people sit down, find power, and settle.</a:t>
+              <a:t>The proctor introduces the session. Put the microphone on before you say a word, and keep it on all day: when someone speaks from the floor, pass them a mic or repeat what they said into yours before you answer.</a:t>
             </a:r>
           </a:p>
           <a:p/>
           <a:p>
             <a:r>
-              <a:t>The proctor introduces the session. Put the microphone on before you say a word, and keep it on all day: when a volunteer speaks, pass them a mic or say what they said back into yours before you answer. Some people in this room hear you only through it.</a:t>
+              <a:t>Say the key point before any logistics, in one sentence: accessibility in higher education does not scale by fixing, it scales by making more people who can, and agents are how one person's know-how reaches a whole course.</a:t>
             </a:r>
           </a:p>
           <a:p/>
           <a:p>
             <a:r>
-              <a:t>Say the key point once, before any logistics, in one sentence: the work is not fixing documents, it is making more people who can. Then the promise on the next slide.</a:t>
+              <a:t>Describe the slide: the title, the subtitle from the program, and one sentence promising what they leave with.</a:t>
             </a:r>
           </a:p>
         </p:txBody>
@@ -619,19 +615,19 @@
           <a:lstStyle/>
           <a:p>
             <a:r>
-              <a:t>[Activity 1 - 20 minutes - /w/ahg-2026/1]</a:t>
+              <a:t>[Watch me first]</a:t>
             </a:r>
           </a:p>
           <a:p/>
           <a:p>
             <a:r>
-              <a:t>No sharing pressure. Writing, then a table conversation if the table wants one.</a:t>
+              <a:t>Read Maria's answers aloud. Then type /design-my-agent in Copilot Chat on the projector and answer as Maria, so they hear the whole conversation once before they have theirs.</a:t>
             </a:r>
           </a:p>
           <a:p/>
           <a:p>
             <a:r>
-              <a:t>When the first submissions land, point people at the return link. This is the moment they have something to lose.</a:t>
+              <a:t>Joke if the room is warm: Maria's coffee machine has been out of order since August. Her agent does not drink coffee, which is its main advantage.</a:t>
             </a:r>
           </a:p>
         </p:txBody>
@@ -701,13 +697,19 @@
           <a:lstStyle/>
           <a:p>
             <a:r>
-              <a:t>[Activity 2 - 30 minutes - /w/ahg-2026/2]</a:t>
+              <a:t>[Your turn]</a:t>
             </a:r>
           </a:p>
           <a:p/>
           <a:p>
             <a:r>
-              <a:t>Watch for tool-first answers - "we need a checker". Push back gently: a checker is an answer, not a problem.</a:t>
+              <a:t>Helpers move now. Look for the person who has not typed anything yet, and sit with them quietly.</a:t>
+            </a:r>
+          </a:p>
+          <a:p/>
+          <a:p>
+            <a:r>
+              <a:t>Step card 2 has every key and every expected screen in words, for screen reader users and anyone who prefers paper.</a:t>
             </a:r>
           </a:p>
         </p:txBody>
@@ -777,19 +779,19 @@
           <a:lstStyle/>
           <a:p>
             <a:r>
-              <a:t>[Activity 3 - 30 minutes - /w/ahg-2026/3]</a:t>
+              <a:t>[Block 3 of 7 - 11:50-12:15 - 25 minutes]</a:t>
             </a:r>
           </a:p>
           <a:p/>
           <a:p>
             <a:r>
-              <a:t>The hard part is tone, not content. Nobody learns from a reply that makes them feel caught.</a:t>
+              <a:t>Say where we are on the journey: step 3 of 7, "Your agent at work: Copilot uses it on one course document." Then show what they will have at the end of this block before anyone starts.</a:t>
             </a:r>
           </a:p>
           <a:p/>
           <a:p>
             <a:r>
-              <a:t>Ask for one volunteer to read theirs aloud. One is enough.</a:t>
+              <a:t>PSY 101 is fictional: a course about memory and procrastination that keeps forgetting things and running late. The barriers in it are planted on purpose; the answer key is in the facilitator folder.</a:t>
             </a:r>
           </a:p>
         </p:txBody>
@@ -859,19 +861,19 @@
           <a:lstStyle/>
           <a:p>
             <a:r>
-              <a:t>[Break - 15 minutes]</a:t>
+              <a:t>[Watch me]</a:t>
             </a:r>
           </a:p>
           <a:p/>
           <a:p>
             <a:r>
-              <a:t>Project the room pulse during the break. Counts only - it is safe on a screen.</a:t>
+              <a:t>Read the quote in a confident voice, then the three problems in a normal one. The contrast is the joke, and the lesson.</a:t>
             </a:r>
           </a:p>
           <a:p/>
           <a:p>
             <a:r>
-              <a:t>Walk the room. The person who has not typed anything is the one to sit with, quietly.</a:t>
+              <a:t>This is a written example, labelled as one in the kit. On the day, show a real first answer from the room if someone offers one.</a:t>
             </a:r>
           </a:p>
         </p:txBody>
@@ -941,13 +943,19 @@
           <a:lstStyle/>
           <a:p>
             <a:r>
-              <a:t>[Activity 4 - 30 minutes - /w/ahg-2026/4]</a:t>
+              <a:t>[Lunch - 12:15-1:15]</a:t>
             </a:r>
           </a:p>
           <a:p/>
           <a:p>
             <a:r>
-              <a:t>The examples are deliberately arguable. If a table disagrees about which pile something is in, that argument is the exercise.</a:t>
+              <a:t>Say well done, and mean it. Most people in this room had never written an agent at 10:30.</a:t>
+            </a:r>
+          </a:p>
+          <a:p/>
+          <a:p>
+            <a:r>
+              <a:t>Anyone still setting up: lunch is when a helper finishes it with them.</a:t>
             </a:r>
           </a:p>
         </p:txBody>
@@ -1017,19 +1025,19 @@
           <a:lstStyle/>
           <a:p>
             <a:r>
-              <a:t>[Activity 5 - 35 minutes - /w/ahg-2026/5]</a:t>
+              <a:t>[Block 4 of 7 - 1:15-2:10 - 55 minutes]</a:t>
             </a:r>
           </a:p>
           <a:p/>
           <a:p>
             <a:r>
-              <a:t>This is the technical peak of the day and it is still five sentences on a page. Say so.</a:t>
+              <a:t>Say where we are on the journey: step 4 of 7, "Your agent, grounded: real evidence in, cited answers out." Then show what they will have at the end of this block before anyone starts.</a:t>
             </a:r>
           </a:p>
           <a:p/>
           <a:p>
             <a:r>
-              <a:t>Mention the optional "Run your agent" lab here, once. Lunch or after 4:30. A door, not a corridor.</a:t>
+              <a:t>Grounding is the trusted in the session title. The checkers find; the agent explains and plans; a person decides.</a:t>
             </a:r>
           </a:p>
         </p:txBody>
@@ -1099,19 +1107,19 @@
           <a:lstStyle/>
           <a:p>
             <a:r>
-              <a:t>[Lab 1 - 45 minutes - /w/ahg-2026/6]</a:t>
+              <a:t>[Watch me]</a:t>
             </a:r>
           </a:p>
           <a:p/>
           <a:p>
             <a:r>
-              <a:t>Four scenarios from four sectors, plus "Surprise me", which is deterministic per person - two people at a table will rarely get the same brief, and you can walk anyone back through what they were given.</a:t>
+              <a:t>Read both columns, row by row.</a:t>
             </a:r>
           </a:p>
           <a:p/>
           <a:p>
             <a:r>
-              <a:t>A real document of their own always beats a scenario. Say it out loud.</a:t>
+              <a:t>Then ask one volunteer to read their own before and after. One is enough, and applaud it.</a:t>
             </a:r>
           </a:p>
         </p:txBody>
@@ -1181,13 +1189,19 @@
           <a:lstStyle/>
           <a:p>
             <a:r>
-              <a:t>[Lunch - 12:15-1:15]</a:t>
+              <a:t>[The skill, not the tool]</a:t>
             </a:r>
           </a:p>
           <a:p/>
           <a:p>
             <a:r>
-              <a:t>Eat. Nothing in the afternoon depends on a model answering, so there is nothing to watch over lunch.</a:t>
+              <a:t>If Word is handy, show Review, then Check Accessibility on the syllabus, and paste its results into Copilot with the agent. Same skill, different tool.</a:t>
+            </a:r>
+          </a:p>
+          <a:p/>
+          <a:p>
+            <a:r>
+              <a:t>Those four barriers are why every agent has a human review step. Read each one; the room will recognise every one of them from their own campus.</a:t>
             </a:r>
           </a:p>
         </p:txBody>
@@ -1257,19 +1271,13 @@
           <a:lstStyle/>
           <a:p>
             <a:r>
-              <a:t>[1:15 - Re-entry]</a:t>
+              <a:t>[Break - 10 minutes]</a:t>
             </a:r>
           </a:p>
           <a:p/>
           <a:p>
             <a:r>
-              <a:t>Project the facilitator dashboard. Counts only - it never carries anyone's work. Read the counts aloud; the screen is not the only way into the room.</a:t>
-            </a:r>
-          </a:p>
-          <a:p/>
-          <a:p>
-            <a:r>
-              <a:t>Nothing in the afternoon depends on a model answering, so there is no bad news to deliver here. Say that once if the room looks anxious about it.</a:t>
+              <a:t>Short break on purpose. The next two blocks are where the day comes together.</a:t>
             </a:r>
           </a:p>
         </p:txBody>
@@ -1339,19 +1347,19 @@
           <a:lstStyle/>
           <a:p>
             <a:r>
-              <a:t>[Lab 2 - 45 minutes - /w/ahg-2026/7]</a:t>
+              <a:t>[Block 5 of 7 - 2:20-3:00 - 40 minutes]</a:t>
             </a:r>
           </a:p>
           <a:p/>
           <a:p>
             <a:r>
-              <a:t>Nobody uploads anything. Purpose lives in the words around an image, not in the pixels - a lab built on 'upload it and see' teaches the opposite.</a:t>
+              <a:t>Say where we are on the journey: step 5 of 7, "Your agent, shared: a pull request to an open-source project, with your name on it." Then show what they will have at the end of this block before anyone starts.</a:t>
             </a:r>
           </a:p>
           <a:p/>
           <a:p>
             <a:r>
-              <a:t>The descriptions are written to be argued with. One is fluent and confidently wrong; that is the one to spend time on.</a:t>
+              <a:t>Step card 5 walks the GitHub pages one control at a time, with what a screen reader announces at each step.</a:t>
             </a:r>
           </a:p>
         </p:txBody>
@@ -1421,25 +1429,19 @@
           <a:lstStyle/>
           <a:p>
             <a:r>
-              <a:t>[The promise]</a:t>
+              <a:t>[The problem]</a:t>
             </a:r>
           </a:p>
           <a:p/>
           <a:p>
             <a:r>
-              <a:t>Say this in the first ten minutes, exactly once, and mean it. Everything later in the day depends on the room believing it.</a:t>
+              <a:t>Ask, warmly: who here has a backlog? Who has a spreadsheet with the word final in its name more than once? Let the laugh happen; it is recognition, not mockery.</a:t>
             </a:r>
           </a:p>
           <a:p/>
           <a:p>
             <a:r>
-              <a:t>The upload rule matters: free accounts allow roughly two image uploads a day and do not publish the number. An instruction that fails at 1:40 is worse than one nobody followed.</a:t>
-            </a:r>
-          </a:p>
-          <a:p/>
-          <a:p>
-            <a:r>
-              <a:t>The privacy half matters more. Say what private means here: student records, health or disability information, anyone's name. A free assistant may keep what is pasted into it. Use the scenarios, or strip the details out first.</a:t>
+              <a:t>Title II's rule points to WCAG 2.1 AA; 2.2 is the current standard and includes everything 2.1 does. Say it once and move on.</a:t>
             </a:r>
           </a:p>
         </p:txBody>
@@ -1509,19 +1511,19 @@
           <a:lstStyle/>
           <a:p>
             <a:r>
-              <a:t>[Lab 2 - the method]</a:t>
+              <a:t>[Open source, live]</a:t>
             </a:r>
           </a:p>
           <a:p/>
           <a:p>
             <a:r>
-              <a:t>If you have one, show a generated description that is fluent and factually wrong. It teaches more than any slide.</a:t>
+              <a:t>Merge on the projector as they arrive, and read each name and agent title out loud. Applause is allowed and encouraged.</a:t>
             </a:r>
           </a:p>
           <a:p/>
           <a:p>
             <a:r>
-              <a:t>Decorative images: an empty alt is a decision, and a correct one. Say it explicitly - many people have never been told.</a:t>
+              <a:t>Started from a ready-made agent? It still counts. Say so: what matters is that it is yours now.</a:t>
             </a:r>
           </a:p>
         </p:txBody>
@@ -1591,13 +1593,19 @@
           <a:lstStyle/>
           <a:p>
             <a:r>
-              <a:t>[Lab 3 - 45 minutes - /w/ahg-2026/8]</a:t>
+              <a:t>[Block 6 of 7 - 3:00-3:45 - 45 minutes]</a:t>
             </a:r>
           </a:p>
           <a:p/>
           <a:p>
             <a:r>
-              <a:t>Everyone sorts by effort first. The reorder, once someone says "but this one blocks a student on Monday", is the lesson.</a:t>
+              <a:t>Say where we are on the journey: step 6 of 7, "Your agent in the team: the whole course, at once." Then show what they will have at the end of this block before anyone starts.</a:t>
+            </a:r>
+          </a:p>
+          <a:p/>
+          <a:p>
+            <a:r>
+              <a:t>This is building an agent team: they added a specialist, and their coordinator is running it. Copilot announces each file as it finishes, so screen reader users hear progress, not silence.</a:t>
             </a:r>
           </a:p>
         </p:txBody>
@@ -1667,13 +1675,13 @@
           <a:lstStyle/>
           <a:p>
             <a:r>
-              <a:t>[Break - 10 minutes]</a:t>
+              <a:t>[What scale looks like]</a:t>
             </a:r>
           </a:p>
           <a:p/>
           <a:p>
             <a:r>
-              <a:t>Short break on purpose. Protect the last 85 minutes; that is where the artifact comes from.</a:t>
+              <a:t>Ask: what would it take to run this across ten courses? Let them answer. The honest answer is a person's review time, which is exactly where it should go.</a:t>
             </a:r>
           </a:p>
         </p:txBody>
@@ -1743,13 +1751,19 @@
           <a:lstStyle/>
           <a:p>
             <a:r>
-              <a:t>[Studio - 40 minutes - /w/ahg-2026/9]</a:t>
+              <a:t>[Agents in action]</a:t>
             </a:r>
           </a:p>
           <a:p/>
           <a:p>
             <a:r>
-              <a:t>Workflows shared to the gallery carry a "Start from this workflow" link. It fills an empty form only; it never writes over someone's own answers. Anonymous submitters stay anonymous in the attribution.</a:t>
+              <a:t>Run the merged team on the projector against the sample course. Read out each agent's name as the coordinator calls it.</a:t>
+            </a:r>
+          </a:p>
+          <a:p/>
+          <a:p>
+            <a:r>
+              <a:t>If the run is slow, narrate it. If it stumbles, say what happened and why; a real failure explained well teaches more than a perfect demo.</a:t>
             </a:r>
           </a:p>
         </p:txBody>
@@ -1819,13 +1833,19 @@
           <a:lstStyle/>
           <a:p>
             <a:r>
-              <a:t>[Peer review - 10 minutes - gallery]</a:t>
+              <a:t>[Block 7 of 7 - 3:45-4:15 - 30 minutes]</a:t>
             </a:r>
           </a:p>
           <a:p/>
           <a:p>
             <a:r>
-              <a:t>The gallery announces new work as a count and waits for the reader to press "Show new submissions". Nothing appears underneath anyone mid-read. Say that out loud - it will be noticed in this room, and it should be.</a:t>
+              <a:t>Say where we are on the journey: step 7 of 7, "Your campus: a 30-day plan." Then show what they will have at the end of this block before anyone starts.</a:t>
+            </a:r>
+          </a:p>
+          <a:p/>
+          <a:p>
+            <a:r>
+              <a:t>Small is the point. "Run the planner on the next five requests" beats "transform our office".</a:t>
             </a:r>
           </a:p>
         </p:txBody>
@@ -1895,13 +1915,19 @@
           <a:lstStyle/>
           <a:p>
             <a:r>
-              <a:t>[Capstone - 15 minutes - /w/ahg-2026/10]</a:t>
+              <a:t>[4:15]</a:t>
             </a:r>
           </a:p>
           <a:p/>
           <a:p>
             <a:r>
-              <a:t>Take three or four out loud, from volunteers. Then send everyone to the artifact page - that is the next slide and it needs two full minutes.</a:t>
+              <a:t>Project the wall from GLOW. Read three aloud. Do not comment on them, do not rank them.</a:t>
+            </a:r>
+          </a:p>
+          <a:p/>
+          <a:p>
+            <a:r>
+              <a:t>Then go straight to the evaluation. The last five minutes belong to it.</a:t>
             </a:r>
           </a:p>
         </p:txBody>
@@ -1971,265 +1997,19 @@
           <a:lstStyle/>
           <a:p>
             <a:r>
-              <a:t>[Take it with you]</a:t>
+              <a:t>[4:25 - Thank you]</a:t>
             </a:r>
           </a:p>
           <a:p/>
           <a:p>
             <a:r>
-              <a:t>Do not rush this. Two minutes each, and it is the highest-value two minutes of the day.</a:t>
+              <a:t>Say it, thank them, and hand over to the proctor for the evaluation. Then stop talking while people fill it in.</a:t>
             </a:r>
           </a:p>
           <a:p/>
           <a:p>
             <a:r>
-              <a:t>The plain text of the artifact is in the email body too, because institutional mail gateways strip attachments.</a:t>
-            </a:r>
-          </a:p>
-        </p:txBody>
-      </p:sp>
-      <p:sp>
-        <p:nvSpPr>
-          <p:cNvPr id="4" name="Slide Number Placeholder 3"/>
-          <p:cNvSpPr>
-            <a:spLocks noGrp="1"/>
-          </p:cNvSpPr>
-          <p:nvPr>
-            <p:ph type="sldNum" idx="5" sz="quarter"/>
-          </p:nvPr>
-        </p:nvSpPr>
-        <p:spPr/>
-      </p:sp>
-    </p:spTree>
-  </p:cSld>
-  <p:clrMapOvr>
-    <a:masterClrMapping/>
-  </p:clrMapOvr>
-</p:notes>
-</file>
-
-<file path=ppt/notesSlides/notesSlide27.xml><?xml version="1.0" encoding="utf-8"?>
-<p:notes xmlns:a="http://schemas.openxmlformats.org/drawingml/2006/main" xmlns:p="http://schemas.openxmlformats.org/presentationml/2006/main" xmlns:r="http://schemas.openxmlformats.org/officeDocument/2006/relationships">
-  <p:cSld>
-    <p:spTree>
-      <p:nvGrpSpPr>
-        <p:cNvPr id="1" name=""/>
-        <p:cNvGrpSpPr/>
-        <p:nvPr/>
-      </p:nvGrpSpPr>
-      <p:grpSpPr>
-        <a:xfrm>
-          <a:off x="0" y="0"/>
-          <a:ext cx="0" cy="0"/>
-          <a:chOff x="0" y="0"/>
-          <a:chExt cx="0" cy="0"/>
-        </a:xfrm>
-      </p:grpSpPr>
-      <p:sp>
-        <p:nvSpPr>
-          <p:cNvPr id="2" name="Slide Image Placeholder 1"/>
-          <p:cNvSpPr>
-            <a:spLocks noGrp="1"/>
-          </p:cNvSpPr>
-          <p:nvPr>
-            <p:ph type="sldImg" idx="2"/>
-          </p:nvPr>
-        </p:nvSpPr>
-        <p:spPr/>
-      </p:sp>
-      <p:sp>
-        <p:nvSpPr>
-          <p:cNvPr id="3" name="Notes Placeholder 2"/>
-          <p:cNvSpPr>
-            <a:spLocks noGrp="1"/>
-          </p:cNvSpPr>
-          <p:nvPr>
-            <p:ph type="body" idx="3" sz="quarter"/>
-          </p:nvPr>
-        </p:nvSpPr>
-        <p:spPr/>
-        <p:txBody>
-          <a:bodyPr/>
-          <a:lstStyle/>
-          <a:p>
-            <a:r>
-              <a:t>[Activity 11 - 10 minutes - /w/ahg-2026/11]</a:t>
-            </a:r>
-          </a:p>
-          <a:p/>
-          <a:p>
-            <a:r>
-              <a:t>Small is the point. "Rewrite one email template" beats "audit the LMS".</a:t>
-            </a:r>
-          </a:p>
-          <a:p/>
-          <a:p>
-            <a:r>
-              <a:t>The last two are the additions, and they are the difference between a good intention and something that survives an institution. A workflow nobody approved and nobody measured gets forgotten.</a:t>
-            </a:r>
-          </a:p>
-          <a:p/>
-          <a:p>
-            <a:r>
-              <a:t>Nobody is going to chase them about this. Say so, and say where help is: support@community-access.org.</a:t>
-            </a:r>
-          </a:p>
-        </p:txBody>
-      </p:sp>
-      <p:sp>
-        <p:nvSpPr>
-          <p:cNvPr id="4" name="Slide Number Placeholder 3"/>
-          <p:cNvSpPr>
-            <a:spLocks noGrp="1"/>
-          </p:cNvSpPr>
-          <p:nvPr>
-            <p:ph type="sldNum" idx="5" sz="quarter"/>
-          </p:nvPr>
-        </p:nvSpPr>
-        <p:spPr/>
-      </p:sp>
-    </p:spTree>
-  </p:cSld>
-  <p:clrMapOvr>
-    <a:masterClrMapping/>
-  </p:clrMapOvr>
-</p:notes>
-</file>
-
-<file path=ppt/notesSlides/notesSlide28.xml><?xml version="1.0" encoding="utf-8"?>
-<p:notes xmlns:a="http://schemas.openxmlformats.org/drawingml/2006/main" xmlns:p="http://schemas.openxmlformats.org/presentationml/2006/main" xmlns:r="http://schemas.openxmlformats.org/officeDocument/2006/relationships">
-  <p:cSld>
-    <p:spTree>
-      <p:nvGrpSpPr>
-        <p:cNvPr id="1" name=""/>
-        <p:cNvGrpSpPr/>
-        <p:nvPr/>
-      </p:nvGrpSpPr>
-      <p:grpSpPr>
-        <a:xfrm>
-          <a:off x="0" y="0"/>
-          <a:ext cx="0" cy="0"/>
-          <a:chOff x="0" y="0"/>
-          <a:chExt cx="0" cy="0"/>
-        </a:xfrm>
-      </p:grpSpPr>
-      <p:sp>
-        <p:nvSpPr>
-          <p:cNvPr id="2" name="Slide Image Placeholder 1"/>
-          <p:cNvSpPr>
-            <a:spLocks noGrp="1"/>
-          </p:cNvSpPr>
-          <p:nvPr>
-            <p:ph type="sldImg" idx="2"/>
-          </p:nvPr>
-        </p:nvSpPr>
-        <p:spPr/>
-      </p:sp>
-      <p:sp>
-        <p:nvSpPr>
-          <p:cNvPr id="3" name="Notes Placeholder 2"/>
-          <p:cNvSpPr>
-            <a:spLocks noGrp="1"/>
-          </p:cNvSpPr>
-          <p:nvPr>
-            <p:ph type="body" idx="3" sz="quarter"/>
-          </p:nvPr>
-        </p:nvSpPr>
-        <p:spPr/>
-        <p:txBody>
-          <a:bodyPr/>
-          <a:lstStyle/>
-          <a:p>
-            <a:r>
-              <a:t>[4:20]</a:t>
-            </a:r>
-          </a:p>
-          <a:p/>
-          <a:p>
-            <a:r>
-              <a:t>Project it. Read three aloud. Do not comment on them, do not rank them, do not add a moral.</a:t>
-            </a:r>
-          </a:p>
-          <a:p/>
-          <a:p>
-            <a:r>
-              <a:t>Then go straight to what happens next. The last five minutes belong to the session evaluation.</a:t>
-            </a:r>
-          </a:p>
-        </p:txBody>
-      </p:sp>
-      <p:sp>
-        <p:nvSpPr>
-          <p:cNvPr id="4" name="Slide Number Placeholder 3"/>
-          <p:cNvSpPr>
-            <a:spLocks noGrp="1"/>
-          </p:cNvSpPr>
-          <p:nvPr>
-            <p:ph type="sldNum" idx="5" sz="quarter"/>
-          </p:nvPr>
-        </p:nvSpPr>
-        <p:spPr/>
-      </p:sp>
-    </p:spTree>
-  </p:cSld>
-  <p:clrMapOvr>
-    <a:masterClrMapping/>
-  </p:clrMapOvr>
-</p:notes>
-</file>
-
-<file path=ppt/notesSlides/notesSlide29.xml><?xml version="1.0" encoding="utf-8"?>
-<p:notes xmlns:a="http://schemas.openxmlformats.org/drawingml/2006/main" xmlns:p="http://schemas.openxmlformats.org/presentationml/2006/main" xmlns:r="http://schemas.openxmlformats.org/officeDocument/2006/relationships">
-  <p:cSld>
-    <p:spTree>
-      <p:nvGrpSpPr>
-        <p:cNvPr id="1" name=""/>
-        <p:cNvGrpSpPr/>
-        <p:nvPr/>
-      </p:nvGrpSpPr>
-      <p:grpSpPr>
-        <a:xfrm>
-          <a:off x="0" y="0"/>
-          <a:ext cx="0" cy="0"/>
-          <a:chOff x="0" y="0"/>
-          <a:chExt cx="0" cy="0"/>
-        </a:xfrm>
-      </p:grpSpPr>
-      <p:sp>
-        <p:nvSpPr>
-          <p:cNvPr id="2" name="Slide Image Placeholder 1"/>
-          <p:cNvSpPr>
-            <a:spLocks noGrp="1"/>
-          </p:cNvSpPr>
-          <p:nvPr>
-            <p:ph type="sldImg" idx="2"/>
-          </p:nvPr>
-        </p:nvSpPr>
-        <p:spPr/>
-      </p:sp>
-      <p:sp>
-        <p:nvSpPr>
-          <p:cNvPr id="3" name="Notes Placeholder 2"/>
-          <p:cNvSpPr>
-            <a:spLocks noGrp="1"/>
-          </p:cNvSpPr>
-          <p:nvPr>
-            <p:ph type="body" idx="3" sz="quarter"/>
-          </p:nvPr>
-        </p:nvSpPr>
-        <p:spPr/>
-        <p:txBody>
-          <a:bodyPr/>
-          <a:lstStyle/>
-          <a:p>
-            <a:r>
-              <a:t>[After today]</a:t>
-            </a:r>
-          </a:p>
-          <a:p/>
-          <a:p>
-            <a:r>
-              <a:t>Nobody is emailed twice, nobody who did not give an address is on the list, and the nudge is a command a person runs after looking at what is about to go out.</a:t>
+              <a:t>No question block here. Answer at the tables while people pack up.</a:t>
             </a:r>
           </a:p>
         </p:txBody>
@@ -2299,113 +2079,19 @@
           <a:lstStyle/>
           <a:p>
             <a:r>
-              <a:t>[Housekeeping]</a:t>
+              <a:t>[Where we will be at 4:00]</a:t>
             </a:r>
           </a:p>
           <a:p/>
           <a:p>
             <a:r>
-              <a:t>Name the exits and the bathrooms, physically pointing. Some people will not ask.</a:t>
+              <a:t>Read the table out loud, row by row. It is the destination; people relax when they can see it.</a:t>
             </a:r>
           </a:p>
           <a:p/>
           <a:p>
             <a:r>
-              <a:t>If anyone arrived without the worksheet pack, the links are on the workshop home page and work on a phone. We do not hand out paper.</a:t>
-            </a:r>
-          </a:p>
-          <a:p/>
-          <a:p>
-            <a:r>
-              <a:t>Say the last bullet slowly, then add: that is not an interruption of this workshop - it is this workshop. It sets the tone for whether anyone asks for anything all day.</a:t>
-            </a:r>
-          </a:p>
-          <a:p/>
-          <a:p>
-            <a:r>
-              <a:t>The worksheet pack was published before today for anyone who wanted to print their own. Say so for the person who did.</a:t>
-            </a:r>
-          </a:p>
-        </p:txBody>
-      </p:sp>
-      <p:sp>
-        <p:nvSpPr>
-          <p:cNvPr id="4" name="Slide Number Placeholder 3"/>
-          <p:cNvSpPr>
-            <a:spLocks noGrp="1"/>
-          </p:cNvSpPr>
-          <p:nvPr>
-            <p:ph type="sldNum" idx="5" sz="quarter"/>
-          </p:nvPr>
-        </p:nvSpPr>
-        <p:spPr/>
-      </p:sp>
-    </p:spTree>
-  </p:cSld>
-  <p:clrMapOvr>
-    <a:masterClrMapping/>
-  </p:clrMapOvr>
-</p:notes>
-</file>
-
-<file path=ppt/notesSlides/notesSlide30.xml><?xml version="1.0" encoding="utf-8"?>
-<p:notes xmlns:a="http://schemas.openxmlformats.org/drawingml/2006/main" xmlns:p="http://schemas.openxmlformats.org/presentationml/2006/main" xmlns:r="http://schemas.openxmlformats.org/officeDocument/2006/relationships">
-  <p:cSld>
-    <p:spTree>
-      <p:nvGrpSpPr>
-        <p:cNvPr id="1" name=""/>
-        <p:cNvGrpSpPr/>
-        <p:nvPr/>
-      </p:nvGrpSpPr>
-      <p:grpSpPr>
-        <a:xfrm>
-          <a:off x="0" y="0"/>
-          <a:ext cx="0" cy="0"/>
-          <a:chOff x="0" y="0"/>
-          <a:chExt cx="0" cy="0"/>
-        </a:xfrm>
-      </p:grpSpPr>
-      <p:sp>
-        <p:nvSpPr>
-          <p:cNvPr id="2" name="Slide Image Placeholder 1"/>
-          <p:cNvSpPr>
-            <a:spLocks noGrp="1"/>
-          </p:cNvSpPr>
-          <p:nvPr>
-            <p:ph type="sldImg" idx="2"/>
-          </p:nvPr>
-        </p:nvSpPr>
-        <p:spPr/>
-      </p:sp>
-      <p:sp>
-        <p:nvSpPr>
-          <p:cNvPr id="3" name="Notes Placeholder 2"/>
-          <p:cNvSpPr>
-            <a:spLocks noGrp="1"/>
-          </p:cNvSpPr>
-          <p:nvPr>
-            <p:ph type="body" idx="3" sz="quarter"/>
-          </p:nvPr>
-        </p:nvSpPr>
-        <p:spPr/>
-        <p:txBody>
-          <a:bodyPr/>
-          <a:lstStyle/>
-          <a:p>
-            <a:r>
-              <a:t>[Thank you]</a:t>
-            </a:r>
-          </a:p>
-          <a:p/>
-          <a:p>
-            <a:r>
-              <a:t>Last slide. Say it, thank them, and hand over to the proctor for the session evaluation. Then stop talking while people fill it in - the five minutes are theirs.</a:t>
-            </a:r>
-          </a:p>
-          <a:p/>
-          <a:p>
-            <a:r>
-              <a:t>Do not add a Q and A block here - answer at the tables while people pack up.</a:t>
+              <a:t>Maria is a colleague in a disability resource center. She is fictional, and she is one step ahead of the room all day.</a:t>
             </a:r>
           </a:p>
         </p:txBody>
@@ -2475,25 +2161,19 @@
           <a:lstStyle/>
           <a:p>
             <a:r>
-              <a:t>[Join the room]</a:t>
+              <a:t>[The map for today]</a:t>
             </a:r>
           </a:p>
           <a:p/>
           <a:p>
             <a:r>
-              <a:t>Read the address out twice, letter by letter, then wait. Do not move on until people are in. The code on this slide is the live one for this session - there is nothing to replace.</a:t>
+              <a:t>Read all seven, slowly. This list comes back at the start of every block with one step marked, so nobody ever wonders where we are.</a:t>
             </a:r>
           </a:p>
           <a:p/>
           <a:p>
             <a:r>
-              <a:t>Say what is on the screen: the address and nothing else. The QR code is on the table cards, not here, so nobody hunts the slide for it.</a:t>
-            </a:r>
-          </a:p>
-          <a:p/>
-          <a:p>
-            <a:r>
-              <a:t>Signage is printed from the facilitator dashboard: session, then signage.</a:t>
+              <a:t>Promise them out loud: every step has a finished example to fall back on. Nobody gets stuck and stays stuck.</a:t>
             </a:r>
           </a:p>
         </p:txBody>
@@ -2563,19 +2243,25 @@
           <a:lstStyle/>
           <a:p>
             <a:r>
-              <a:t>[Do this early]</a:t>
+              <a:t>[Housekeeping]</a:t>
             </a:r>
           </a:p>
           <a:p/>
           <a:p>
             <a:r>
-              <a:t>Give this twice: once now, once at the 10:10 break, when there is something worth keeping.</a:t>
+              <a:t>Name the exits and the restrooms, physically pointing.</a:t>
             </a:r>
           </a:p>
           <a:p/>
           <a:p>
             <a:r>
-              <a:t>If Postmark is not configured, the form is replaced by a download prompt. Check before the room fills - it is invisible until you look for it.</a:t>
+              <a:t>Say the last bullet slowly, then add: that is not an interruption of this workshop - it is this workshop.</a:t>
+            </a:r>
+          </a:p>
+          <a:p/>
+          <a:p>
+            <a:r>
+              <a:t>If anyone is not set up, do not wait for them. Helpers sit with them while the room carries on; the morning is designed so they catch up by lunch.</a:t>
             </a:r>
           </a:p>
         </p:txBody>
@@ -2645,19 +2331,25 @@
           <a:lstStyle/>
           <a:p>
             <a:r>
-              <a:t>[Why we are here]</a:t>
+              <a:t>[Two rules, all day]</a:t>
             </a:r>
           </a:p>
           <a:p/>
           <a:p>
             <a:r>
-              <a:t>This is the pivot of the whole day. Let it sit. Some people in this room are exhausted by being the only one.</a:t>
+              <a:t>Set the AI context here, in under a minute. What today covers: agents that analyze course content, find barriers and draft fixes, grounded in checkers and cited standards. What it does not: replacing anyone, or trusting any answer without evidence.</a:t>
             </a:r>
           </a:p>
           <a:p/>
           <a:p>
             <a:r>
-              <a:t>Optional: ask for a show of hands on "who is the only accessibility person in your unit" - but only if the room is warm enough. It can land as exposure rather than solidarity.</a:t>
+              <a:t>Say what makes it different from the other AI sessions this week: it is about higher education accessibility work at scale, built by the people who do that work, and every agent is open source.</a:t>
+            </a:r>
+          </a:p>
+          <a:p/>
+          <a:p>
+            <a:r>
+              <a:t>Name the reasons people hesitate - privacy, accuracy, other people's jobs - once, without dwelling. Rule one answers the first. Grounding answers the second. Rule two answers the third.</a:t>
             </a:r>
           </a:p>
         </p:txBody>
@@ -2727,13 +2419,19 @@
           <a:lstStyle/>
           <a:p>
             <a:r>
-              <a:t>[Four words for the day]</a:t>
+              <a:t>[No code, really]</a:t>
             </a:r>
           </a:p>
           <a:p/>
           <a:p>
             <a:r>
-              <a:t>Map the day onto this once, here, and then stop talking about the acronym. It is scaffolding, not content.</a:t>
+              <a:t>This is the slide that lowers the shoulders. Say it twice: if you can write instructions for a new colleague, you can write an agent.</a:t>
+            </a:r>
+          </a:p>
+          <a:p/>
+          <a:p>
+            <a:r>
+              <a:t>The file format is the same one the open-source Accessibility Agents project uses, which is why their agents and yours can work in the same team this afternoon.</a:t>
             </a:r>
           </a:p>
         </p:txBody>
@@ -2803,31 +2501,19 @@
           <a:lstStyle/>
           <a:p>
             <a:r>
-              <a:t>[The boundary]</a:t>
+              <a:t>[Agents in action]</a:t>
             </a:r>
           </a:p>
           <a:p/>
           <a:p>
             <a:r>
-              <a:t>This is the slide institutional leadership cares about. It is also the honest one.</a:t>
+              <a:t>Read the specialists down the list. Pause on the last row: the team has an empty chair, and it is theirs.</a:t>
             </a:r>
           </a:p>
           <a:p/>
           <a:p>
             <a:r>
-              <a:t>Set the AI context here, in under a minute. What this session covers: where AI can help in accessibility work, and the human review that has to follow it. What it does not: comparing vendors, building software, or requiring anyone to use AI at all.</a:t>
-            </a:r>
-          </a:p>
-          <a:p/>
-          <a:p>
-            <a:r>
-              <a:t>Say what makes it different from the other AI sessions this week: it is about people making more people who can, and AI stays optional throughout. Name the reasons people hesitate - privacy, accuracy, other people's jobs - without dwelling on them. The boundary on this slide is the answer to each.</a:t>
-            </a:r>
-          </a:p>
-          <a:p/>
-          <a:p>
-            <a:r>
-              <a:t>The generated prompts put the participant's own review step inside the prompt as an instruction, not as a closing remark. Mention that at activity 5, not here.</a:t>
+              <a:t>These specialists are adapted from the open-source Accessibility Agents project. That is where their agents go this afternoon too.</a:t>
             </a:r>
           </a:p>
         </p:txBody>
@@ -2897,19 +2583,19 @@
           <a:lstStyle/>
           <a:p>
             <a:r>
-              <a:t>[The shape of the day]</a:t>
+              <a:t>[Block 2 of 7 - 10:50-11:50 - 60 minutes]</a:t>
             </a:r>
           </a:p>
           <a:p/>
           <a:p>
             <a:r>
-              <a:t>Thirty seconds. Read the three parts out loud - not everyone can read the screen. Then say "the last part is what you take home".</a:t>
+              <a:t>Say where we are on the journey: step 2 of 7, "Your agent: five plain-English answers." Then show what they will have at the end of this block before anyone starts.</a:t>
             </a:r>
           </a:p>
           <a:p/>
           <a:p>
             <a:r>
-              <a:t>The full timetable, every break included, is on the workshop home page on every device. These times come from the workshop agenda, so they cannot drift from what each activity page shows.</a:t>
+              <a:t>Every card has two ready-made agents in examples/agents. Nobody starts from a blank page; everybody starts from something that already works and makes it theirs.</a:t>
             </a:r>
           </a:p>
         </p:txBody>
@@ -5939,7 +5625,7 @@
               <a:rPr sz="3600" b="1">
                 <a:latin typeface="Arial"/>
               </a:rPr>
-              <a:t>Accessibility Agents in Action</a:t>
+              <a:t>Accessibility Agents</a:t>
             </a:r>
           </a:p>
         </p:txBody>
@@ -5982,7 +5668,7 @@
               <a:rPr sz="2400" b="0">
                 <a:latin typeface="Arial"/>
               </a:rPr>
-              <a:t>A hands-on GLOW workshop for human-centered accessibility workflows</a:t>
+              <a:t>Building Human-Centered AI Workflows for Trusted Accessibility Automation at Scale</a:t>
             </a:r>
           </a:p>
           <a:p>
@@ -5990,10 +5676,10 @@
               <a:buNone/>
             </a:pPr>
             <a:r>
-              <a:rPr sz="2400" b="0">
-                <a:latin typeface="Arial"/>
-              </a:rPr>
-              <a:t>Helping everyone become an accessibility champion.</a:t>
+              <a:rPr sz="2000" b="0">
+                <a:latin typeface="Arial"/>
+              </a:rPr>
+              <a:t>Today you build an accessibility agent. By four o'clock it is part of a team, and part of an open-source project, with your name on it.</a:t>
             </a:r>
           </a:p>
           <a:p>
@@ -6004,7 +5690,7 @@
               <a:rPr sz="2000" b="0">
                 <a:latin typeface="Arial"/>
               </a:rPr>
-              <a:t>Jeff Bishop - BITS, an affiliate of the American Council of the Blind - letitglow.app</a:t>
+              <a:t>Jeff Bishop - BITS, an affiliate of the American Council of the Blind</a:t>
             </a:r>
           </a:p>
         </p:txBody>
@@ -6051,65 +5737,268 @@
               <a:rPr sz="3600" b="1">
                 <a:latin typeface="Arial"/>
               </a:rPr>
-              <a:t>Accessibility Journey Check-In</a:t>
-            </a:r>
-          </a:p>
-        </p:txBody>
-      </p:sp>
-      <p:sp>
-        <p:nvSpPr>
-          <p:cNvPr id="3" name="Content Placeholder 2"/>
-          <p:cNvSpPr>
-            <a:spLocks noGrp="1"/>
-          </p:cNvSpPr>
-          <p:nvPr>
-            <p:ph idx="1"/>
-          </p:nvPr>
+              <a:t>Maria's five answers</a:t>
+            </a:r>
+          </a:p>
+        </p:txBody>
+      </p:sp>
+      <p:sp>
+        <p:nvSpPr>
+          <p:cNvPr id="3" name="TextBox 2"/>
+          <p:cNvSpPr txBox="1"/>
+          <p:nvPr/>
         </p:nvSpPr>
         <p:spPr>
           <a:xfrm>
-            <a:off x="548640" y="1554480"/>
-            <a:ext cx="11064240" cy="4937760"/>
+            <a:off x="548640" y="1463040"/>
+            <a:ext cx="11064240" cy="822960"/>
           </a:xfrm>
+          <a:prstGeom prst="rect">
+            <a:avLst/>
+          </a:prstGeom>
+          <a:noFill/>
         </p:spPr>
         <p:txBody>
-          <a:bodyPr wrap="square"/>
-          <a:lstStyle/>
-          <a:p>
-            <a:pPr marL="0" indent="0">
-              <a:buNone/>
-            </a:pPr>
-            <a:r>
-              <a:rPr sz="1800" b="0">
-                <a:latin typeface="Arial"/>
-              </a:rPr>
-              <a:t>Activity 1 - 20 minutes - /w/ahg-2026/1</a:t>
-            </a:r>
-          </a:p>
-          <a:p>
-            <a:pPr marL="0" indent="0">
-              <a:buNone/>
-            </a:pPr>
-            <a:r>
-              <a:rPr sz="2000" b="0">
-                <a:latin typeface="Arial"/>
-              </a:rPr>
-              <a:t>What accessibility work do you actually do? Where do your partners get stuck - the same place, over and over?</a:t>
-            </a:r>
-          </a:p>
-          <a:p>
-            <a:pPr marL="0" indent="0">
-              <a:buNone/>
-            </a:pPr>
-            <a:r>
-              <a:rPr sz="2000" b="0">
-                <a:latin typeface="Arial"/>
-              </a:rPr>
-              <a:t>What would change if more of them became champions?</a:t>
-            </a:r>
-          </a:p>
-        </p:txBody>
-      </p:sp>
+          <a:bodyPr wrap="square">
+            <a:spAutoFit/>
+          </a:bodyPr>
+          <a:lstStyle/>
+          <a:p>
+            <a:r>
+              <a:rPr sz="1800">
+                <a:latin typeface="Arial"/>
+              </a:rPr>
+              <a:t>Watch me first</a:t>
+            </a:r>
+          </a:p>
+          <a:p>
+            <a:r>
+              <a:rPr sz="1800">
+                <a:latin typeface="Arial"/>
+              </a:rPr>
+              <a:t>Maria, from the Disability Resource Center, designing her alternate format planner:</a:t>
+            </a:r>
+          </a:p>
+        </p:txBody>
+      </p:sp>
+      <p:graphicFrame>
+        <p:nvGraphicFramePr>
+          <p:cNvPr id="4" name="Table 3" descr="Maria, from the Disability Resource Center, designing her alternate format planner:"/>
+          <p:cNvGraphicFramePr>
+            <a:graphicFrameLocks noGrp="1"/>
+          </p:cNvGraphicFramePr>
+          <p:nvPr/>
+        </p:nvGraphicFramePr>
+        <p:xfrm>
+          <a:off x="548640" y="2560320"/>
+          <a:ext cx="11064240" cy="2743200"/>
+        </p:xfrm>
+        <a:graphic>
+          <a:graphicData uri="http://schemas.openxmlformats.org/drawingml/2006/table">
+            <a:tbl>
+              <a:tblPr firstRow="1" bandRow="1">
+                <a:tableStyleId>{5C22544A-7EE6-4342-B048-85BDC9FD1C3A}</a:tableStyleId>
+              </a:tblPr>
+              <a:tblGrid>
+                <a:gridCol w="5532120"/>
+                <a:gridCol w="5532120"/>
+              </a:tblGrid>
+              <a:tr h="457200">
+                <a:tc>
+                  <a:txBody>
+                    <a:bodyPr/>
+                    <a:lstStyle/>
+                    <a:p>
+                      <a:r>
+                        <a:rPr sz="1800" b="1">
+                          <a:latin typeface="Arial"/>
+                        </a:rPr>
+                        <a:t>Question</a:t>
+                      </a:r>
+                    </a:p>
+                  </a:txBody>
+                  <a:tcPr/>
+                </a:tc>
+                <a:tc>
+                  <a:txBody>
+                    <a:bodyPr/>
+                    <a:lstStyle/>
+                    <a:p>
+                      <a:r>
+                        <a:rPr sz="1800" b="1">
+                          <a:latin typeface="Arial"/>
+                        </a:rPr>
+                        <a:t>Maria's answer</a:t>
+                      </a:r>
+                    </a:p>
+                  </a:txBody>
+                  <a:tcPr/>
+                </a:tc>
+              </a:tr>
+              <a:tr h="457200">
+                <a:tc>
+                  <a:txBody>
+                    <a:bodyPr/>
+                    <a:lstStyle/>
+                    <a:p>
+                      <a:r>
+                        <a:rPr sz="1800">
+                          <a:latin typeface="Arial"/>
+                        </a:rPr>
+                        <a:t>Role</a:t>
+                      </a:r>
+                    </a:p>
+                  </a:txBody>
+                  <a:tcPr/>
+                </a:tc>
+                <a:tc>
+                  <a:txBody>
+                    <a:bodyPr/>
+                    <a:lstStyle/>
+                    <a:p>
+                      <a:r>
+                        <a:rPr sz="1800">
+                          <a:latin typeface="Arial"/>
+                        </a:rPr>
+                        <a:t>An alternate format planner in a disability resource center</a:t>
+                      </a:r>
+                    </a:p>
+                  </a:txBody>
+                  <a:tcPr/>
+                </a:tc>
+              </a:tr>
+              <a:tr h="457200">
+                <a:tc>
+                  <a:txBody>
+                    <a:bodyPr/>
+                    <a:lstStyle/>
+                    <a:p>
+                      <a:r>
+                        <a:rPr sz="1800">
+                          <a:latin typeface="Arial"/>
+                        </a:rPr>
+                        <a:t>Task</a:t>
+                      </a:r>
+                    </a:p>
+                  </a:txBody>
+                  <a:tcPr/>
+                </a:tc>
+                <a:tc>
+                  <a:txBody>
+                    <a:bodyPr/>
+                    <a:lstStyle/>
+                    <a:p>
+                      <a:r>
+                        <a:rPr sz="1800">
+                          <a:latin typeface="Arial"/>
+                        </a:rPr>
+                        <a:t>Plan the formats a student needs from a checker's report</a:t>
+                      </a:r>
+                    </a:p>
+                  </a:txBody>
+                  <a:tcPr/>
+                </a:tc>
+              </a:tr>
+              <a:tr h="457200">
+                <a:tc>
+                  <a:txBody>
+                    <a:bodyPr/>
+                    <a:lstStyle/>
+                    <a:p>
+                      <a:r>
+                        <a:rPr sz="1800">
+                          <a:latin typeface="Arial"/>
+                        </a:rPr>
+                        <a:t>Trusted guidance</a:t>
+                      </a:r>
+                    </a:p>
+                  </a:txBody>
+                  <a:tcPr/>
+                </a:tc>
+                <a:tc>
+                  <a:txBody>
+                    <a:bodyPr/>
+                    <a:lstStyle/>
+                    <a:p>
+                      <a:r>
+                        <a:rPr sz="1800">
+                          <a:latin typeface="Arial"/>
+                        </a:rPr>
+                        <a:t>WCAG 2.2 1.4.5 and 1.1.1, ACB large print, our procedure</a:t>
+                      </a:r>
+                    </a:p>
+                  </a:txBody>
+                  <a:tcPr/>
+                </a:tc>
+              </a:tr>
+              <a:tr h="457200">
+                <a:tc>
+                  <a:txBody>
+                    <a:bodyPr/>
+                    <a:lstStyle/>
+                    <a:p>
+                      <a:r>
+                        <a:rPr sz="1800">
+                          <a:latin typeface="Arial"/>
+                        </a:rPr>
+                        <a:t>Output format</a:t>
+                      </a:r>
+                    </a:p>
+                  </a:txBody>
+                  <a:tcPr/>
+                </a:tc>
+                <a:tc>
+                  <a:txBody>
+                    <a:bodyPr/>
+                    <a:lstStyle/>
+                    <a:p>
+                      <a:r>
+                        <a:rPr sz="1800">
+                          <a:latin typeface="Arial"/>
+                        </a:rPr>
+                        <a:t>Numbered steps with who does each, then a checklist</a:t>
+                      </a:r>
+                    </a:p>
+                  </a:txBody>
+                  <a:tcPr/>
+                </a:tc>
+              </a:tr>
+              <a:tr h="457200">
+                <a:tc>
+                  <a:txBody>
+                    <a:bodyPr/>
+                    <a:lstStyle/>
+                    <a:p>
+                      <a:r>
+                        <a:rPr sz="1800">
+                          <a:latin typeface="Arial"/>
+                        </a:rPr>
+                        <a:t>Human review</a:t>
+                      </a:r>
+                    </a:p>
+                  </a:txBody>
+                  <a:tcPr/>
+                </a:tc>
+                <a:tc>
+                  <a:txBody>
+                    <a:bodyPr/>
+                    <a:lstStyle/>
+                    <a:p>
+                      <a:r>
+                        <a:rPr sz="1800">
+                          <a:latin typeface="Arial"/>
+                        </a:rPr>
+                        <a:t>The specialist checks page by page; the student confirms</a:t>
+                      </a:r>
+                    </a:p>
+                  </a:txBody>
+                  <a:tcPr/>
+                </a:tc>
+              </a:tr>
+            </a:tbl>
+          </a:graphicData>
+        </a:graphic>
+      </p:graphicFrame>
     </p:spTree>
   </p:cSld>
   <p:clrMapOvr>
@@ -6152,7 +6041,7 @@
               <a:rPr sz="3600" b="1">
                 <a:latin typeface="Arial"/>
               </a:rPr>
-              <a:t>What problem are we solving?</a:t>
+              <a:t>Copilot asks, you answer</a:t>
             </a:r>
           </a:p>
         </p:txBody>
@@ -6184,7 +6073,51 @@
               <a:rPr sz="1800" b="0">
                 <a:latin typeface="Arial"/>
               </a:rPr>
-              <a:t>Activity 2 - 30 minutes - /w/ahg-2026/2</a:t>
+              <a:t>Your turn</a:t>
+            </a:r>
+          </a:p>
+          <a:p>
+            <a:pPr lvl="1">
+              <a:buNone/>
+            </a:pPr>
+            <a:r>
+              <a:rPr sz="2000" b="0">
+                <a:latin typeface="Arial"/>
+              </a:rPr>
+              <a:t>1. Open Copilot Chat: Control+Alt+I on Windows, Command+Control+I on a Mac.</a:t>
+            </a:r>
+          </a:p>
+          <a:p>
+            <a:pPr lvl="1">
+              <a:buNone/>
+            </a:pPr>
+            <a:r>
+              <a:rPr sz="2000" b="0">
+                <a:latin typeface="Arial"/>
+              </a:rPr>
+              <a:t>2. Type /design-my-agent and press Enter.</a:t>
+            </a:r>
+          </a:p>
+          <a:p>
+            <a:pPr lvl="1">
+              <a:buNone/>
+            </a:pPr>
+            <a:r>
+              <a:rPr sz="2000" b="0">
+                <a:latin typeface="Arial"/>
+              </a:rPr>
+              <a:t>3. Answer the questions, one at a time. Borrow from the example whenever you like.</a:t>
+            </a:r>
+          </a:p>
+          <a:p>
+            <a:pPr lvl="1">
+              <a:buNone/>
+            </a:pPr>
+            <a:r>
+              <a:rPr sz="2000" b="0">
+                <a:latin typeface="Arial"/>
+              </a:rPr>
+              <a:t>4. Copilot writes your answers into my-agent/SKILL.md and reads it back.</a:t>
             </a:r>
           </a:p>
           <a:p>
@@ -6195,7 +6128,7 @@
               <a:rPr sz="2000" b="0">
                 <a:latin typeface="Arial"/>
               </a:rPr>
-              <a:t>Start with the problem you can see today.</a:t>
+              <a:t>You are on track if Copilot tells you one thing your agent does well.</a:t>
             </a:r>
           </a:p>
           <a:p>
@@ -6206,18 +6139,7 @@
               <a:rPr sz="2000" b="0">
                 <a:latin typeface="Arial"/>
               </a:rPr>
-              <a:t>Then name the deeper one behind it. Who needs to learn this work, or own part of it?</a:t>
-            </a:r>
-          </a:p>
-          <a:p>
-            <a:pPr marL="0" indent="0">
-              <a:buNone/>
-            </a:pPr>
-            <a:r>
-              <a:rPr sz="2800" b="1">
-                <a:latin typeface="Arial"/>
-              </a:rPr>
-              <a:t>What does success look like if it happens again and again, without you?</a:t>
+              <a:t>Stuck? Copy a ready-made agent from examples/agents into my-agent. That counts. You are still in.</a:t>
             </a:r>
           </a:p>
         </p:txBody>
@@ -6264,7 +6186,7 @@
               <a:rPr sz="3600" b="1">
                 <a:latin typeface="Arial"/>
               </a:rPr>
-              <a:t>Fix it for me, or teach me?</a:t>
+              <a:t>Your agent at work</a:t>
             </a:r>
           </a:p>
         </p:txBody>
@@ -6296,7 +6218,7 @@
               <a:rPr sz="1800" b="0">
                 <a:latin typeface="Arial"/>
               </a:rPr>
-              <a:t>Activity 3 - 30 minutes - /w/ahg-2026/3</a:t>
+              <a:t>Block 3 of 7 - 11:50-12:15 - 25 minutes</a:t>
             </a:r>
           </a:p>
           <a:p>
@@ -6307,7 +6229,40 @@
               <a:rPr sz="2000" b="0">
                 <a:latin typeface="Arial"/>
               </a:rPr>
-              <a:t>Take a real request that said "just fix it for me."</a:t>
+              <a:t>By the end of this block: your agent's first answer on a real course document.</a:t>
+            </a:r>
+          </a:p>
+          <a:p>
+            <a:pPr lvl="1">
+              <a:buNone/>
+            </a:pPr>
+            <a:r>
+              <a:rPr sz="2000" b="0">
+                <a:latin typeface="Arial"/>
+              </a:rPr>
+              <a:t>1. In Copilot Chat, type /try-my-agent.</a:t>
+            </a:r>
+          </a:p>
+          <a:p>
+            <a:pPr lvl="1">
+              <a:buNone/>
+            </a:pPr>
+            <a:r>
+              <a:rPr sz="2000" b="0">
+                <a:latin typeface="Arial"/>
+              </a:rPr>
+              <a:t>2. Pick a file from the PSY 101 sample course.</a:t>
+            </a:r>
+          </a:p>
+          <a:p>
+            <a:pPr lvl="1">
+              <a:buNone/>
+            </a:pPr>
+            <a:r>
+              <a:rPr sz="2000" b="0">
+                <a:latin typeface="Arial"/>
+              </a:rPr>
+              <a:t>3. Read what your agent says.</a:t>
             </a:r>
           </a:p>
           <a:p>
@@ -6315,19 +6270,10 @@
               <a:buNone/>
             </a:pPr>
             <a:r>
-              <a:rPr sz="2000" b="0">
-                <a:latin typeface="Arial"/>
-              </a:rPr>
-              <a:t>Write the reply that does both: solves it today, and teaches it for next time.</a:t>
-            </a:r>
-          </a:p>
-          <a:p>
-            <a:pPr lvl="1"/>
-            <a:r>
-              <a:rPr sz="2000" b="0">
-                <a:latin typeface="Arial"/>
-              </a:rPr>
-              <a:t>The pattern: I have done X for you. Here is the one thing that caused it. Next time, do Y - it takes about a minute, and here is where it lives.</a:t>
+              <a:rPr sz="2800" b="1">
+                <a:latin typeface="Arial"/>
+              </a:rPr>
+              <a:t>It will guess a little. That is not a mistake. It is the setup for this afternoon.</a:t>
             </a:r>
           </a:p>
         </p:txBody>
@@ -6374,7 +6320,7 @@
               <a:rPr sz="3600" b="1">
                 <a:latin typeface="Arial"/>
               </a:rPr>
-              <a:t>Back at 10:25</a:t>
+              <a:t>Maria's first answer</a:t>
             </a:r>
           </a:p>
         </p:txBody>
@@ -6406,18 +6352,43 @@
               <a:rPr sz="1800" b="0">
                 <a:latin typeface="Arial"/>
               </a:rPr>
-              <a:t>Break - 15 minutes</a:t>
-            </a:r>
-          </a:p>
-          <a:p>
-            <a:pPr marL="0" indent="0">
-              <a:buNone/>
-            </a:pPr>
+              <a:t>Watch me</a:t>
+            </a:r>
+          </a:p>
+          <a:p>
+            <a:pPr lvl="1"/>
             <a:r>
               <a:rPr sz="2000" b="0">
                 <a:latin typeface="Arial"/>
               </a:rPr>
-              <a:t>If you have not sent yourself a return link yet, now is the moment. My workshop content, then Work on another device.</a:t>
+              <a:t>"Run Acrobat's Make Accessible action, add alternative text to all images, and increase the font size. This will make the document compliant with WCAG 2.1."</a:t>
+            </a:r>
+          </a:p>
+          <a:p>
+            <a:pPr lvl="1"/>
+            <a:r>
+              <a:rPr sz="2000" b="0">
+                <a:latin typeface="Arial"/>
+              </a:rPr>
+              <a:t>It never saw the file, so it did not know the reading is a scan.</a:t>
+            </a:r>
+          </a:p>
+          <a:p>
+            <a:pPr lvl="1"/>
+            <a:r>
+              <a:rPr sz="2000" b="0">
+                <a:latin typeface="Arial"/>
+              </a:rPr>
+              <a:t>Alt text on pictures of text would describe the pictures, not turn them into text.</a:t>
+            </a:r>
+          </a:p>
+          <a:p>
+            <a:pPr lvl="1"/>
+            <a:r>
+              <a:rPr sz="2000" b="0">
+                <a:latin typeface="Arial"/>
+              </a:rPr>
+              <a:t>It said "compliant", which her agent is told never to say.</a:t>
             </a:r>
           </a:p>
         </p:txBody>
@@ -6464,7 +6435,242 @@
               <a:rPr sz="3600" b="1">
                 <a:latin typeface="Arial"/>
               </a:rPr>
-              <a:t>Helpful, risky, or human required?</a:t>
+              <a:t>Back at 1:15</a:t>
+            </a:r>
+          </a:p>
+        </p:txBody>
+      </p:sp>
+      <p:sp>
+        <p:nvSpPr>
+          <p:cNvPr id="3" name="Content Placeholder 2"/>
+          <p:cNvSpPr>
+            <a:spLocks noGrp="1"/>
+          </p:cNvSpPr>
+          <p:nvPr>
+            <p:ph idx="1"/>
+          </p:nvPr>
+        </p:nvSpPr>
+        <p:spPr>
+          <a:xfrm>
+            <a:off x="548640" y="1554480"/>
+            <a:ext cx="11064240" cy="4937760"/>
+          </a:xfrm>
+        </p:spPr>
+        <p:txBody>
+          <a:bodyPr wrap="square"/>
+          <a:lstStyle/>
+          <a:p>
+            <a:pPr marL="0" indent="0">
+              <a:buNone/>
+            </a:pPr>
+            <a:r>
+              <a:rPr sz="1800" b="0">
+                <a:latin typeface="Arial"/>
+              </a:rPr>
+              <a:t>Lunch - 12:15-1:15</a:t>
+            </a:r>
+          </a:p>
+          <a:p>
+            <a:pPr marL="0" indent="0">
+              <a:buNone/>
+            </a:pPr>
+            <a:r>
+              <a:rPr sz="2000" b="0">
+                <a:latin typeface="Arial"/>
+              </a:rPr>
+              <a:t>You have an agent. That was the hard part.</a:t>
+            </a:r>
+          </a:p>
+          <a:p>
+            <a:pPr marL="0" indent="0">
+              <a:buNone/>
+            </a:pPr>
+            <a:r>
+              <a:rPr sz="2000" b="0">
+                <a:latin typeface="Arial"/>
+              </a:rPr>
+              <a:t>After lunch it stops guessing.</a:t>
+            </a:r>
+          </a:p>
+        </p:txBody>
+      </p:sp>
+    </p:spTree>
+  </p:cSld>
+  <p:clrMapOvr>
+    <a:masterClrMapping/>
+  </p:clrMapOvr>
+</p:sld>
+</file>
+
+<file path=ppt/slides/slide15.xml><?xml version="1.0" encoding="utf-8"?>
+<p:sld xmlns:a="http://schemas.openxmlformats.org/drawingml/2006/main" xmlns:p="http://schemas.openxmlformats.org/presentationml/2006/main" xmlns:r="http://schemas.openxmlformats.org/officeDocument/2006/relationships">
+  <p:cSld>
+    <p:spTree>
+      <p:nvGrpSpPr>
+        <p:cNvPr id="1" name=""/>
+        <p:cNvGrpSpPr/>
+        <p:nvPr/>
+      </p:nvGrpSpPr>
+      <p:grpSpPr/>
+      <p:sp>
+        <p:nvSpPr>
+          <p:cNvPr id="2" name="Title 1"/>
+          <p:cNvSpPr>
+            <a:spLocks noGrp="1"/>
+          </p:cNvSpPr>
+          <p:nvPr>
+            <p:ph type="title"/>
+          </p:nvPr>
+        </p:nvSpPr>
+        <p:spPr>
+          <a:xfrm>
+            <a:off x="548640" y="365760"/>
+            <a:ext cx="11064240" cy="1097280"/>
+          </a:xfrm>
+        </p:spPr>
+        <p:txBody>
+          <a:bodyPr/>
+          <a:lstStyle/>
+          <a:p>
+            <a:r>
+              <a:rPr sz="3600" b="1">
+                <a:latin typeface="Arial"/>
+              </a:rPr>
+              <a:t>Ground it</a:t>
+            </a:r>
+          </a:p>
+        </p:txBody>
+      </p:sp>
+      <p:sp>
+        <p:nvSpPr>
+          <p:cNvPr id="3" name="Content Placeholder 2"/>
+          <p:cNvSpPr>
+            <a:spLocks noGrp="1"/>
+          </p:cNvSpPr>
+          <p:nvPr>
+            <p:ph idx="1"/>
+          </p:nvPr>
+        </p:nvSpPr>
+        <p:spPr>
+          <a:xfrm>
+            <a:off x="548640" y="1554480"/>
+            <a:ext cx="11064240" cy="4937760"/>
+          </a:xfrm>
+        </p:spPr>
+        <p:txBody>
+          <a:bodyPr wrap="square"/>
+          <a:lstStyle/>
+          <a:p>
+            <a:pPr marL="0" indent="0">
+              <a:buNone/>
+            </a:pPr>
+            <a:r>
+              <a:rPr sz="1800" b="0">
+                <a:latin typeface="Arial"/>
+              </a:rPr>
+              <a:t>Block 4 of 7 - 1:15-2:10 - 55 minutes</a:t>
+            </a:r>
+          </a:p>
+          <a:p>
+            <a:pPr marL="0" indent="0">
+              <a:buNone/>
+            </a:pPr>
+            <a:r>
+              <a:rPr sz="2000" b="0">
+                <a:latin typeface="Arial"/>
+              </a:rPr>
+              <a:t>By the end of this block: the same agent, giving cited answers from real evidence. A before and an after.</a:t>
+            </a:r>
+          </a:p>
+          <a:p>
+            <a:pPr lvl="1">
+              <a:buNone/>
+            </a:pPr>
+            <a:r>
+              <a:rPr sz="2000" b="0">
+                <a:latin typeface="Arial"/>
+              </a:rPr>
+              <a:t>1. In Copilot Chat, type /ground-my-agent.</a:t>
+            </a:r>
+          </a:p>
+          <a:p>
+            <a:pPr lvl="1">
+              <a:buNone/>
+            </a:pPr>
+            <a:r>
+              <a:rPr sz="2000" b="0">
+                <a:latin typeface="Arial"/>
+              </a:rPr>
+              <a:t>2. Use the same file as this morning.</a:t>
+            </a:r>
+          </a:p>
+          <a:p>
+            <a:pPr lvl="1">
+              <a:buNone/>
+            </a:pPr>
+            <a:r>
+              <a:rPr sz="2000" b="0">
+                <a:latin typeface="Arial"/>
+              </a:rPr>
+              <a:t>3. Your agent reads that file's checker report from sample-course/evidence: GLOW for documents, axe for the web page.</a:t>
+            </a:r>
+          </a:p>
+          <a:p>
+            <a:pPr lvl="1">
+              <a:buNone/>
+            </a:pPr>
+            <a:r>
+              <a:rPr sz="2000" b="0">
+                <a:latin typeface="Arial"/>
+              </a:rPr>
+              <a:t>4. Compare the two answers.</a:t>
+            </a:r>
+          </a:p>
+        </p:txBody>
+      </p:sp>
+    </p:spTree>
+  </p:cSld>
+  <p:clrMapOvr>
+    <a:masterClrMapping/>
+  </p:clrMapOvr>
+</p:sld>
+</file>
+
+<file path=ppt/slides/slide16.xml><?xml version="1.0" encoding="utf-8"?>
+<p:sld xmlns:a="http://schemas.openxmlformats.org/drawingml/2006/main" xmlns:p="http://schemas.openxmlformats.org/presentationml/2006/main" xmlns:r="http://schemas.openxmlformats.org/officeDocument/2006/relationships">
+  <p:cSld>
+    <p:spTree>
+      <p:nvGrpSpPr>
+        <p:cNvPr id="1" name=""/>
+        <p:cNvGrpSpPr/>
+        <p:nvPr/>
+      </p:nvGrpSpPr>
+      <p:grpSpPr/>
+      <p:sp>
+        <p:nvSpPr>
+          <p:cNvPr id="2" name="Title 1"/>
+          <p:cNvSpPr>
+            <a:spLocks noGrp="1"/>
+          </p:cNvSpPr>
+          <p:nvPr>
+            <p:ph type="title"/>
+          </p:nvPr>
+        </p:nvSpPr>
+        <p:spPr>
+          <a:xfrm>
+            <a:off x="548640" y="365760"/>
+            <a:ext cx="11064240" cy="1097280"/>
+          </a:xfrm>
+        </p:spPr>
+        <p:txBody>
+          <a:bodyPr/>
+          <a:lstStyle/>
+          <a:p>
+            <a:r>
+              <a:rPr sz="3600" b="1">
+                <a:latin typeface="Arial"/>
+              </a:rPr>
+              <a:t>Before and after</a:t>
             </a:r>
           </a:p>
         </p:txBody>
@@ -6478,7 +6684,7 @@
         <p:spPr>
           <a:xfrm>
             <a:off x="548640" y="1463040"/>
-            <a:ext cx="11064240" cy="1234440"/>
+            <a:ext cx="11064240" cy="822960"/>
           </a:xfrm>
           <a:prstGeom prst="rect">
             <a:avLst/>
@@ -6495,7 +6701,7 @@
               <a:rPr sz="1800">
                 <a:latin typeface="Arial"/>
               </a:rPr>
-              <a:t>Activity 4 - 30 minutes - /w/ahg-2026/4</a:t>
+              <a:t>Watch me</a:t>
             </a:r>
           </a:p>
           <a:p>
@@ -6503,30 +6709,22 @@
               <a:rPr sz="1800">
                 <a:latin typeface="Arial"/>
               </a:rPr>
-              <a:t>Sort your own tasks into three piles. Then write the safeguard that makes the middle pile safe.</a:t>
-            </a:r>
-          </a:p>
-          <a:p>
-            <a:r>
-              <a:rPr sz="1800">
-                <a:latin typeface="Arial"/>
-              </a:rPr>
-              <a:t>The three piles</a:t>
+              <a:t>Maria's agent, on the scanned reading:</a:t>
             </a:r>
           </a:p>
         </p:txBody>
       </p:sp>
       <p:graphicFrame>
         <p:nvGraphicFramePr>
-          <p:cNvPr id="4" name="Table 3" descr="The three piles"/>
+          <p:cNvPr id="4" name="Table 3" descr="Maria's agent, on the scanned reading:"/>
           <p:cNvGraphicFramePr>
             <a:graphicFrameLocks noGrp="1"/>
           </p:cNvGraphicFramePr>
           <p:nvPr/>
         </p:nvGraphicFramePr>
         <p:xfrm>
-          <a:off x="548640" y="2971800"/>
-          <a:ext cx="11064240" cy="1920240"/>
+          <a:off x="548640" y="2560320"/>
+          <a:ext cx="11064240" cy="2331720"/>
         </p:xfrm>
         <a:graphic>
           <a:graphicData uri="http://schemas.openxmlformats.org/drawingml/2006/table">
@@ -6538,7 +6736,7 @@
                 <a:gridCol w="5532120"/>
                 <a:gridCol w="5532120"/>
               </a:tblGrid>
-              <a:tr h="480060">
+              <a:tr h="466344">
                 <a:tc>
                   <a:txBody>
                     <a:bodyPr/>
@@ -6548,7 +6746,7 @@
                         <a:rPr sz="1800" b="1">
                           <a:latin typeface="Arial"/>
                         </a:rPr>
-                        <a:t>Pile</a:t>
+                        <a:t>Before evidence</a:t>
                       </a:r>
                     </a:p>
                   </a:txBody>
@@ -6563,14 +6761,14 @@
                         <a:rPr sz="1800" b="1">
                           <a:latin typeface="Arial"/>
                         </a:rPr>
-                        <a:t>Example</a:t>
+                        <a:t>After evidence</a:t>
                       </a:r>
                     </a:p>
                   </a:txBody>
                   <a:tcPr/>
                 </a:tc>
               </a:tr>
-              <a:tr h="480060">
+              <a:tr h="466344">
                 <a:tc>
                   <a:txBody>
                     <a:bodyPr/>
@@ -6580,7 +6778,7 @@
                         <a:rPr sz="1800">
                           <a:latin typeface="Arial"/>
                         </a:rPr>
-                        <a:t>Helpful for AI</a:t>
+                        <a:t>Guessed the file was an ordinary PDF</a:t>
                       </a:r>
                     </a:p>
                   </a:txBody>
@@ -6595,14 +6793,14 @@
                         <a:rPr sz="1800">
                           <a:latin typeface="Arial"/>
                         </a:rPr>
-                        <a:t>Drafting alt text for a chart you wrote</a:t>
+                        <a:t>Knew it was two pages of pictures of text</a:t>
                       </a:r>
                     </a:p>
                   </a:txBody>
                   <a:tcPr/>
                 </a:tc>
               </a:tr>
-              <a:tr h="480060">
+              <a:tr h="466344">
                 <a:tc>
                   <a:txBody>
                     <a:bodyPr/>
@@ -6612,7 +6810,7 @@
                         <a:rPr sz="1800">
                           <a:latin typeface="Arial"/>
                         </a:rPr>
-                        <a:t>Risky without review</a:t>
+                        <a:t>WCAG 2.1, no links</a:t>
                       </a:r>
                     </a:p>
                   </a:txBody>
@@ -6627,14 +6825,14 @@
                         <a:rPr sz="1800">
                           <a:latin typeface="Arial"/>
                         </a:rPr>
-                        <a:t>Summarising a policy document</a:t>
+                        <a:t>WCAG 2.2, 1.4.5 Images of Text, linked</a:t>
                       </a:r>
                     </a:p>
                   </a:txBody>
                   <a:tcPr/>
                 </a:tc>
               </a:tr>
-              <a:tr h="480060">
+              <a:tr h="466344">
                 <a:tc>
                   <a:txBody>
                     <a:bodyPr/>
@@ -6644,7 +6842,7 @@
                         <a:rPr sz="1800">
                           <a:latin typeface="Arial"/>
                         </a:rPr>
-                        <a:t>Human required</a:t>
+                        <a:t>"Compliant"</a:t>
                       </a:r>
                     </a:p>
                   </a:txBody>
@@ -6659,7 +6857,39 @@
                         <a:rPr sz="1800">
                           <a:latin typeface="Arial"/>
                         </a:rPr>
-                        <a:t>Deciding what an image is for</a:t>
+                        <a:t>What was checked, and what a person must check</a:t>
+                      </a:r>
+                    </a:p>
+                  </a:txBody>
+                  <a:tcPr/>
+                </a:tc>
+              </a:tr>
+              <a:tr h="466344">
+                <a:tc>
+                  <a:txBody>
+                    <a:bodyPr/>
+                    <a:lstStyle/>
+                    <a:p>
+                      <a:r>
+                        <a:rPr sz="1800">
+                          <a:latin typeface="Arial"/>
+                        </a:rPr>
+                        <a:t>Fix the PDF</a:t>
+                      </a:r>
+                    </a:p>
+                  </a:txBody>
+                  <a:tcPr/>
+                </a:tc>
+                <a:tc>
+                  <a:txBody>
+                    <a:bodyPr/>
+                    <a:lstStyle/>
+                    <a:p>
+                      <a:r>
+                        <a:rPr sz="1800">
+                          <a:latin typeface="Arial"/>
+                        </a:rPr>
+                        <a:t>Get a clean source, then large print and audio for everyone</a:t>
                       </a:r>
                     </a:p>
                   </a:txBody>
@@ -6678,278 +6908,6 @@
 </p:sld>
 </file>
 
-<file path=ppt/slides/slide15.xml><?xml version="1.0" encoding="utf-8"?>
-<p:sld xmlns:a="http://schemas.openxmlformats.org/drawingml/2006/main" xmlns:p="http://schemas.openxmlformats.org/presentationml/2006/main" xmlns:r="http://schemas.openxmlformats.org/officeDocument/2006/relationships">
-  <p:cSld>
-    <p:spTree>
-      <p:nvGrpSpPr>
-        <p:cNvPr id="1" name=""/>
-        <p:cNvGrpSpPr/>
-        <p:nvPr/>
-      </p:nvGrpSpPr>
-      <p:grpSpPr/>
-      <p:sp>
-        <p:nvSpPr>
-          <p:cNvPr id="2" name="Title 1"/>
-          <p:cNvSpPr>
-            <a:spLocks noGrp="1"/>
-          </p:cNvSpPr>
-          <p:nvPr>
-            <p:ph type="title"/>
-          </p:nvPr>
-        </p:nvSpPr>
-        <p:spPr>
-          <a:xfrm>
-            <a:off x="548640" y="365760"/>
-            <a:ext cx="11064240" cy="1097280"/>
-          </a:xfrm>
-        </p:spPr>
-        <p:txBody>
-          <a:bodyPr/>
-          <a:lstStyle/>
-          <a:p>
-            <a:r>
-              <a:rPr sz="3600" b="1">
-                <a:latin typeface="Arial"/>
-              </a:rPr>
-              <a:t>The Accessibility Agent Formula</a:t>
-            </a:r>
-          </a:p>
-        </p:txBody>
-      </p:sp>
-      <p:sp>
-        <p:nvSpPr>
-          <p:cNvPr id="3" name="Content Placeholder 2"/>
-          <p:cNvSpPr>
-            <a:spLocks noGrp="1"/>
-          </p:cNvSpPr>
-          <p:nvPr>
-            <p:ph idx="1"/>
-          </p:nvPr>
-        </p:nvSpPr>
-        <p:spPr>
-          <a:xfrm>
-            <a:off x="548640" y="1554480"/>
-            <a:ext cx="11064240" cy="4937760"/>
-          </a:xfrm>
-        </p:spPr>
-        <p:txBody>
-          <a:bodyPr wrap="square"/>
-          <a:lstStyle/>
-          <a:p>
-            <a:pPr marL="0" indent="0">
-              <a:buNone/>
-            </a:pPr>
-            <a:r>
-              <a:rPr sz="1800" b="0">
-                <a:latin typeface="Arial"/>
-              </a:rPr>
-              <a:t>Activity 5 - 35 minutes - /w/ahg-2026/5</a:t>
-            </a:r>
-          </a:p>
-          <a:p>
-            <a:pPr lvl="1"/>
-            <a:r>
-              <a:rPr sz="2000" b="0">
-                <a:latin typeface="Arial"/>
-              </a:rPr>
-              <a:t>Role: Who is it being, and for whom?</a:t>
-            </a:r>
-          </a:p>
-          <a:p>
-            <a:pPr lvl="1"/>
-            <a:r>
-              <a:rPr sz="2000" b="0">
-                <a:latin typeface="Arial"/>
-              </a:rPr>
-              <a:t>Task: One job, said plainly.</a:t>
-            </a:r>
-          </a:p>
-          <a:p>
-            <a:pPr lvl="1"/>
-            <a:r>
-              <a:rPr sz="2000" b="0">
-                <a:latin typeface="Arial"/>
-              </a:rPr>
-              <a:t>Trusted guidance: Whose rules - WCAG, ACB large print, your own style guide?</a:t>
-            </a:r>
-          </a:p>
-          <a:p>
-            <a:pPr lvl="1"/>
-            <a:r>
-              <a:rPr sz="2000" b="0">
-                <a:latin typeface="Arial"/>
-              </a:rPr>
-              <a:t>Output format: What comes back, in what shape, so a person can use it?</a:t>
-            </a:r>
-          </a:p>
-          <a:p>
-            <a:pPr lvl="1"/>
-            <a:r>
-              <a:rPr sz="2000" b="0">
-                <a:latin typeface="Arial"/>
-              </a:rPr>
-              <a:t>Human review: Who checks what, before it goes out?</a:t>
-            </a:r>
-          </a:p>
-          <a:p>
-            <a:pPr marL="0" indent="0">
-              <a:buNone/>
-            </a:pPr>
-            <a:r>
-              <a:rPr sz="2000" b="0">
-                <a:latin typeface="Arial"/>
-              </a:rPr>
-              <a:t>You are not writing code. You are writing instructions for a colleague who is fast, literal, and has never met your institution.</a:t>
-            </a:r>
-          </a:p>
-        </p:txBody>
-      </p:sp>
-    </p:spTree>
-  </p:cSld>
-  <p:clrMapOvr>
-    <a:masterClrMapping/>
-  </p:clrMapOvr>
-</p:sld>
-</file>
-
-<file path=ppt/slides/slide16.xml><?xml version="1.0" encoding="utf-8"?>
-<p:sld xmlns:a="http://schemas.openxmlformats.org/drawingml/2006/main" xmlns:p="http://schemas.openxmlformats.org/presentationml/2006/main" xmlns:r="http://schemas.openxmlformats.org/officeDocument/2006/relationships">
-  <p:cSld>
-    <p:spTree>
-      <p:nvGrpSpPr>
-        <p:cNvPr id="1" name=""/>
-        <p:cNvGrpSpPr/>
-        <p:nvPr/>
-      </p:nvGrpSpPr>
-      <p:grpSpPr/>
-      <p:sp>
-        <p:nvSpPr>
-          <p:cNvPr id="2" name="Title 1"/>
-          <p:cNvSpPr>
-            <a:spLocks noGrp="1"/>
-          </p:cNvSpPr>
-          <p:nvPr>
-            <p:ph type="title"/>
-          </p:nvPr>
-        </p:nvSpPr>
-        <p:spPr>
-          <a:xfrm>
-            <a:off x="548640" y="365760"/>
-            <a:ext cx="11064240" cy="1097280"/>
-          </a:xfrm>
-        </p:spPr>
-        <p:txBody>
-          <a:bodyPr/>
-          <a:lstStyle/>
-          <a:p>
-            <a:r>
-              <a:rPr sz="3600" b="1">
-                <a:latin typeface="Arial"/>
-              </a:rPr>
-              <a:t>GLOW Lab 1: Accessible Communications</a:t>
-            </a:r>
-          </a:p>
-        </p:txBody>
-      </p:sp>
-      <p:sp>
-        <p:nvSpPr>
-          <p:cNvPr id="3" name="Content Placeholder 2"/>
-          <p:cNvSpPr>
-            <a:spLocks noGrp="1"/>
-          </p:cNvSpPr>
-          <p:nvPr>
-            <p:ph idx="1"/>
-          </p:nvPr>
-        </p:nvSpPr>
-        <p:spPr>
-          <a:xfrm>
-            <a:off x="548640" y="1554480"/>
-            <a:ext cx="11064240" cy="4937760"/>
-          </a:xfrm>
-        </p:spPr>
-        <p:txBody>
-          <a:bodyPr wrap="square"/>
-          <a:lstStyle/>
-          <a:p>
-            <a:pPr marL="0" indent="0">
-              <a:buNone/>
-            </a:pPr>
-            <a:r>
-              <a:rPr sz="1800" b="0">
-                <a:latin typeface="Arial"/>
-              </a:rPr>
-              <a:t>Lab 1 - 45 minutes - /w/ahg-2026/6</a:t>
-            </a:r>
-          </a:p>
-          <a:p>
-            <a:pPr marL="0" indent="0">
-              <a:buNone/>
-            </a:pPr>
-            <a:r>
-              <a:rPr sz="2000" b="0">
-                <a:latin typeface="Arial"/>
-              </a:rPr>
-              <a:t>Rewrite a real message so more people can read it.</a:t>
-            </a:r>
-          </a:p>
-          <a:p>
-            <a:pPr lvl="1"/>
-            <a:r>
-              <a:rPr sz="2000" b="0">
-                <a:latin typeface="Arial"/>
-              </a:rPr>
-              <a:t>Plain words, short sentences.</a:t>
-            </a:r>
-          </a:p>
-          <a:p>
-            <a:pPr lvl="1"/>
-            <a:r>
-              <a:rPr sz="2000" b="0">
-                <a:latin typeface="Arial"/>
-              </a:rPr>
-              <a:t>Real headings, not bold text pretending to be headings.</a:t>
-            </a:r>
-          </a:p>
-          <a:p>
-            <a:pPr lvl="1"/>
-            <a:r>
-              <a:rPr sz="2000" b="0">
-                <a:latin typeface="Arial"/>
-              </a:rPr>
-              <a:t>Links that say where they go.</a:t>
-            </a:r>
-          </a:p>
-          <a:p>
-            <a:pPr lvl="1"/>
-            <a:r>
-              <a:rPr sz="2000" b="0">
-                <a:latin typeface="Arial"/>
-              </a:rPr>
-              <a:t>Words that welcome an access request instead of burying it.</a:t>
-            </a:r>
-          </a:p>
-          <a:p>
-            <a:pPr marL="0" indent="0">
-              <a:buNone/>
-            </a:pPr>
-            <a:r>
-              <a:rPr sz="2000" b="0">
-                <a:latin typeface="Arial"/>
-              </a:rPr>
-              <a:t>Bring your own message if you have one. The scenarios are a net, not a rail.</a:t>
-            </a:r>
-          </a:p>
-        </p:txBody>
-      </p:sp>
-    </p:spTree>
-  </p:cSld>
-  <p:clrMapOvr>
-    <a:masterClrMapping/>
-  </p:clrMapOvr>
-</p:sld>
-</file>
-
 <file path=ppt/slides/slide17.xml><?xml version="1.0" encoding="utf-8"?>
 <p:sld xmlns:a="http://schemas.openxmlformats.org/drawingml/2006/main" xmlns:p="http://schemas.openxmlformats.org/presentationml/2006/main" xmlns:r="http://schemas.openxmlformats.org/officeDocument/2006/relationships">
   <p:cSld>
@@ -6984,7 +6942,7 @@
               <a:rPr sz="3600" b="1">
                 <a:latin typeface="Arial"/>
               </a:rPr>
-              <a:t>Back at 1:15</a:t>
+              <a:t>Any checker, and a person</a:t>
             </a:r>
           </a:p>
         </p:txBody>
@@ -7016,7 +6974,7 @@
               <a:rPr sz="1800" b="0">
                 <a:latin typeface="Arial"/>
               </a:rPr>
-              <a:t>Lunch - 12:15-1:15</a:t>
+              <a:t>The skill, not the tool</a:t>
             </a:r>
           </a:p>
           <a:p>
@@ -7027,7 +6985,7 @@
               <a:rPr sz="2000" b="0">
                 <a:latin typeface="Arial"/>
               </a:rPr>
-              <a:t>Nothing is due. Nothing is graded.</a:t>
+              <a:t>The same works with Word's and PowerPoint's own Accessibility Checker, Acrobat's checker, or Accessibility Insights. The skill is giving your agent evidence.</a:t>
             </a:r>
           </a:p>
           <a:p>
@@ -7038,7 +6996,43 @@
               <a:rPr sz="2000" b="0">
                 <a:latin typeface="Arial"/>
               </a:rPr>
-              <a:t>If you want more: the optional Run Your Agent lab is open, and it is genuinely optional.</a:t>
+              <a:t>And some barriers no checker sees:</a:t>
+            </a:r>
+          </a:p>
+          <a:p>
+            <a:pPr lvl="1"/>
+            <a:r>
+              <a:rPr sz="2000" b="0">
+                <a:latin typeface="Arial"/>
+              </a:rPr>
+              <a:t>The accommodations statement, last, in 8-point gray, contradicted two sections earlier by a no-makeup-exams rule in capitals.</a:t>
+            </a:r>
+          </a:p>
+          <a:p>
+            <a:pPr lvl="1"/>
+            <a:r>
+              <a:rPr sz="2000" b="0">
+                <a:latin typeface="Arial"/>
+              </a:rPr>
+              <a:t>Alt text that says "image.png".</a:t>
+            </a:r>
+          </a:p>
+          <a:p>
+            <a:pPr lvl="1"/>
+            <a:r>
+              <a:rPr sz="2000" b="0">
+                <a:latin typeface="Arial"/>
+              </a:rPr>
+              <a:t>A lab that only works if you can see color.</a:t>
+            </a:r>
+          </a:p>
+          <a:p>
+            <a:pPr lvl="1"/>
+            <a:r>
+              <a:rPr sz="2000" b="0">
+                <a:latin typeface="Arial"/>
+              </a:rPr>
+              <a:t>Captions that turn Ebbinghaus into "ebb in house".</a:t>
             </a:r>
           </a:p>
         </p:txBody>
@@ -7085,7 +7079,7 @@
               <a:rPr sz="3600" b="1">
                 <a:latin typeface="Arial"/>
               </a:rPr>
-              <a:t>Where the room is</a:t>
+              <a:t>Back at 2:20</a:t>
             </a:r>
           </a:p>
         </p:txBody>
@@ -7117,7 +7111,7 @@
               <a:rPr sz="1800" b="0">
                 <a:latin typeface="Arial"/>
               </a:rPr>
-              <a:t>1:15 - Re-entry</a:t>
+              <a:t>Break - 10 minutes</a:t>
             </a:r>
           </a:p>
           <a:p>
@@ -7128,18 +7122,7 @@
               <a:rPr sz="2000" b="0">
                 <a:latin typeface="Arial"/>
               </a:rPr>
-              <a:t>Here is what the room has finished so far. No names, just counts.</a:t>
-            </a:r>
-          </a:p>
-          <a:p>
-            <a:pPr marL="0" indent="0">
-              <a:buNone/>
-            </a:pPr>
-            <a:r>
-              <a:rPr sz="2800" b="1">
-                <a:latin typeface="Arial"/>
-              </a:rPr>
-              <a:t>Nobody is behind. There is no behind.</a:t>
+              <a:t>Next, your agent goes public. Nicely.</a:t>
             </a:r>
           </a:p>
         </p:txBody>
@@ -7186,7 +7169,7 @@
               <a:rPr sz="3600" b="1">
                 <a:latin typeface="Arial"/>
               </a:rPr>
-              <a:t>GLOW Lab 2: Alt Text and Human Judgment</a:t>
+              <a:t>Share it</a:t>
             </a:r>
           </a:p>
         </p:txBody>
@@ -7218,7 +7201,7 @@
               <a:rPr sz="1800" b="0">
                 <a:latin typeface="Arial"/>
               </a:rPr>
-              <a:t>Lab 2 - 45 minutes - /w/ahg-2026/7</a:t>
+              <a:t>Block 5 of 7 - 2:20-3:00 - 40 minutes</a:t>
             </a:r>
           </a:p>
           <a:p>
@@ -7229,7 +7212,51 @@
               <a:rPr sz="2000" b="0">
                 <a:latin typeface="Arial"/>
               </a:rPr>
-              <a:t>A machine can tell you what is in the picture.</a:t>
+              <a:t>By the end of this block: your own pull request in the open-source Accessibility Agents project.</a:t>
+            </a:r>
+          </a:p>
+          <a:p>
+            <a:pPr lvl="1">
+              <a:buNone/>
+            </a:pPr>
+            <a:r>
+              <a:rPr sz="2000" b="0">
+                <a:latin typeface="Arial"/>
+              </a:rPr>
+              <a:t>1. Open letitglow.app/workshop/ahg-2026/share in your browser, and choose your my-agent/SKILL.md.</a:t>
+            </a:r>
+          </a:p>
+          <a:p>
+            <a:pPr lvl="1">
+              <a:buNone/>
+            </a:pPr>
+            <a:r>
+              <a:rPr sz="2000" b="0">
+                <a:latin typeface="Arial"/>
+              </a:rPr>
+              <a:t>2. Press Open GitHub with my agent. GitHub opens with your agent filled in.</a:t>
+            </a:r>
+          </a:p>
+          <a:p>
+            <a:pPr lvl="1">
+              <a:buNone/>
+            </a:pPr>
+            <a:r>
+              <a:rPr sz="2000" b="0">
+                <a:latin typeface="Arial"/>
+              </a:rPr>
+              <a:t>3. Press Propose changes. GitHub makes your own copy, called a fork.</a:t>
+            </a:r>
+          </a:p>
+          <a:p>
+            <a:pPr lvl="1">
+              <a:buNone/>
+            </a:pPr>
+            <a:r>
+              <a:rPr sz="2000" b="0">
+                <a:latin typeface="Arial"/>
+              </a:rPr>
+              <a:t>4. Press Create pull request, then Create pull request again.</a:t>
             </a:r>
           </a:p>
           <a:p>
@@ -7237,21 +7264,10 @@
               <a:buNone/>
             </a:pPr>
             <a:r>
-              <a:rPr sz="2800" b="1">
-                <a:latin typeface="Arial"/>
-              </a:rPr>
-              <a:t>Only you can say what the picture is for.</a:t>
-            </a:r>
-          </a:p>
-          <a:p>
-            <a:pPr marL="0" indent="0">
-              <a:buNone/>
-            </a:pPr>
-            <a:r>
               <a:rPr sz="2000" b="0">
                 <a:latin typeface="Arial"/>
               </a:rPr>
-              <a:t>So this lab gives you the context in words, and descriptions somebody already wrote. Your job is to judge them.</a:t>
+              <a:t>That is your contribution. Buttons only. No code.</a:t>
             </a:r>
           </a:p>
         </p:txBody>
@@ -7298,7 +7314,7 @@
               <a:rPr sz="3600" b="1">
                 <a:latin typeface="Arial"/>
               </a:rPr>
-              <a:t>Two ways, and the first one is enough</a:t>
+              <a:t>Forty thousand files and three people</a:t>
             </a:r>
           </a:p>
         </p:txBody>
@@ -7330,29 +7346,29 @@
               <a:rPr sz="1800" b="0">
                 <a:latin typeface="Arial"/>
               </a:rPr>
-              <a:t>The promise</a:t>
-            </a:r>
-          </a:p>
-          <a:p>
-            <a:pPr lvl="1">
+              <a:t>The problem</a:t>
+            </a:r>
+          </a:p>
+          <a:p>
+            <a:pPr marL="0" indent="0">
               <a:buNone/>
             </a:pPr>
             <a:r>
               <a:rPr sz="2000" b="0">
                 <a:latin typeface="Arial"/>
               </a:rPr>
-              <a:t>1. GLOW, in a browser. The whole day. No account, no sign-in, no AI.</a:t>
-            </a:r>
-          </a:p>
-          <a:p>
-            <a:pPr lvl="1">
+              <a:t>WCAG 2.2 is the standard. Title II made it a deadline for public colleges and universities.</a:t>
+            </a:r>
+          </a:p>
+          <a:p>
+            <a:pPr marL="0" indent="0">
               <a:buNone/>
             </a:pPr>
             <a:r>
               <a:rPr sz="2000" b="0">
                 <a:latin typeface="Arial"/>
               </a:rPr>
-              <a:t>2. Plus your own assistant, if you already have one. An upgrade on the same exercise, never a different one.</a:t>
+              <a:t>Every syllabus, slide deck, scanned reading and course page is in scope, and most of them are documents, not web pages.</a:t>
             </a:r>
           </a:p>
           <a:p>
@@ -7363,18 +7379,7 @@
               <a:rPr sz="2800" b="1">
                 <a:latin typeface="Arial"/>
               </a:rPr>
-              <a:t>Nothing today needs an account with anyone.</a:t>
-            </a:r>
-          </a:p>
-          <a:p>
-            <a:pPr marL="0" indent="0">
-              <a:buNone/>
-            </a:pPr>
-            <a:r>
-              <a:rPr sz="2000" b="0">
-                <a:latin typeface="Arial"/>
-              </a:rPr>
-              <a:t>One rule if you use an assistant: paste text, never upload files - and never paste anything private.</a:t>
+              <a:t>Nobody fixes that by working harder. The question is how to scale without losing quality, accountability or trust.</a:t>
             </a:r>
           </a:p>
         </p:txBody>
@@ -7421,7 +7426,7 @@
               <a:rPr sz="3600" b="1">
                 <a:latin typeface="Arial"/>
               </a:rPr>
-              <a:t>Four questions, in this order</a:t>
+              <a:t>Merged, with your name on it</a:t>
             </a:r>
           </a:p>
         </p:txBody>
@@ -7453,62 +7458,29 @@
               <a:rPr sz="1800" b="0">
                 <a:latin typeface="Arial"/>
               </a:rPr>
-              <a:t>Lab 2 - the method</a:t>
-            </a:r>
-          </a:p>
-          <a:p>
-            <a:pPr lvl="1">
+              <a:t>Open source, live</a:t>
+            </a:r>
+          </a:p>
+          <a:p>
+            <a:pPr marL="0" indent="0">
               <a:buNone/>
             </a:pPr>
             <a:r>
               <a:rPr sz="2000" b="0">
                 <a:latin typeface="Arial"/>
               </a:rPr>
-              <a:t>1. Why is this image here? If you cannot answer, it may not need to be.</a:t>
-            </a:r>
-          </a:p>
-          <a:p>
-            <a:pPr lvl="1">
+              <a:t>As your pull requests arrive, I review and merge them, here, on the screen.</a:t>
+            </a:r>
+          </a:p>
+          <a:p>
+            <a:pPr marL="0" indent="0">
               <a:buNone/>
             </a:pPr>
             <a:r>
-              <a:rPr sz="2000" b="0">
-                <a:latin typeface="Arial"/>
-              </a:rPr>
-              <a:t>2. What must a reader know about it to follow the page?</a:t>
-            </a:r>
-          </a:p>
-          <a:p>
-            <a:pPr lvl="1">
-              <a:buNone/>
-            </a:pPr>
-            <a:r>
-              <a:rPr sz="2000" b="0">
-                <a:latin typeface="Arial"/>
-              </a:rPr>
-              <a:t>3. What can you leave out? Alt text is not an inventory.</a:t>
-            </a:r>
-          </a:p>
-          <a:p>
-            <a:pPr lvl="1">
-              <a:buNone/>
-            </a:pPr>
-            <a:r>
-              <a:rPr sz="2000" b="0">
-                <a:latin typeface="Arial"/>
-              </a:rPr>
-              <a:t>4. What must a person verify before this goes live?</a:t>
-            </a:r>
-          </a:p>
-          <a:p>
-            <a:pPr marL="0" indent="0">
-              <a:buNone/>
-            </a:pPr>
-            <a:r>
-              <a:rPr sz="2000" b="0">
-                <a:latin typeface="Arial"/>
-              </a:rPr>
-              <a:t>Generated descriptions are confident and sometimes wrong. Question four is the whole job.</a:t>
+              <a:rPr sz="2800" b="1">
+                <a:latin typeface="Arial"/>
+              </a:rPr>
+              <a:t>Every agent merged today lives in community/ahg-2026 in the Accessibility Agents project, for anyone in higher education to use and improve.</a:t>
             </a:r>
           </a:p>
         </p:txBody>
@@ -7555,7 +7527,7 @@
               <a:rPr sz="3600" b="1">
                 <a:latin typeface="Arial"/>
               </a:rPr>
-              <a:t>GLOW Lab 3: Remediation Planning</a:t>
+              <a:t>Build the office</a:t>
             </a:r>
           </a:p>
         </p:txBody>
@@ -7587,7 +7559,7 @@
               <a:rPr sz="1800" b="0">
                 <a:latin typeface="Arial"/>
               </a:rPr>
-              <a:t>Lab 3 - 45 minutes - /w/ahg-2026/8</a:t>
+              <a:t>Block 6 of 7 - 3:00-3:45 - 45 minutes</a:t>
             </a:r>
           </a:p>
           <a:p>
@@ -7598,29 +7570,51 @@
               <a:rPr sz="2000" b="0">
                 <a:latin typeface="Arial"/>
               </a:rPr>
-              <a:t>Take a real document, slide deck, or course page. List what is broken. Then put the fixes in order.</a:t>
-            </a:r>
-          </a:p>
-          <a:p>
-            <a:pPr marL="0" indent="0">
+              <a:t>By the end of this block: your agent working inside a team, across the whole course, and one team report.</a:t>
+            </a:r>
+          </a:p>
+          <a:p>
+            <a:pPr lvl="1">
               <a:buNone/>
             </a:pPr>
             <a:r>
-              <a:rPr sz="2800" b="1">
-                <a:latin typeface="Arial"/>
-              </a:rPr>
-              <a:t>Order by who is blocked, not by what is easy.</a:t>
-            </a:r>
-          </a:p>
-          <a:p>
-            <a:pPr marL="0" indent="0">
+              <a:rPr sz="2000" b="0">
+                <a:latin typeface="Arial"/>
+              </a:rPr>
+              <a:t>1. In Copilot Chat, type /run-the-office.</a:t>
+            </a:r>
+          </a:p>
+          <a:p>
+            <a:pPr lvl="1">
               <a:buNone/>
             </a:pPr>
             <a:r>
               <a:rPr sz="2000" b="0">
                 <a:latin typeface="Arial"/>
               </a:rPr>
-              <a:t>Then write how you would coach the owner, so the next version starts better.</a:t>
+              <a:t>2. The coordinator sends each course file to its specialists, and yours where it fits.</a:t>
+            </a:r>
+          </a:p>
+          <a:p>
+            <a:pPr lvl="1">
+              <a:buNone/>
+            </a:pPr>
+            <a:r>
+              <a:rPr sz="2000" b="0">
+                <a:latin typeface="Arial"/>
+              </a:rPr>
+              <a:t>3. The standards reviewer checks everyone's work.</a:t>
+            </a:r>
+          </a:p>
+          <a:p>
+            <a:pPr lvl="1">
+              <a:buNone/>
+            </a:pPr>
+            <a:r>
+              <a:rPr sz="2000" b="0">
+                <a:latin typeface="Arial"/>
+              </a:rPr>
+              <a:t>4. You get the team report, with your agent's section in it.</a:t>
             </a:r>
           </a:p>
         </p:txBody>
@@ -7667,7 +7661,7 @@
               <a:rPr sz="3600" b="1">
                 <a:latin typeface="Arial"/>
               </a:rPr>
-              <a:t>Back at 3:05</a:t>
+              <a:t>One course, one report</a:t>
             </a:r>
           </a:p>
         </p:txBody>
@@ -7699,7 +7693,43 @@
               <a:rPr sz="1800" b="0">
                 <a:latin typeface="Arial"/>
               </a:rPr>
-              <a:t>Break - 10 minutes</a:t>
+              <a:t>What scale looks like</a:t>
+            </a:r>
+          </a:p>
+          <a:p>
+            <a:pPr lvl="1"/>
+            <a:r>
+              <a:rPr sz="2000" b="0">
+                <a:latin typeface="Arial"/>
+              </a:rPr>
+              <a:t>Seven files, eight specialists, plus yours.</a:t>
+            </a:r>
+          </a:p>
+          <a:p>
+            <a:pPr lvl="1"/>
+            <a:r>
+              <a:rPr sz="2000" b="0">
+                <a:latin typeface="Arial"/>
+              </a:rPr>
+              <a:t>Every finding: evidence, a WCAG 2.2 criterion with its link, and a named reviewer.</a:t>
+            </a:r>
+          </a:p>
+          <a:p>
+            <a:pPr lvl="1"/>
+            <a:r>
+              <a:rPr sz="2000" b="0">
+                <a:latin typeface="Arial"/>
+              </a:rPr>
+              <a:t>A list of what no checker could see, for a person.</a:t>
+            </a:r>
+          </a:p>
+          <a:p>
+            <a:pPr lvl="1"/>
+            <a:r>
+              <a:rPr sz="2000" b="0">
+                <a:latin typeface="Arial"/>
+              </a:rPr>
+              <a:t>Three lines at the top that a director will actually read.</a:t>
             </a:r>
           </a:p>
           <a:p>
@@ -7707,10 +7737,10 @@
               <a:buNone/>
             </a:pPr>
             <a:r>
-              <a:rPr sz="2000" b="0">
-                <a:latin typeface="Arial"/>
-              </a:rPr>
-              <a:t>The last stretch is the one you take home.</a:t>
+              <a:rPr sz="2800" b="1">
+                <a:latin typeface="Arial"/>
+              </a:rPr>
+              <a:t>That is quality, accountability and transparency, at scale. It is also a Tuesday.</a:t>
             </a:r>
           </a:p>
         </p:txBody>
@@ -7757,7 +7787,7 @@
               <a:rPr sz="3600" b="1">
                 <a:latin typeface="Arial"/>
               </a:rPr>
-              <a:t>Accessibility Champion Studio</a:t>
+              <a:t>Everyone's agents, together</a:t>
             </a:r>
           </a:p>
         </p:txBody>
@@ -7789,7 +7819,7 @@
               <a:rPr sz="1800" b="0">
                 <a:latin typeface="Arial"/>
               </a:rPr>
-              <a:t>Studio - 40 minutes - /w/ahg-2026/9</a:t>
+              <a:t>Agents in action</a:t>
             </a:r>
           </a:p>
           <a:p>
@@ -7800,45 +7830,18 @@
               <a:rPr sz="2000" b="0">
                 <a:latin typeface="Arial"/>
               </a:rPr>
-              <a:t>Design one workflow you can hand to someone else.</a:t>
-            </a:r>
-          </a:p>
-          <a:p>
-            <a:pPr lvl="1"/>
+              <a:t>One more run, on the screen: the office team with every agent this room merged.</a:t>
+            </a:r>
+          </a:p>
+          <a:p>
+            <a:pPr marL="0" indent="0">
+              <a:buNone/>
+            </a:pPr>
             <a:r>
               <a:rPr sz="2000" b="0">
                 <a:latin typeface="Arial"/>
               </a:rPr>
-              <a:t>Who does each step?</a:t>
-            </a:r>
-          </a:p>
-          <a:p>
-            <a:pPr lvl="1"/>
-            <a:r>
-              <a:rPr sz="2000" b="0">
-                <a:latin typeface="Arial"/>
-              </a:rPr>
-              <a:t>Where is the point a person must review before anything goes out?</a:t>
-            </a:r>
-          </a:p>
-          <a:p>
-            <a:pPr lvl="1"/>
-            <a:r>
-              <a:rPr sz="2000" b="0">
-                <a:latin typeface="Arial"/>
-              </a:rPr>
-              <a:t>What does the partner learn by doing it, that they did not know before?</a:t>
-            </a:r>
-          </a:p>
-          <a:p>
-            <a:pPr marL="0" indent="0">
-              <a:buNone/>
-            </a:pPr>
-            <a:r>
-              <a:rPr sz="2800" b="1">
-                <a:latin typeface="Arial"/>
-              </a:rPr>
-              <a:t>Build the workflow that still works when you are on holiday.</a:t>
+              <a:t>Listen for yours.</a:t>
             </a:r>
           </a:p>
         </p:txBody>
@@ -7885,87 +7888,260 @@
               <a:rPr sz="3600" b="1">
                 <a:latin typeface="Arial"/>
               </a:rPr>
-              <a:t>Three sentences for someone else</a:t>
-            </a:r>
-          </a:p>
-        </p:txBody>
-      </p:sp>
-      <p:sp>
-        <p:nvSpPr>
-          <p:cNvPr id="3" name="Content Placeholder 2"/>
-          <p:cNvSpPr>
-            <a:spLocks noGrp="1"/>
-          </p:cNvSpPr>
-          <p:nvPr>
-            <p:ph idx="1"/>
-          </p:nvPr>
+              <a:t>Take it home</a:t>
+            </a:r>
+          </a:p>
+        </p:txBody>
+      </p:sp>
+      <p:sp>
+        <p:nvSpPr>
+          <p:cNvPr id="3" name="TextBox 2"/>
+          <p:cNvSpPr txBox="1"/>
+          <p:nvPr/>
         </p:nvSpPr>
         <p:spPr>
           <a:xfrm>
-            <a:off x="548640" y="1554480"/>
-            <a:ext cx="11064240" cy="4937760"/>
+            <a:off x="548640" y="1463040"/>
+            <a:ext cx="11064240" cy="2057400"/>
           </a:xfrm>
+          <a:prstGeom prst="rect">
+            <a:avLst/>
+          </a:prstGeom>
+          <a:noFill/>
         </p:spPr>
         <p:txBody>
-          <a:bodyPr wrap="square"/>
-          <a:lstStyle/>
-          <a:p>
-            <a:pPr marL="0" indent="0">
-              <a:buNone/>
-            </a:pPr>
-            <a:r>
-              <a:rPr sz="1800" b="0">
-                <a:latin typeface="Arial"/>
-              </a:rPr>
-              <a:t>Peer review - 10 minutes - gallery</a:t>
-            </a:r>
-          </a:p>
-          <a:p>
-            <a:pPr lvl="1">
-              <a:buNone/>
-            </a:pPr>
-            <a:r>
-              <a:rPr sz="2000" b="0">
-                <a:latin typeface="Arial"/>
-              </a:rPr>
-              <a:t>1. One thing that is strong.</a:t>
-            </a:r>
-          </a:p>
-          <a:p>
-            <a:pPr lvl="1">
-              <a:buNone/>
-            </a:pPr>
-            <a:r>
-              <a:rPr sz="2000" b="0">
-                <a:latin typeface="Arial"/>
-              </a:rPr>
-              <a:t>2. One risk or missing safeguard.</a:t>
-            </a:r>
-          </a:p>
-          <a:p>
-            <a:pPr lvl="1">
-              <a:buNone/>
-            </a:pPr>
-            <a:r>
-              <a:rPr sz="2000" b="0">
-                <a:latin typeface="Arial"/>
-              </a:rPr>
-              <a:t>3. One way it could be reused somewhere else.</a:t>
-            </a:r>
-          </a:p>
-          <a:p>
-            <a:pPr marL="0" indent="0">
-              <a:buNone/>
-            </a:pPr>
-            <a:r>
-              <a:rPr sz="2000" b="0">
-                <a:latin typeface="Arial"/>
-              </a:rPr>
-              <a:t>Supportive, specific, and short. You are reviewing a workflow, not a person.</a:t>
-            </a:r>
-          </a:p>
-        </p:txBody>
-      </p:sp>
+          <a:bodyPr wrap="square">
+            <a:spAutoFit/>
+          </a:bodyPr>
+          <a:lstStyle/>
+          <a:p>
+            <a:r>
+              <a:rPr sz="1800">
+                <a:latin typeface="Arial"/>
+              </a:rPr>
+              <a:t>Block 7 of 7 - 3:45-4:15 - 30 minutes</a:t>
+            </a:r>
+          </a:p>
+          <a:p>
+            <a:r>
+              <a:rPr sz="1800">
+                <a:latin typeface="Arial"/>
+              </a:rPr>
+              <a:t>By the end of this block: a 30-day plan for your own campus.</a:t>
+            </a:r>
+          </a:p>
+          <a:p>
+            <a:r>
+              <a:rPr sz="1800">
+                <a:latin typeface="Arial"/>
+              </a:rPr>
+              <a:t>1. In Copilot Chat, type /my-30-day-plan.</a:t>
+            </a:r>
+          </a:p>
+          <a:p>
+            <a:r>
+              <a:rPr sz="1800">
+                <a:latin typeface="Arial"/>
+              </a:rPr>
+              <a:t>2. Then add your one-sentence commitment at letitglow.app/w/ahg-2026/11 for the wall.</a:t>
+            </a:r>
+          </a:p>
+          <a:p>
+            <a:r>
+              <a:rPr sz="1800">
+                <a:latin typeface="Arial"/>
+              </a:rPr>
+              <a:t>What you can do on Monday, with tools you already have:</a:t>
+            </a:r>
+          </a:p>
+        </p:txBody>
+      </p:sp>
+      <p:graphicFrame>
+        <p:nvGraphicFramePr>
+          <p:cNvPr id="4" name="Table 3" descr="What you can do on Monday, with tools you already have:"/>
+          <p:cNvGraphicFramePr>
+            <a:graphicFrameLocks noGrp="1"/>
+          </p:cNvGraphicFramePr>
+          <p:nvPr/>
+        </p:nvGraphicFramePr>
+        <p:xfrm>
+          <a:off x="548640" y="3794760"/>
+          <a:ext cx="11064240" cy="2331720"/>
+        </p:xfrm>
+        <a:graphic>
+          <a:graphicData uri="http://schemas.openxmlformats.org/drawingml/2006/table">
+            <a:tbl>
+              <a:tblPr firstRow="1" bandRow="1">
+                <a:tableStyleId>{5C22544A-7EE6-4342-B048-85BDC9FD1C3A}</a:tableStyleId>
+              </a:tblPr>
+              <a:tblGrid>
+                <a:gridCol w="5532120"/>
+                <a:gridCol w="5532120"/>
+              </a:tblGrid>
+              <a:tr h="466344">
+                <a:tc>
+                  <a:txBody>
+                    <a:bodyPr/>
+                    <a:lstStyle/>
+                    <a:p>
+                      <a:r>
+                        <a:rPr sz="1800" b="1">
+                          <a:latin typeface="Arial"/>
+                        </a:rPr>
+                        <a:t>You learned</a:t>
+                      </a:r>
+                    </a:p>
+                  </a:txBody>
+                  <a:tcPr/>
+                </a:tc>
+                <a:tc>
+                  <a:txBody>
+                    <a:bodyPr/>
+                    <a:lstStyle/>
+                    <a:p>
+                      <a:r>
+                        <a:rPr sz="1800" b="1">
+                          <a:latin typeface="Arial"/>
+                        </a:rPr>
+                        <a:t>Monday, with</a:t>
+                      </a:r>
+                    </a:p>
+                  </a:txBody>
+                  <a:tcPr/>
+                </a:tc>
+              </a:tr>
+              <a:tr h="466344">
+                <a:tc>
+                  <a:txBody>
+                    <a:bodyPr/>
+                    <a:lstStyle/>
+                    <a:p>
+                      <a:r>
+                        <a:rPr sz="1800">
+                          <a:latin typeface="Arial"/>
+                        </a:rPr>
+                        <a:t>Writing an agent</a:t>
+                      </a:r>
+                    </a:p>
+                  </a:txBody>
+                  <a:tcPr/>
+                </a:tc>
+                <a:tc>
+                  <a:txBody>
+                    <a:bodyPr/>
+                    <a:lstStyle/>
+                    <a:p>
+                      <a:r>
+                        <a:rPr sz="1800">
+                          <a:latin typeface="Arial"/>
+                        </a:rPr>
+                        <a:t>Any AI assistant, including your campus Copilot</a:t>
+                      </a:r>
+                    </a:p>
+                  </a:txBody>
+                  <a:tcPr/>
+                </a:tc>
+              </a:tr>
+              <a:tr h="466344">
+                <a:tc>
+                  <a:txBody>
+                    <a:bodyPr/>
+                    <a:lstStyle/>
+                    <a:p>
+                      <a:r>
+                        <a:rPr sz="1800">
+                          <a:latin typeface="Arial"/>
+                        </a:rPr>
+                        <a:t>Grounding it</a:t>
+                      </a:r>
+                    </a:p>
+                  </a:txBody>
+                  <a:tcPr/>
+                </a:tc>
+                <a:tc>
+                  <a:txBody>
+                    <a:bodyPr/>
+                    <a:lstStyle/>
+                    <a:p>
+                      <a:r>
+                        <a:rPr sz="1800">
+                          <a:latin typeface="Arial"/>
+                        </a:rPr>
+                        <a:t>Word's, PowerPoint's and Acrobat's checkers, Accessibility Insights, axe</a:t>
+                      </a:r>
+                    </a:p>
+                  </a:txBody>
+                  <a:tcPr/>
+                </a:tc>
+              </a:tr>
+              <a:tr h="466344">
+                <a:tc>
+                  <a:txBody>
+                    <a:bodyPr/>
+                    <a:lstStyle/>
+                    <a:p>
+                      <a:r>
+                        <a:rPr sz="1800">
+                          <a:latin typeface="Arial"/>
+                        </a:rPr>
+                        <a:t>Human review, in writing</a:t>
+                      </a:r>
+                    </a:p>
+                  </a:txBody>
+                  <a:tcPr/>
+                </a:tc>
+                <a:tc>
+                  <a:txBody>
+                    <a:bodyPr/>
+                    <a:lstStyle/>
+                    <a:p>
+                      <a:r>
+                        <a:rPr sz="1800">
+                          <a:latin typeface="Arial"/>
+                        </a:rPr>
+                        <a:t>Your own office's process</a:t>
+                      </a:r>
+                    </a:p>
+                  </a:txBody>
+                  <a:tcPr/>
+                </a:tc>
+              </a:tr>
+              <a:tr h="466344">
+                <a:tc>
+                  <a:txBody>
+                    <a:bodyPr/>
+                    <a:lstStyle/>
+                    <a:p>
+                      <a:r>
+                        <a:rPr sz="1800">
+                          <a:latin typeface="Arial"/>
+                        </a:rPr>
+                        <a:t>Agent teams</a:t>
+                      </a:r>
+                    </a:p>
+                  </a:txBody>
+                  <a:tcPr/>
+                </a:tc>
+                <a:tc>
+                  <a:txBody>
+                    <a:bodyPr/>
+                    <a:lstStyle/>
+                    <a:p>
+                      <a:r>
+                        <a:rPr sz="1800">
+                          <a:latin typeface="Arial"/>
+                        </a:rPr>
+                        <a:t>One specialist at a time, or the Accessibility Agents project</a:t>
+                      </a:r>
+                    </a:p>
+                  </a:txBody>
+                  <a:tcPr/>
+                </a:tc>
+              </a:tr>
+            </a:tbl>
+          </a:graphicData>
+        </a:graphic>
+      </p:graphicFrame>
     </p:spTree>
   </p:cSld>
   <p:clrMapOvr>
@@ -8008,7 +8184,7 @@
               <a:rPr sz="3600" b="1">
                 <a:latin typeface="Arial"/>
               </a:rPr>
-              <a:t>Say it in four sentences</a:t>
+              <a:t>The commitment wall</a:t>
             </a:r>
           </a:p>
         </p:txBody>
@@ -8040,7 +8216,7 @@
               <a:rPr sz="1800" b="0">
                 <a:latin typeface="Arial"/>
               </a:rPr>
-              <a:t>Capstone - 15 minutes - /w/ahg-2026/10</a:t>
+              <a:t>4:15</a:t>
             </a:r>
           </a:p>
           <a:p>
@@ -8051,18 +8227,7 @@
               <a:rPr sz="2000" b="0">
                 <a:latin typeface="Arial"/>
               </a:rPr>
-              <a:t>What is your workflow? Who does it help? What do they learn?</a:t>
-            </a:r>
-          </a:p>
-          <a:p>
-            <a:pPr marL="0" indent="0">
-              <a:buNone/>
-            </a:pPr>
-            <a:r>
-              <a:rPr sz="2000" b="0">
-                <a:latin typeface="Arial"/>
-              </a:rPr>
-              <a:t>And how does it keep going after today?</a:t>
+              <a:t>Every commitment in this room, on one screen, with no names on it.</a:t>
             </a:r>
           </a:p>
         </p:txBody>
@@ -8109,7 +8274,7 @@
               <a:rPr sz="3600" b="1">
                 <a:latin typeface="Arial"/>
               </a:rPr>
-              <a:t>My take-home artifact</a:t>
+              <a:t>Go make one more champion</a:t>
             </a:r>
           </a:p>
         </p:txBody>
@@ -8141,7 +8306,7 @@
               <a:rPr sz="1800" b="0">
                 <a:latin typeface="Arial"/>
               </a:rPr>
-              <a:t>Take it with you</a:t>
+              <a:t>4:25 - Thank you</a:t>
             </a:r>
           </a:p>
           <a:p>
@@ -8149,399 +8314,43 @@
               <a:buNone/>
             </a:pPr>
             <a:r>
+              <a:rPr sz="2400" b="0">
+                <a:latin typeface="Arial"/>
+              </a:rPr>
+              <a:t>You came in with a problem. You are leaving with an agent, a team and a plan.</a:t>
+            </a:r>
+          </a:p>
+          <a:p>
+            <a:pPr marL="0" indent="0">
+              <a:buNone/>
+            </a:pPr>
+            <a:r>
               <a:rPr sz="2000" b="0">
                 <a:latin typeface="Arial"/>
               </a:rPr>
-              <a:t>One page, assembled from what you wrote today: your workflow, who it helps, the human-review gate in your own words, and your 30-day commitment.</a:t>
-            </a:r>
-          </a:p>
-          <a:p>
-            <a:pPr lvl="1"/>
+              <a:t>Before you go: the session evaluation. It shapes next year's conference.</a:t>
+            </a:r>
+          </a:p>
+          <a:p>
+            <a:pPr marL="0" indent="0">
+              <a:buNone/>
+            </a:pPr>
             <a:r>
               <a:rPr sz="2000" b="0">
                 <a:latin typeface="Arial"/>
               </a:rPr>
-              <a:t>Print it, or download it as a single file that still opens years from now.</a:t>
-            </a:r>
-          </a:p>
-          <a:p>
-            <a:pPr lvl="1"/>
+              <a:t>Help any time, before or after today: support@community-access.org.</a:t>
+            </a:r>
+          </a:p>
+          <a:p>
+            <a:pPr marL="0" indent="0">
+              <a:buNone/>
+            </a:pPr>
             <a:r>
               <a:rPr sz="2000" b="0">
                 <a:latin typeface="Arial"/>
               </a:rPr>
-              <a:t>Email it to yourself with your agent package and a link back to everything else.</a:t>
-            </a:r>
-          </a:p>
-          <a:p>
-            <a:pPr marL="0" indent="0">
-              <a:buNone/>
-            </a:pPr>
-            <a:r>
-              <a:rPr sz="2800" b="1">
-                <a:latin typeface="Arial"/>
-              </a:rPr>
-              <a:t>This is the thing you forward to a director on Monday.</a:t>
-            </a:r>
-          </a:p>
-        </p:txBody>
-      </p:sp>
-    </p:spTree>
-  </p:cSld>
-  <p:clrMapOvr>
-    <a:masterClrMapping/>
-  </p:clrMapOvr>
-</p:sld>
-</file>
-
-<file path=ppt/slides/slide27.xml><?xml version="1.0" encoding="utf-8"?>
-<p:sld xmlns:a="http://schemas.openxmlformats.org/drawingml/2006/main" xmlns:p="http://schemas.openxmlformats.org/presentationml/2006/main" xmlns:r="http://schemas.openxmlformats.org/officeDocument/2006/relationships">
-  <p:cSld>
-    <p:spTree>
-      <p:nvGrpSpPr>
-        <p:cNvPr id="1" name=""/>
-        <p:cNvGrpSpPr/>
-        <p:nvPr/>
-      </p:nvGrpSpPr>
-      <p:grpSpPr/>
-      <p:sp>
-        <p:nvSpPr>
-          <p:cNvPr id="2" name="Title 1"/>
-          <p:cNvSpPr>
-            <a:spLocks noGrp="1"/>
-          </p:cNvSpPr>
-          <p:nvPr>
-            <p:ph type="title"/>
-          </p:nvPr>
-        </p:nvSpPr>
-        <p:spPr>
-          <a:xfrm>
-            <a:off x="548640" y="365760"/>
-            <a:ext cx="11064240" cy="1097280"/>
-          </a:xfrm>
-        </p:spPr>
-        <p:txBody>
-          <a:bodyPr/>
-          <a:lstStyle/>
-          <a:p>
-            <a:r>
-              <a:rPr sz="3600" b="1">
-                <a:latin typeface="Arial"/>
-              </a:rPr>
-              <a:t>How this gets used where you work</a:t>
-            </a:r>
-          </a:p>
-        </p:txBody>
-      </p:sp>
-      <p:sp>
-        <p:nvSpPr>
-          <p:cNvPr id="3" name="Content Placeholder 2"/>
-          <p:cNvSpPr>
-            <a:spLocks noGrp="1"/>
-          </p:cNvSpPr>
-          <p:nvPr>
-            <p:ph idx="1"/>
-          </p:nvPr>
-        </p:nvSpPr>
-        <p:spPr>
-          <a:xfrm>
-            <a:off x="548640" y="1554480"/>
-            <a:ext cx="11064240" cy="4937760"/>
-          </a:xfrm>
-        </p:spPr>
-        <p:txBody>
-          <a:bodyPr wrap="square"/>
-          <a:lstStyle/>
-          <a:p>
-            <a:pPr marL="0" indent="0">
-              <a:buNone/>
-            </a:pPr>
-            <a:r>
-              <a:rPr sz="1800" b="0">
-                <a:latin typeface="Arial"/>
-              </a:rPr>
-              <a:t>Activity 11 - 10 minutes - /w/ahg-2026/11</a:t>
-            </a:r>
-          </a:p>
-          <a:p>
-            <a:pPr lvl="1"/>
-            <a:r>
-              <a:rPr sz="2000" b="0">
-                <a:latin typeface="Arial"/>
-              </a:rPr>
-              <a:t>One workflow: that you will actually try.</a:t>
-            </a:r>
-          </a:p>
-          <a:p>
-            <a:pPr lvl="1"/>
-            <a:r>
-              <a:rPr sz="2000" b="0">
-                <a:latin typeface="Arial"/>
-              </a:rPr>
-              <a:t>One partner: or team you will try it with.</a:t>
-            </a:r>
-          </a:p>
-          <a:p>
-            <a:pPr lvl="1"/>
-            <a:r>
-              <a:rPr sz="2000" b="0">
-                <a:latin typeface="Arial"/>
-              </a:rPr>
-              <a:t>One safeguard: you will use every single time.</a:t>
-            </a:r>
-          </a:p>
-          <a:p>
-            <a:pPr lvl="1"/>
-            <a:r>
-              <a:rPr sz="2000" b="0">
-                <a:latin typeface="Arial"/>
-              </a:rPr>
-              <a:t>One first step: small enough to do this week.</a:t>
-            </a:r>
-          </a:p>
-          <a:p>
-            <a:pPr lvl="1"/>
-            <a:r>
-              <a:rPr sz="2000" b="0">
-                <a:latin typeface="Arial"/>
-              </a:rPr>
-              <a:t>Who needs to know: or approve it - a manager, a comms lead, an IT policy.</a:t>
-            </a:r>
-          </a:p>
-          <a:p>
-            <a:pPr lvl="1"/>
-            <a:r>
-              <a:rPr sz="2000" b="0">
-                <a:latin typeface="Arial"/>
-              </a:rPr>
-              <a:t>What it looks like if it worked: in one sentence you could say to them.</a:t>
-            </a:r>
-          </a:p>
-        </p:txBody>
-      </p:sp>
-    </p:spTree>
-  </p:cSld>
-  <p:clrMapOvr>
-    <a:masterClrMapping/>
-  </p:clrMapOvr>
-</p:sld>
-</file>
-
-<file path=ppt/slides/slide28.xml><?xml version="1.0" encoding="utf-8"?>
-<p:sld xmlns:a="http://schemas.openxmlformats.org/drawingml/2006/main" xmlns:p="http://schemas.openxmlformats.org/presentationml/2006/main" xmlns:r="http://schemas.openxmlformats.org/officeDocument/2006/relationships">
-  <p:cSld>
-    <p:spTree>
-      <p:nvGrpSpPr>
-        <p:cNvPr id="1" name=""/>
-        <p:cNvGrpSpPr/>
-        <p:nvPr/>
-      </p:nvGrpSpPr>
-      <p:grpSpPr/>
-      <p:sp>
-        <p:nvSpPr>
-          <p:cNvPr id="2" name="Title 1"/>
-          <p:cNvSpPr>
-            <a:spLocks noGrp="1"/>
-          </p:cNvSpPr>
-          <p:nvPr>
-            <p:ph type="title"/>
-          </p:nvPr>
-        </p:nvSpPr>
-        <p:spPr>
-          <a:xfrm>
-            <a:off x="548640" y="365760"/>
-            <a:ext cx="11064240" cy="1097280"/>
-          </a:xfrm>
-        </p:spPr>
-        <p:txBody>
-          <a:bodyPr/>
-          <a:lstStyle/>
-          <a:p>
-            <a:r>
-              <a:rPr sz="3600" b="1">
-                <a:latin typeface="Arial"/>
-              </a:rPr>
-              <a:t>The commitment wall</a:t>
-            </a:r>
-          </a:p>
-        </p:txBody>
-      </p:sp>
-      <p:sp>
-        <p:nvSpPr>
-          <p:cNvPr id="3" name="Content Placeholder 2"/>
-          <p:cNvSpPr>
-            <a:spLocks noGrp="1"/>
-          </p:cNvSpPr>
-          <p:nvPr>
-            <p:ph idx="1"/>
-          </p:nvPr>
-        </p:nvSpPr>
-        <p:spPr>
-          <a:xfrm>
-            <a:off x="548640" y="1554480"/>
-            <a:ext cx="11064240" cy="4937760"/>
-          </a:xfrm>
-        </p:spPr>
-        <p:txBody>
-          <a:bodyPr wrap="square"/>
-          <a:lstStyle/>
-          <a:p>
-            <a:pPr marL="0" indent="0">
-              <a:buNone/>
-            </a:pPr>
-            <a:r>
-              <a:rPr sz="1800" b="0">
-                <a:latin typeface="Arial"/>
-              </a:rPr>
-              <a:t>4:20</a:t>
-            </a:r>
-          </a:p>
-          <a:p>
-            <a:pPr marL="0" indent="0">
-              <a:buNone/>
-            </a:pPr>
-            <a:r>
-              <a:rPr sz="2000" b="0">
-                <a:latin typeface="Arial"/>
-              </a:rPr>
-              <a:t>Every commitment in this room, on one screen, with no names on it.</a:t>
-            </a:r>
-          </a:p>
-          <a:p>
-            <a:pPr marL="0" indent="0">
-              <a:buNone/>
-            </a:pPr>
-            <a:r>
-              <a:rPr sz="2000" b="0">
-                <a:latin typeface="Arial"/>
-              </a:rPr>
-              <a:t>A promise made in front of strangers should not carry a name unless the person who made it decides to say it out loud.</a:t>
-            </a:r>
-          </a:p>
-        </p:txBody>
-      </p:sp>
-    </p:spTree>
-  </p:cSld>
-  <p:clrMapOvr>
-    <a:masterClrMapping/>
-  </p:clrMapOvr>
-</p:sld>
-</file>
-
-<file path=ppt/slides/slide29.xml><?xml version="1.0" encoding="utf-8"?>
-<p:sld xmlns:a="http://schemas.openxmlformats.org/drawingml/2006/main" xmlns:p="http://schemas.openxmlformats.org/presentationml/2006/main" xmlns:r="http://schemas.openxmlformats.org/officeDocument/2006/relationships">
-  <p:cSld>
-    <p:spTree>
-      <p:nvGrpSpPr>
-        <p:cNvPr id="1" name=""/>
-        <p:cNvGrpSpPr/>
-        <p:nvPr/>
-      </p:nvGrpSpPr>
-      <p:grpSpPr/>
-      <p:sp>
-        <p:nvSpPr>
-          <p:cNvPr id="2" name="Title 1"/>
-          <p:cNvSpPr>
-            <a:spLocks noGrp="1"/>
-          </p:cNvSpPr>
-          <p:nvPr>
-            <p:ph type="title"/>
-          </p:nvPr>
-        </p:nvSpPr>
-        <p:spPr>
-          <a:xfrm>
-            <a:off x="548640" y="365760"/>
-            <a:ext cx="11064240" cy="1097280"/>
-          </a:xfrm>
-        </p:spPr>
-        <p:txBody>
-          <a:bodyPr/>
-          <a:lstStyle/>
-          <a:p>
-            <a:r>
-              <a:rPr sz="3600" b="1">
-                <a:latin typeface="Arial"/>
-              </a:rPr>
-              <a:t>What happens next</a:t>
-            </a:r>
-          </a:p>
-        </p:txBody>
-      </p:sp>
-      <p:sp>
-        <p:nvSpPr>
-          <p:cNvPr id="3" name="Content Placeholder 2"/>
-          <p:cNvSpPr>
-            <a:spLocks noGrp="1"/>
-          </p:cNvSpPr>
-          <p:nvPr>
-            <p:ph idx="1"/>
-          </p:nvPr>
-        </p:nvSpPr>
-        <p:spPr>
-          <a:xfrm>
-            <a:off x="548640" y="1554480"/>
-            <a:ext cx="11064240" cy="4937760"/>
-          </a:xfrm>
-        </p:spPr>
-        <p:txBody>
-          <a:bodyPr wrap="square"/>
-          <a:lstStyle/>
-          <a:p>
-            <a:pPr marL="0" indent="0">
-              <a:buNone/>
-            </a:pPr>
-            <a:r>
-              <a:rPr sz="1800" b="0">
-                <a:latin typeface="Arial"/>
-              </a:rPr>
-              <a:t>After today</a:t>
-            </a:r>
-          </a:p>
-          <a:p>
-            <a:pPr lvl="1"/>
-            <a:r>
-              <a:rPr sz="2000" b="0">
-                <a:latin typeface="Arial"/>
-              </a:rPr>
-              <a:t>Within 48 hours: a resource packet, and your exports in Markdown, JSON, HTML and Word.</a:t>
-            </a:r>
-          </a:p>
-          <a:p>
-            <a:pPr lvl="1"/>
-            <a:r>
-              <a:rPr sz="2000" b="0">
-                <a:latin typeface="Arial"/>
-              </a:rPr>
-              <a:t>In 30 days: one message quoting your own commitment back to you, with a link to your follow-through log.</a:t>
-            </a:r>
-          </a:p>
-          <a:p>
-            <a:pPr lvl="1"/>
-            <a:r>
-              <a:rPr sz="2000" b="0">
-                <a:latin typeface="Arial"/>
-              </a:rPr>
-              <a:t>Whenever you need it: support@community-access.org. Nobody will chase you, and anybody who writes gets help.</a:t>
-            </a:r>
-          </a:p>
-          <a:p>
-            <a:pPr lvl="1"/>
-            <a:r>
-              <a:rPr sz="2000" b="0">
-                <a:latin typeface="Arial"/>
-              </a:rPr>
-              <a:t>Always: GLOW is free, open source, and built by the community it serves.</a:t>
-            </a:r>
-          </a:p>
-          <a:p>
-            <a:pPr marL="0" indent="0">
-              <a:buNone/>
-            </a:pPr>
-            <a:r>
-              <a:rPr sz="3200" b="1">
-                <a:latin typeface="Arial"/>
-              </a:rPr>
-              <a:t>letitglow.app</a:t>
+              <a:t>GLOW is a community project of BITS, an affiliate of the American Council of the Blind.</a:t>
             </a:r>
           </a:p>
         </p:txBody>
@@ -8588,211 +8397,284 @@
               <a:rPr sz="3600" b="1">
                 <a:latin typeface="Arial"/>
               </a:rPr>
-              <a:t>How today runs</a:t>
-            </a:r>
-          </a:p>
-        </p:txBody>
-      </p:sp>
-      <p:sp>
-        <p:nvSpPr>
-          <p:cNvPr id="3" name="Content Placeholder 2"/>
-          <p:cNvSpPr>
-            <a:spLocks noGrp="1"/>
-          </p:cNvSpPr>
-          <p:nvPr>
-            <p:ph idx="1"/>
-          </p:nvPr>
+              <a:t>The finished result, first</a:t>
+            </a:r>
+          </a:p>
+        </p:txBody>
+      </p:sp>
+      <p:sp>
+        <p:nvSpPr>
+          <p:cNvPr id="3" name="TextBox 2"/>
+          <p:cNvSpPr txBox="1"/>
+          <p:nvPr/>
         </p:nvSpPr>
         <p:spPr>
           <a:xfrm>
-            <a:off x="548640" y="1554480"/>
-            <a:ext cx="11064240" cy="4937760"/>
+            <a:off x="548640" y="1463040"/>
+            <a:ext cx="11064240" cy="1645920"/>
           </a:xfrm>
+          <a:prstGeom prst="rect">
+            <a:avLst/>
+          </a:prstGeom>
+          <a:noFill/>
         </p:spPr>
         <p:txBody>
-          <a:bodyPr wrap="square"/>
-          <a:lstStyle/>
-          <a:p>
-            <a:pPr marL="0" indent="0">
-              <a:buNone/>
-            </a:pPr>
-            <a:r>
-              <a:rPr sz="1800" b="0">
-                <a:latin typeface="Arial"/>
-              </a:rPr>
-              <a:t>Housekeeping</a:t>
-            </a:r>
-          </a:p>
-          <a:p>
-            <a:pPr lvl="1"/>
-            <a:r>
-              <a:rPr sz="2000" b="0">
-                <a:latin typeface="Arial"/>
-              </a:rPr>
-              <a:t>8:30 to 4:30. Lunch at 12:15. Breaks at 10:10 and 2:55.</a:t>
-            </a:r>
-          </a:p>
-          <a:p>
-            <a:pPr lvl="1"/>
-            <a:r>
-              <a:rPr sz="2000" b="0">
-                <a:latin typeface="Arial"/>
-              </a:rPr>
-              <a:t>Eleven activities. Nothing is graded, and nothing is collected without you choosing to share it.</a:t>
-            </a:r>
-          </a:p>
-          <a:p>
-            <a:pPr lvl="1"/>
-            <a:r>
-              <a:rPr sz="2000" b="0">
-                <a:latin typeface="Arial"/>
-              </a:rPr>
-              <a:t>Any device, a phone included. Nothing to install, so a locked-down work laptop is fine.</a:t>
-            </a:r>
-          </a:p>
-          <a:p>
-            <a:pPr lvl="1"/>
-            <a:r>
-              <a:rPr sz="2000" b="0">
-                <a:latin typeface="Arial"/>
-              </a:rPr>
-              <a:t>Everything you write is yours, and you leave with all of it.</a:t>
-            </a:r>
-          </a:p>
-          <a:p>
-            <a:pPr lvl="1"/>
-            <a:r>
-              <a:rPr sz="2000" b="0">
-                <a:latin typeface="Arial"/>
-              </a:rPr>
-              <a:t>Ask for anything, any time - large print, a seat, a pause, a repeat.</a:t>
-            </a:r>
-          </a:p>
-        </p:txBody>
-      </p:sp>
-    </p:spTree>
-  </p:cSld>
-  <p:clrMapOvr>
-    <a:masterClrMapping/>
-  </p:clrMapOvr>
-</p:sld>
-</file>
-
-<file path=ppt/slides/slide30.xml><?xml version="1.0" encoding="utf-8"?>
-<p:sld xmlns:a="http://schemas.openxmlformats.org/drawingml/2006/main" xmlns:p="http://schemas.openxmlformats.org/presentationml/2006/main" xmlns:r="http://schemas.openxmlformats.org/officeDocument/2006/relationships">
-  <p:cSld>
-    <p:spTree>
-      <p:nvGrpSpPr>
-        <p:cNvPr id="1" name=""/>
-        <p:cNvGrpSpPr/>
-        <p:nvPr/>
-      </p:nvGrpSpPr>
-      <p:grpSpPr/>
-      <p:sp>
-        <p:nvSpPr>
-          <p:cNvPr id="2" name="Title 1"/>
-          <p:cNvSpPr>
-            <a:spLocks noGrp="1"/>
-          </p:cNvSpPr>
-          <p:nvPr>
-            <p:ph type="title"/>
-          </p:nvPr>
-        </p:nvSpPr>
-        <p:spPr>
-          <a:xfrm>
-            <a:off x="548640" y="365760"/>
-            <a:ext cx="11064240" cy="1097280"/>
-          </a:xfrm>
-        </p:spPr>
-        <p:txBody>
-          <a:bodyPr/>
-          <a:lstStyle/>
-          <a:p>
-            <a:r>
-              <a:rPr sz="3600" b="1">
-                <a:latin typeface="Arial"/>
-              </a:rPr>
-              <a:t>Go make one more champion</a:t>
-            </a:r>
-          </a:p>
-        </p:txBody>
-      </p:sp>
-      <p:sp>
-        <p:nvSpPr>
-          <p:cNvPr id="3" name="Content Placeholder 2"/>
-          <p:cNvSpPr>
-            <a:spLocks noGrp="1"/>
-          </p:cNvSpPr>
-          <p:nvPr>
-            <p:ph idx="1"/>
-          </p:nvPr>
-        </p:nvSpPr>
-        <p:spPr>
-          <a:xfrm>
-            <a:off x="548640" y="1554480"/>
-            <a:ext cx="11064240" cy="4937760"/>
-          </a:xfrm>
-        </p:spPr>
-        <p:txBody>
-          <a:bodyPr wrap="square"/>
-          <a:lstStyle/>
-          <a:p>
-            <a:pPr marL="0" indent="0">
-              <a:buNone/>
-            </a:pPr>
-            <a:r>
-              <a:rPr sz="1800" b="0">
-                <a:latin typeface="Arial"/>
-              </a:rPr>
-              <a:t>Thank you</a:t>
-            </a:r>
-          </a:p>
-          <a:p>
-            <a:pPr marL="0" indent="0">
-              <a:buNone/>
-            </a:pPr>
-            <a:r>
-              <a:rPr sz="2400" b="0">
-                <a:latin typeface="Arial"/>
-              </a:rPr>
-              <a:t>You came in as the person who fixes things.</a:t>
-            </a:r>
-          </a:p>
-          <a:p>
-            <a:pPr marL="0" indent="0">
-              <a:buNone/>
-            </a:pPr>
-            <a:r>
-              <a:rPr sz="2800" b="1">
-                <a:latin typeface="Arial"/>
-              </a:rPr>
-              <a:t>You are leaving as the person who makes more people who can.</a:t>
-            </a:r>
-          </a:p>
-          <a:p>
-            <a:pPr marL="0" indent="0">
-              <a:buNone/>
-            </a:pPr>
-            <a:r>
-              <a:rPr sz="2000" b="0">
-                <a:latin typeface="Arial"/>
-              </a:rPr>
-              <a:t>Before you go: the session evaluation. It shapes next year's conference.</a:t>
-            </a:r>
-          </a:p>
-          <a:p>
-            <a:pPr marL="0" indent="0">
-              <a:buNone/>
-            </a:pPr>
-            <a:r>
-              <a:rPr sz="2000" b="0">
-                <a:latin typeface="Arial"/>
-              </a:rPr>
-              <a:t>GLOW is a community project of BITS, an affiliate of the American Council of the Blind.</a:t>
-            </a:r>
-          </a:p>
-        </p:txBody>
-      </p:sp>
+          <a:bodyPr wrap="square">
+            <a:spAutoFit/>
+          </a:bodyPr>
+          <a:lstStyle/>
+          <a:p>
+            <a:r>
+              <a:rPr sz="1800">
+                <a:latin typeface="Arial"/>
+              </a:rPr>
+              <a:t>Where we will be at 4:00</a:t>
+            </a:r>
+          </a:p>
+          <a:p>
+            <a:r>
+              <a:rPr sz="1800">
+                <a:latin typeface="Arial"/>
+              </a:rPr>
+              <a:t>This afternoon a team of agents works through a whole course and writes one report. Every finding has its evidence, its WCAG criterion, and a named person who checks it.</a:t>
+            </a:r>
+          </a:p>
+          <a:p>
+            <a:r>
+              <a:rPr sz="1800">
+                <a:latin typeface="Arial"/>
+              </a:rPr>
+              <a:t>You will build one of the agents that writes a section like this.</a:t>
+            </a:r>
+          </a:p>
+          <a:p>
+            <a:r>
+              <a:rPr sz="1800">
+                <a:latin typeface="Arial"/>
+              </a:rPr>
+              <a:t>One section of that report, from Maria's agent:</a:t>
+            </a:r>
+          </a:p>
+        </p:txBody>
+      </p:sp>
+      <p:graphicFrame>
+        <p:nvGraphicFramePr>
+          <p:cNvPr id="4" name="Table 3" descr="One section of that report, from Maria's agent:"/>
+          <p:cNvGraphicFramePr>
+            <a:graphicFrameLocks noGrp="1"/>
+          </p:cNvGraphicFramePr>
+          <p:nvPr/>
+        </p:nvGraphicFramePr>
+        <p:xfrm>
+          <a:off x="548640" y="3383280"/>
+          <a:ext cx="11064240" cy="2743200"/>
+        </p:xfrm>
+        <a:graphic>
+          <a:graphicData uri="http://schemas.openxmlformats.org/drawingml/2006/table">
+            <a:tbl>
+              <a:tblPr firstRow="1" bandRow="1">
+                <a:tableStyleId>{5C22544A-7EE6-4342-B048-85BDC9FD1C3A}</a:tableStyleId>
+              </a:tblPr>
+              <a:tblGrid>
+                <a:gridCol w="5532120"/>
+                <a:gridCol w="5532120"/>
+              </a:tblGrid>
+              <a:tr h="457200">
+                <a:tc>
+                  <a:txBody>
+                    <a:bodyPr/>
+                    <a:lstStyle/>
+                    <a:p>
+                      <a:r>
+                        <a:rPr sz="1800" b="1">
+                          <a:latin typeface="Arial"/>
+                        </a:rPr>
+                        <a:t>Part</a:t>
+                      </a:r>
+                    </a:p>
+                  </a:txBody>
+                  <a:tcPr/>
+                </a:tc>
+                <a:tc>
+                  <a:txBody>
+                    <a:bodyPr/>
+                    <a:lstStyle/>
+                    <a:p>
+                      <a:r>
+                        <a:rPr sz="1800" b="1">
+                          <a:latin typeface="Arial"/>
+                        </a:rPr>
+                        <a:t>What it says</a:t>
+                      </a:r>
+                    </a:p>
+                  </a:txBody>
+                  <a:tcPr/>
+                </a:tc>
+              </a:tr>
+              <a:tr h="457200">
+                <a:tc>
+                  <a:txBody>
+                    <a:bodyPr/>
+                    <a:lstStyle/>
+                    <a:p>
+                      <a:r>
+                        <a:rPr sz="1800">
+                          <a:latin typeface="Arial"/>
+                        </a:rPr>
+                        <a:t>File</a:t>
+                      </a:r>
+                    </a:p>
+                  </a:txBody>
+                  <a:tcPr/>
+                </a:tc>
+                <a:tc>
+                  <a:txBody>
+                    <a:bodyPr/>
+                    <a:lstStyle/>
+                    <a:p>
+                      <a:r>
+                        <a:rPr sz="1800">
+                          <a:latin typeface="Arial"/>
+                        </a:rPr>
+                        <a:t>The scanned required reading</a:t>
+                      </a:r>
+                    </a:p>
+                  </a:txBody>
+                  <a:tcPr/>
+                </a:tc>
+              </a:tr>
+              <a:tr h="457200">
+                <a:tc>
+                  <a:txBody>
+                    <a:bodyPr/>
+                    <a:lstStyle/>
+                    <a:p>
+                      <a:r>
+                        <a:rPr sz="1800">
+                          <a:latin typeface="Arial"/>
+                        </a:rPr>
+                        <a:t>Routed to</a:t>
+                      </a:r>
+                    </a:p>
+                  </a:txBody>
+                  <a:tcPr/>
+                </a:tc>
+                <a:tc>
+                  <a:txBody>
+                    <a:bodyPr/>
+                    <a:lstStyle/>
+                    <a:p>
+                      <a:r>
+                        <a:rPr sz="1800">
+                          <a:latin typeface="Arial"/>
+                        </a:rPr>
+                        <a:t>Alternate format planner, by Maria Alvarez</a:t>
+                      </a:r>
+                    </a:p>
+                  </a:txBody>
+                  <a:tcPr/>
+                </a:tc>
+              </a:tr>
+              <a:tr h="457200">
+                <a:tc>
+                  <a:txBody>
+                    <a:bodyPr/>
+                    <a:lstStyle/>
+                    <a:p>
+                      <a:r>
+                        <a:rPr sz="1800">
+                          <a:latin typeface="Arial"/>
+                        </a:rPr>
+                        <a:t>Evidence</a:t>
+                      </a:r>
+                    </a:p>
+                  </a:txBody>
+                  <a:tcPr/>
+                </a:tc>
+                <a:tc>
+                  <a:txBody>
+                    <a:bodyPr/>
+                    <a:lstStyle/>
+                    <a:p>
+                      <a:r>
+                        <a:rPr sz="1800">
+                          <a:latin typeface="Arial"/>
+                        </a:rPr>
+                        <a:t>GLOW audit: pictures of text, no text layer, untagged</a:t>
+                      </a:r>
+                    </a:p>
+                  </a:txBody>
+                  <a:tcPr/>
+                </a:tc>
+              </a:tr>
+              <a:tr h="457200">
+                <a:tc>
+                  <a:txBody>
+                    <a:bodyPr/>
+                    <a:lstStyle/>
+                    <a:p>
+                      <a:r>
+                        <a:rPr sz="1800">
+                          <a:latin typeface="Arial"/>
+                        </a:rPr>
+                        <a:t>Plan</a:t>
+                      </a:r>
+                    </a:p>
+                  </a:txBody>
+                  <a:tcPr/>
+                </a:tc>
+                <a:tc>
+                  <a:txBody>
+                    <a:bodyPr/>
+                    <a:lstStyle/>
+                    <a:p>
+                      <a:r>
+                        <a:rPr sz="1800">
+                          <a:latin typeface="Arial"/>
+                        </a:rPr>
+                        <a:t>Get a clean source, then large print and audio, and post it for every student</a:t>
+                      </a:r>
+                    </a:p>
+                  </a:txBody>
+                  <a:tcPr/>
+                </a:tc>
+              </a:tr>
+              <a:tr h="457200">
+                <a:tc>
+                  <a:txBody>
+                    <a:bodyPr/>
+                    <a:lstStyle/>
+                    <a:p>
+                      <a:r>
+                        <a:rPr sz="1800">
+                          <a:latin typeface="Arial"/>
+                        </a:rPr>
+                        <a:t>Reviewer</a:t>
+                      </a:r>
+                    </a:p>
+                  </a:txBody>
+                  <a:tcPr/>
+                </a:tc>
+                <a:tc>
+                  <a:txBody>
+                    <a:bodyPr/>
+                    <a:lstStyle/>
+                    <a:p>
+                      <a:r>
+                        <a:rPr sz="1800">
+                          <a:latin typeface="Arial"/>
+                        </a:rPr>
+                        <a:t>Alternate format specialist. Status: proposed</a:t>
+                      </a:r>
+                    </a:p>
+                  </a:txBody>
+                  <a:tcPr/>
+                </a:tc>
+              </a:tr>
+            </a:tbl>
+          </a:graphicData>
+        </a:graphic>
+      </p:graphicFrame>
     </p:spTree>
   </p:cSld>
   <p:clrMapOvr>
@@ -8835,7 +8717,7 @@
               <a:rPr sz="3600" b="1">
                 <a:latin typeface="Arial"/>
               </a:rPr>
-              <a:t>One address, all day</a:t>
+              <a:t>The journey</a:t>
             </a:r>
           </a:p>
         </p:txBody>
@@ -8867,40 +8749,84 @@
               <a:rPr sz="1800" b="0">
                 <a:latin typeface="Arial"/>
               </a:rPr>
-              <a:t>Join the room</a:t>
-            </a:r>
-          </a:p>
-          <a:p>
-            <a:pPr marL="0" indent="0">
+              <a:t>The map for today</a:t>
+            </a:r>
+          </a:p>
+          <a:p>
+            <a:pPr lvl="1">
               <a:buNone/>
             </a:pPr>
             <a:r>
-              <a:rPr sz="3200" b="1">
-                <a:latin typeface="Arial"/>
-              </a:rPr>
-              <a:t>letitglow.app/w/ahg-2026</a:t>
-            </a:r>
-          </a:p>
-          <a:p>
-            <a:pPr marL="0" indent="0">
+              <a:rPr sz="2000" b="0">
+                <a:latin typeface="Arial"/>
+              </a:rPr>
+              <a:t>1. The problem: a course full of barriers, and a team too small.</a:t>
+            </a:r>
+          </a:p>
+          <a:p>
+            <a:pPr lvl="1">
               <a:buNone/>
             </a:pPr>
             <a:r>
               <a:rPr sz="2000" b="0">
                 <a:latin typeface="Arial"/>
               </a:rPr>
-              <a:t>The same address is on the card at every table, in large type, with a QR code beside it.</a:t>
-            </a:r>
-          </a:p>
-          <a:p>
-            <a:pPr marL="0" indent="0">
+              <a:t>2. Your agent: five plain-English answers.</a:t>
+            </a:r>
+          </a:p>
+          <a:p>
+            <a:pPr lvl="1">
               <a:buNone/>
             </a:pPr>
             <a:r>
               <a:rPr sz="2000" b="0">
                 <a:latin typeface="Arial"/>
               </a:rPr>
-              <a:t>Each activity has its own short address: slash 1, slash 2, and so on, numbered the way I will say them out loud.</a:t>
+              <a:t>3. Your agent at work: Copilot uses it on one course document.</a:t>
+            </a:r>
+          </a:p>
+          <a:p>
+            <a:pPr lvl="1">
+              <a:buNone/>
+            </a:pPr>
+            <a:r>
+              <a:rPr sz="2000" b="0">
+                <a:latin typeface="Arial"/>
+              </a:rPr>
+              <a:t>4. Your agent, grounded: real evidence in, cited answers out.</a:t>
+            </a:r>
+          </a:p>
+          <a:p>
+            <a:pPr lvl="1">
+              <a:buNone/>
+            </a:pPr>
+            <a:r>
+              <a:rPr sz="2000" b="0">
+                <a:latin typeface="Arial"/>
+              </a:rPr>
+              <a:t>5. Your agent, shared: a pull request to an open-source project, with your name on it.</a:t>
+            </a:r>
+          </a:p>
+          <a:p>
+            <a:pPr lvl="1">
+              <a:buNone/>
+            </a:pPr>
+            <a:r>
+              <a:rPr sz="2000" b="0">
+                <a:latin typeface="Arial"/>
+              </a:rPr>
+              <a:t>6. Your agent in the team: the whole course, at once.</a:t>
+            </a:r>
+          </a:p>
+          <a:p>
+            <a:pPr lvl="1">
+              <a:buNone/>
+            </a:pPr>
+            <a:r>
+              <a:rPr sz="2000" b="0">
+                <a:latin typeface="Arial"/>
+              </a:rPr>
+              <a:t>7. Your campus: a 30-day plan.</a:t>
             </a:r>
           </a:p>
         </p:txBody>
@@ -8947,7 +8873,7 @@
               <a:rPr sz="3600" b="1">
                 <a:latin typeface="Arial"/>
               </a:rPr>
-              <a:t>So you never lose your work</a:t>
+              <a:t>How today runs</a:t>
             </a:r>
           </a:p>
         </p:txBody>
@@ -8979,29 +8905,25 @@
               <a:rPr sz="1800" b="0">
                 <a:latin typeface="Arial"/>
               </a:rPr>
-              <a:t>Do this early</a:t>
-            </a:r>
-          </a:p>
-          <a:p>
-            <a:pPr marL="0" indent="0">
-              <a:buNone/>
-            </a:pPr>
+              <a:t>Housekeeping</a:t>
+            </a:r>
+          </a:p>
+          <a:p>
+            <a:pPr lvl="1"/>
             <a:r>
               <a:rPr sz="2000" b="0">
                 <a:latin typeface="Arial"/>
               </a:rPr>
-              <a:t>Your work is held against this browser on this device. Switch to a phone, or clear your cookies, and it is gone.</a:t>
-            </a:r>
-          </a:p>
-          <a:p>
-            <a:pPr marL="0" indent="0">
-              <a:buNone/>
-            </a:pPr>
+              <a:t>10:30 to 4:30 Mountain Time. Lunch at 12:15. A break at 2:10.</a:t>
+            </a:r>
+          </a:p>
+          <a:p>
+            <a:pPr lvl="1"/>
             <a:r>
               <a:rPr sz="2000" b="0">
                 <a:latin typeface="Arial"/>
               </a:rPr>
-              <a:t>On My workshop content, under Work on another device, give an email address and you will be sent a link that restores everything, anywhere.</a:t>
+              <a:t>Your laptop, with VS Code, the AHG 2026 profile and your GitHub account. Not set up yet? A helper is coming to you.</a:t>
             </a:r>
           </a:p>
           <a:p>
@@ -9010,7 +8932,7 @@
               <a:rPr sz="2000" b="0">
                 <a:latin typeface="Arial"/>
               </a:rPr>
-              <a:t>Entirely optional. The day works without it.</a:t>
+              <a:t>Seven blocks. Every one starts by showing you the finished result.</a:t>
             </a:r>
           </a:p>
           <a:p>
@@ -9019,7 +8941,7 @@
               <a:rPr sz="2000" b="0">
                 <a:latin typeface="Arial"/>
               </a:rPr>
-              <a:t>The address is used for that one message and never appears anywhere else.</a:t>
+              <a:t>The last five minutes, at 4:25, are the session evaluation.</a:t>
             </a:r>
           </a:p>
           <a:p>
@@ -9028,7 +8950,7 @@
               <a:rPr sz="2000" b="0">
                 <a:latin typeface="Arial"/>
               </a:rPr>
-              <a:t>The link lasts 45 days, which outlives your 30-day plan.</a:t>
+              <a:t>Ask for anything, any time: large print, a seat, a pause, a repeat.</a:t>
             </a:r>
           </a:p>
         </p:txBody>
@@ -9075,7 +8997,7 @@
               <a:rPr sz="3600" b="1">
                 <a:latin typeface="Arial"/>
               </a:rPr>
-              <a:t>Accessibility does not scale by fixing</a:t>
+              <a:t>Private stays private, and people decide</a:t>
             </a:r>
           </a:p>
         </p:txBody>
@@ -9107,7 +9029,29 @@
               <a:rPr sz="1800" b="0">
                 <a:latin typeface="Arial"/>
               </a:rPr>
-              <a:t>Why we are here</a:t>
+              <a:t>Two rules, all day</a:t>
+            </a:r>
+          </a:p>
+          <a:p>
+            <a:pPr lvl="1">
+              <a:buNone/>
+            </a:pPr>
+            <a:r>
+              <a:rPr sz="2000" b="0">
+                <a:latin typeface="Arial"/>
+              </a:rPr>
+              <a:t>1. Never paste anything private into any AI: student records, health or disability information, anyone's name. We use a sample course all day.</a:t>
+            </a:r>
+          </a:p>
+          <a:p>
+            <a:pPr lvl="1">
+              <a:buNone/>
+            </a:pPr>
+            <a:r>
+              <a:rPr sz="2000" b="0">
+                <a:latin typeface="Arial"/>
+              </a:rPr>
+              <a:t>2. Every agent ends with a person checking its work. Agents draft. People decide.</a:t>
             </a:r>
           </a:p>
           <a:p>
@@ -9115,21 +9059,10 @@
               <a:buNone/>
             </a:pPr>
             <a:r>
-              <a:rPr sz="2000" b="0">
-                <a:latin typeface="Arial"/>
-              </a:rPr>
-              <a:t>If you are the person who fixes everything, then accessibility in your institution is exactly as large as your calendar.</a:t>
-            </a:r>
-          </a:p>
-          <a:p>
-            <a:pPr marL="0" indent="0">
-              <a:buNone/>
-            </a:pPr>
-            <a:r>
               <a:rPr sz="2800" b="1">
                 <a:latin typeface="Arial"/>
               </a:rPr>
-              <a:t>The work is not fixing documents. The work is making more people who can.</a:t>
+              <a:t>If nobody is named, nobody reviewed it.</a:t>
             </a:r>
           </a:p>
         </p:txBody>
@@ -9176,7 +9109,7 @@
               <a:rPr sz="3600" b="1">
                 <a:latin typeface="Arial"/>
               </a:rPr>
-              <a:t>The GLOW framework</a:t>
+              <a:t>What an agent is</a:t>
             </a:r>
           </a:p>
         </p:txBody>
@@ -9208,7 +9141,7 @@
               <a:rPr sz="1800" b="0">
                 <a:latin typeface="Arial"/>
               </a:rPr>
-              <a:t>Four words for the day</a:t>
+              <a:t>No code, really</a:t>
             </a:r>
           </a:p>
           <a:p>
@@ -9217,7 +9150,7 @@
               <a:rPr sz="2000" b="0">
                 <a:latin typeface="Arial"/>
               </a:rPr>
-              <a:t>G - Ground: Ground the work in a real accessibility problem, not a tool.</a:t>
+              <a:t>Role: Who it is, and who it works for.</a:t>
             </a:r>
           </a:p>
           <a:p>
@@ -9226,7 +9159,7 @@
               <a:rPr sz="2000" b="0">
                 <a:latin typeface="Arial"/>
               </a:rPr>
-              <a:t>L - Learn: Learn what the people around you actually need to understand.</a:t>
+              <a:t>Task: The one job it does.</a:t>
             </a:r>
           </a:p>
           <a:p>
@@ -9235,7 +9168,7 @@
               <a:rPr sz="2000" b="0">
                 <a:latin typeface="Arial"/>
               </a:rPr>
-              <a:t>O - Organize: Organize it into a workflow that repeats without you.</a:t>
+              <a:t>Trusted guidance: The standards and policies it must cite: WCAG 2.2, your own procedures.</a:t>
             </a:r>
           </a:p>
           <a:p>
@@ -9244,7 +9177,27 @@
               <a:rPr sz="2000" b="0">
                 <a:latin typeface="Arial"/>
               </a:rPr>
-              <a:t>W - Walk: Walk forward as champions, plural.</a:t>
+              <a:t>Output format: What comes back, in a shape a busy person can use.</a:t>
+            </a:r>
+          </a:p>
+          <a:p>
+            <a:pPr lvl="1"/>
+            <a:r>
+              <a:rPr sz="2000" b="0">
+                <a:latin typeface="Arial"/>
+              </a:rPr>
+              <a:t>Human review: Who checks it before anything goes out.</a:t>
+            </a:r>
+          </a:p>
+          <a:p>
+            <a:pPr marL="0" indent="0">
+              <a:buNone/>
+            </a:pPr>
+            <a:r>
+              <a:rPr sz="2800" b="1">
+                <a:latin typeface="Arial"/>
+              </a:rPr>
+              <a:t>An agent is those five answers, written in plain English. Writing one is writing, not coding.</a:t>
             </a:r>
           </a:p>
         </p:txBody>
@@ -9291,76 +9244,396 @@
               <a:rPr sz="3600" b="1">
                 <a:latin typeface="Arial"/>
               </a:rPr>
-              <a:t>AI drafts. People decide.</a:t>
-            </a:r>
-          </a:p>
-        </p:txBody>
-      </p:sp>
-      <p:sp>
-        <p:nvSpPr>
-          <p:cNvPr id="3" name="Content Placeholder 2"/>
-          <p:cNvSpPr>
-            <a:spLocks noGrp="1"/>
-          </p:cNvSpPr>
-          <p:nvPr>
-            <p:ph idx="1"/>
-          </p:nvPr>
+              <a:t>Your accessibility office</a:t>
+            </a:r>
+          </a:p>
+        </p:txBody>
+      </p:sp>
+      <p:sp>
+        <p:nvSpPr>
+          <p:cNvPr id="3" name="TextBox 2"/>
+          <p:cNvSpPr txBox="1"/>
+          <p:nvPr/>
         </p:nvSpPr>
         <p:spPr>
           <a:xfrm>
-            <a:off x="548640" y="1554480"/>
-            <a:ext cx="11064240" cy="4937760"/>
+            <a:off x="548640" y="1463040"/>
+            <a:ext cx="11064240" cy="822960"/>
           </a:xfrm>
+          <a:prstGeom prst="rect">
+            <a:avLst/>
+          </a:prstGeom>
+          <a:noFill/>
         </p:spPr>
         <p:txBody>
-          <a:bodyPr wrap="square"/>
-          <a:lstStyle/>
-          <a:p>
-            <a:pPr marL="0" indent="0">
-              <a:buNone/>
-            </a:pPr>
-            <a:r>
-              <a:rPr sz="1800" b="0">
-                <a:latin typeface="Arial"/>
-              </a:rPr>
-              <a:t>The boundary</a:t>
-            </a:r>
-          </a:p>
-          <a:p>
-            <a:pPr marL="0" indent="0">
-              <a:buNone/>
-            </a:pPr>
-            <a:r>
-              <a:rPr sz="2000" b="0">
-                <a:latin typeface="Arial"/>
-              </a:rPr>
-              <a:t>Every activity today has a human-review step that you write yourself, in your own words, for your own context.</a:t>
-            </a:r>
-          </a:p>
-          <a:p>
-            <a:pPr marL="0" indent="0">
-              <a:buNone/>
-            </a:pPr>
-            <a:r>
-              <a:rPr sz="2000" b="0">
-                <a:latin typeface="Arial"/>
-              </a:rPr>
-              <a:t>Not because AI is dangerous in the abstract - because purpose, meaning, context and harm are judgments, and judgments have owners.</a:t>
-            </a:r>
-          </a:p>
-          <a:p>
-            <a:pPr marL="0" indent="0">
-              <a:buNone/>
-            </a:pPr>
-            <a:r>
-              <a:rPr sz="2800" b="1">
-                <a:latin typeface="Arial"/>
-              </a:rPr>
-              <a:t>If nobody is named, nobody reviewed it.</a:t>
-            </a:r>
-          </a:p>
-        </p:txBody>
-      </p:sp>
+          <a:bodyPr wrap="square">
+            <a:spAutoFit/>
+          </a:bodyPr>
+          <a:lstStyle/>
+          <a:p>
+            <a:r>
+              <a:rPr sz="1800">
+                <a:latin typeface="Arial"/>
+              </a:rPr>
+              <a:t>Agents in action</a:t>
+            </a:r>
+          </a:p>
+          <a:p>
+            <a:r>
+              <a:rPr sz="1800">
+                <a:latin typeface="Arial"/>
+              </a:rPr>
+              <a:t>The agent team you will join this afternoon. A coordinator routes each file to these specialists.</a:t>
+            </a:r>
+          </a:p>
+        </p:txBody>
+      </p:sp>
+      <p:graphicFrame>
+        <p:nvGraphicFramePr>
+          <p:cNvPr id="4" name="Table 3" descr="The agent team you will join this afternoon. A coordinator routes each file to these specialists."/>
+          <p:cNvGraphicFramePr>
+            <a:graphicFrameLocks noGrp="1"/>
+          </p:cNvGraphicFramePr>
+          <p:nvPr/>
+        </p:nvGraphicFramePr>
+        <p:xfrm>
+          <a:off x="548640" y="2560320"/>
+          <a:ext cx="11064240" cy="4206240"/>
+        </p:xfrm>
+        <a:graphic>
+          <a:graphicData uri="http://schemas.openxmlformats.org/drawingml/2006/table">
+            <a:tbl>
+              <a:tblPr firstRow="1" bandRow="1">
+                <a:tableStyleId>{5C22544A-7EE6-4342-B048-85BDC9FD1C3A}</a:tableStyleId>
+              </a:tblPr>
+              <a:tblGrid>
+                <a:gridCol w="5532120"/>
+                <a:gridCol w="5532120"/>
+              </a:tblGrid>
+              <a:tr h="420624">
+                <a:tc>
+                  <a:txBody>
+                    <a:bodyPr/>
+                    <a:lstStyle/>
+                    <a:p>
+                      <a:r>
+                        <a:rPr sz="1800" b="1">
+                          <a:latin typeface="Arial"/>
+                        </a:rPr>
+                        <a:t>Specialist</a:t>
+                      </a:r>
+                    </a:p>
+                  </a:txBody>
+                  <a:tcPr/>
+                </a:tc>
+                <a:tc>
+                  <a:txBody>
+                    <a:bodyPr/>
+                    <a:lstStyle/>
+                    <a:p>
+                      <a:r>
+                        <a:rPr sz="1800" b="1">
+                          <a:latin typeface="Arial"/>
+                        </a:rPr>
+                        <a:t>Takes</a:t>
+                      </a:r>
+                    </a:p>
+                  </a:txBody>
+                  <a:tcPr/>
+                </a:tc>
+              </a:tr>
+              <a:tr h="420624">
+                <a:tc>
+                  <a:txBody>
+                    <a:bodyPr/>
+                    <a:lstStyle/>
+                    <a:p>
+                      <a:r>
+                        <a:rPr sz="1800">
+                          <a:latin typeface="Arial"/>
+                        </a:rPr>
+                        <a:t>Word documents</a:t>
+                      </a:r>
+                    </a:p>
+                  </a:txBody>
+                  <a:tcPr/>
+                </a:tc>
+                <a:tc>
+                  <a:txBody>
+                    <a:bodyPr/>
+                    <a:lstStyle/>
+                    <a:p>
+                      <a:r>
+                        <a:rPr sz="1800">
+                          <a:latin typeface="Arial"/>
+                        </a:rPr>
+                        <a:t>Syllabi, handouts</a:t>
+                      </a:r>
+                    </a:p>
+                  </a:txBody>
+                  <a:tcPr/>
+                </a:tc>
+              </a:tr>
+              <a:tr h="420624">
+                <a:tc>
+                  <a:txBody>
+                    <a:bodyPr/>
+                    <a:lstStyle/>
+                    <a:p>
+                      <a:r>
+                        <a:rPr sz="1800">
+                          <a:latin typeface="Arial"/>
+                        </a:rPr>
+                        <a:t>PowerPoint slides</a:t>
+                      </a:r>
+                    </a:p>
+                  </a:txBody>
+                  <a:tcPr/>
+                </a:tc>
+                <a:tc>
+                  <a:txBody>
+                    <a:bodyPr/>
+                    <a:lstStyle/>
+                    <a:p>
+                      <a:r>
+                        <a:rPr sz="1800">
+                          <a:latin typeface="Arial"/>
+                        </a:rPr>
+                        <a:t>Lecture decks</a:t>
+                      </a:r>
+                    </a:p>
+                  </a:txBody>
+                  <a:tcPr/>
+                </a:tc>
+              </a:tr>
+              <a:tr h="420624">
+                <a:tc>
+                  <a:txBody>
+                    <a:bodyPr/>
+                    <a:lstStyle/>
+                    <a:p>
+                      <a:r>
+                        <a:rPr sz="1800">
+                          <a:latin typeface="Arial"/>
+                        </a:rPr>
+                        <a:t>Excel workbooks</a:t>
+                      </a:r>
+                    </a:p>
+                  </a:txBody>
+                  <a:tcPr/>
+                </a:tc>
+                <a:tc>
+                  <a:txBody>
+                    <a:bodyPr/>
+                    <a:lstStyle/>
+                    <a:p>
+                      <a:r>
+                        <a:rPr sz="1800">
+                          <a:latin typeface="Arial"/>
+                        </a:rPr>
+                        <a:t>Gradebooks, templates</a:t>
+                      </a:r>
+                    </a:p>
+                  </a:txBody>
+                  <a:tcPr/>
+                </a:tc>
+              </a:tr>
+              <a:tr h="420624">
+                <a:tc>
+                  <a:txBody>
+                    <a:bodyPr/>
+                    <a:lstStyle/>
+                    <a:p>
+                      <a:r>
+                        <a:rPr sz="1800">
+                          <a:latin typeface="Arial"/>
+                        </a:rPr>
+                        <a:t>PDF documents</a:t>
+                      </a:r>
+                    </a:p>
+                  </a:txBody>
+                  <a:tcPr/>
+                </a:tc>
+                <a:tc>
+                  <a:txBody>
+                    <a:bodyPr/>
+                    <a:lstStyle/>
+                    <a:p>
+                      <a:r>
+                        <a:rPr sz="1800">
+                          <a:latin typeface="Arial"/>
+                        </a:rPr>
+                        <a:t>Readings, forms, scans</a:t>
+                      </a:r>
+                    </a:p>
+                  </a:txBody>
+                  <a:tcPr/>
+                </a:tc>
+              </a:tr>
+              <a:tr h="420624">
+                <a:tc>
+                  <a:txBody>
+                    <a:bodyPr/>
+                    <a:lstStyle/>
+                    <a:p>
+                      <a:r>
+                        <a:rPr sz="1800">
+                          <a:latin typeface="Arial"/>
+                        </a:rPr>
+                        <a:t>Web pages</a:t>
+                      </a:r>
+                    </a:p>
+                  </a:txBody>
+                  <a:tcPr/>
+                </a:tc>
+                <a:tc>
+                  <a:txBody>
+                    <a:bodyPr/>
+                    <a:lstStyle/>
+                    <a:p>
+                      <a:r>
+                        <a:rPr sz="1800">
+                          <a:latin typeface="Arial"/>
+                        </a:rPr>
+                        <a:t>Course pages, with axe and Accessibility Insights</a:t>
+                      </a:r>
+                    </a:p>
+                  </a:txBody>
+                  <a:tcPr/>
+                </a:tc>
+              </a:tr>
+              <a:tr h="420624">
+                <a:tc>
+                  <a:txBody>
+                    <a:bodyPr/>
+                    <a:lstStyle/>
+                    <a:p>
+                      <a:r>
+                        <a:rPr sz="1800">
+                          <a:latin typeface="Arial"/>
+                        </a:rPr>
+                        <a:t>Captions and media</a:t>
+                      </a:r>
+                    </a:p>
+                  </a:txBody>
+                  <a:tcPr/>
+                </a:tc>
+                <a:tc>
+                  <a:txBody>
+                    <a:bodyPr/>
+                    <a:lstStyle/>
+                    <a:p>
+                      <a:r>
+                        <a:rPr sz="1800">
+                          <a:latin typeface="Arial"/>
+                        </a:rPr>
+                        <a:t>Lecture captions</a:t>
+                      </a:r>
+                    </a:p>
+                  </a:txBody>
+                  <a:tcPr/>
+                </a:tc>
+              </a:tr>
+              <a:tr h="420624">
+                <a:tc>
+                  <a:txBody>
+                    <a:bodyPr/>
+                    <a:lstStyle/>
+                    <a:p>
+                      <a:r>
+                        <a:rPr sz="1800">
+                          <a:latin typeface="Arial"/>
+                        </a:rPr>
+                        <a:t>Plain language</a:t>
+                      </a:r>
+                    </a:p>
+                  </a:txBody>
+                  <a:tcPr/>
+                </a:tc>
+                <a:tc>
+                  <a:txBody>
+                    <a:bodyPr/>
+                    <a:lstStyle/>
+                    <a:p>
+                      <a:r>
+                        <a:rPr sz="1800">
+                          <a:latin typeface="Arial"/>
+                        </a:rPr>
+                        <a:t>Anything a student must read and act on</a:t>
+                      </a:r>
+                    </a:p>
+                  </a:txBody>
+                  <a:tcPr/>
+                </a:tc>
+              </a:tr>
+              <a:tr h="420624">
+                <a:tc>
+                  <a:txBody>
+                    <a:bodyPr/>
+                    <a:lstStyle/>
+                    <a:p>
+                      <a:r>
+                        <a:rPr sz="1800">
+                          <a:latin typeface="Arial"/>
+                        </a:rPr>
+                        <a:t>Standards reviewer</a:t>
+                      </a:r>
+                    </a:p>
+                  </a:txBody>
+                  <a:tcPr/>
+                </a:tc>
+                <a:tc>
+                  <a:txBody>
+                    <a:bodyPr/>
+                    <a:lstStyle/>
+                    <a:p>
+                      <a:r>
+                        <a:rPr sz="1800">
+                          <a:latin typeface="Arial"/>
+                        </a:rPr>
+                        <a:t>Everyone's findings, last</a:t>
+                      </a:r>
+                    </a:p>
+                  </a:txBody>
+                  <a:tcPr/>
+                </a:tc>
+              </a:tr>
+              <a:tr h="420624">
+                <a:tc>
+                  <a:txBody>
+                    <a:bodyPr/>
+                    <a:lstStyle/>
+                    <a:p>
+                      <a:r>
+                        <a:rPr sz="1800">
+                          <a:latin typeface="Arial"/>
+                        </a:rPr>
+                        <a:t>Your agent</a:t>
+                      </a:r>
+                    </a:p>
+                  </a:txBody>
+                  <a:tcPr/>
+                </a:tc>
+                <a:tc>
+                  <a:txBody>
+                    <a:bodyPr/>
+                    <a:lstStyle/>
+                    <a:p>
+                      <a:r>
+                        <a:rPr sz="1800">
+                          <a:latin typeface="Arial"/>
+                        </a:rPr>
+                        <a:t>Whatever you build it to do</a:t>
+                      </a:r>
+                    </a:p>
+                  </a:txBody>
+                  <a:tcPr/>
+                </a:tc>
+              </a:tr>
+            </a:tbl>
+          </a:graphicData>
+        </a:graphic>
+      </p:graphicFrame>
     </p:spTree>
   </p:cSld>
   <p:clrMapOvr>
@@ -9403,7 +9676,7 @@
               <a:rPr sz="3600" b="1">
                 <a:latin typeface="Arial"/>
               </a:rPr>
-              <a:t>Where we are going</a:t>
+              <a:t>Design your agent</a:t>
             </a:r>
           </a:p>
         </p:txBody>
@@ -9435,7 +9708,18 @@
               <a:rPr sz="1800" b="0">
                 <a:latin typeface="Arial"/>
               </a:rPr>
-              <a:t>The shape of the day</a:t>
+              <a:t>Block 2 of 7 - 10:50-11:50 - 60 minutes</a:t>
+            </a:r>
+          </a:p>
+          <a:p>
+            <a:pPr marL="0" indent="0">
+              <a:buNone/>
+            </a:pPr>
+            <a:r>
+              <a:rPr sz="2000" b="0">
+                <a:latin typeface="Arial"/>
+              </a:rPr>
+              <a:t>By the end of this block: your own agent, in a file, with your name on it.</a:t>
             </a:r>
           </a:p>
           <a:p>
@@ -9444,7 +9728,7 @@
               <a:rPr sz="2000" b="0">
                 <a:latin typeface="Arial"/>
               </a:rPr>
-              <a:t>Morning, 8:30-12:15: Why this work matters, five short activities, and Lab 1. Break at 10:10.</a:t>
+              <a:t>Documents and alternate formats: An alternate format planner, or a document triage agent.</a:t>
             </a:r>
           </a:p>
           <a:p>
@@ -9453,7 +9737,7 @@
               <a:rPr sz="2000" b="0">
                 <a:latin typeface="Arial"/>
               </a:rPr>
-              <a:t>Afternoon, 1:15-3:05: Two labs: alt text, then remediation planning. Break at 2:55.</a:t>
+              <a:t>Course content and faculty coaching: A faculty coach, or a course page coach.</a:t>
             </a:r>
           </a:p>
           <a:p>
@@ -9462,7 +9746,18 @@
               <a:rPr sz="2000" b="0">
                 <a:latin typeface="Arial"/>
               </a:rPr>
-              <a:t>Close, 3:05-4:30: Your workflow, your take-home artifact, your 30-day plan, and the session evaluation.</a:t>
+              <a:t>Compliance and procurement: A remediation log keeper, or a vendor report reader.</a:t>
+            </a:r>
+          </a:p>
+          <a:p>
+            <a:pPr marL="0" indent="0">
+              <a:buNone/>
+            </a:pPr>
+            <a:r>
+              <a:rPr sz="2000" b="0">
+                <a:latin typeface="Arial"/>
+              </a:rPr>
+              <a:t>Pick one card. Bring one real problem from your job, with nothing private in it.</a:t>
             </a:r>
           </a:p>
         </p:txBody>

--- a/docs/ahg-2026/slides.pptx
+++ b/docs/ahg-2026/slides.pptx
@@ -1353,13 +1353,19 @@
           <a:p/>
           <a:p>
             <a:r>
-              <a:t>Say where we are on the journey: step 5 of 7, "Your agent, shared: a pull request to an open-source project, with your name on it." Then show what they will have at the end of this block before anyone starts.</a:t>
+              <a:t>Say where we are on the journey: step 5 of 7, "Your agent, shared: in an open-source collection, with your name on it." Then show what they will have at the end of this block before anyone starts.</a:t>
             </a:r>
           </a:p>
           <a:p/>
           <a:p>
             <a:r>
-              <a:t>Step card 5 walks the GitHub pages one control at a time, with what a screen reader announces at each step.</a:t>
+              <a:t>Everyone shared a practice agent before the day, so this is the second time, not the first. Say so; it changes the room.</a:t>
+            </a:r>
+          </a:p>
+          <a:p/>
+          <a:p>
+            <a:r>
+              <a:t>Helpers watch the issues labelled needs-a-hand and go to those people first. A Nearly there reply always says exactly what to fix.</a:t>
             </a:r>
           </a:p>
         </p:txBody>
@@ -1517,13 +1523,13 @@
           <a:p/>
           <a:p>
             <a:r>
-              <a:t>Merge on the projector as they arrive, and read each name and agent title out loud. Applause is allowed and encouraged.</a:t>
+              <a:t>Project agents/README.md in github.com/Community-Access/ahg-2026 and refresh it as agents arrive. Read each name and agent title out loud. Applause is allowed and encouraged.</a:t>
             </a:r>
           </a:p>
           <a:p/>
           <a:p>
             <a:r>
-              <a:t>Started from a ready-made agent? It still counts. Say so: what matters is that it is yours now.</a:t>
+              <a:t>Each agent is committed in its author's name, so it shows on their own GitHub profile. Started from a ready-made agent? It still counts. Say so: what matters is that it is yours now.</a:t>
             </a:r>
           </a:p>
         </p:txBody>
@@ -1757,7 +1763,7 @@
           <a:p/>
           <a:p>
             <a:r>
-              <a:t>Run the merged team on the projector against the sample course. Read out each agent's name as the coordinator calls it.</a:t>
+              <a:t>Copy every agents/&lt;login&gt;/&lt;name&gt;/ folder from the ahg-2026 repository into a room/ folder in your kit, then run /run-the-office on the projector. Read out each agent's name as the coordinator calls it.</a:t>
             </a:r>
           </a:p>
           <a:p/>
@@ -7212,7 +7218,7 @@
               <a:rPr sz="2000" b="0">
                 <a:latin typeface="Arial"/>
               </a:rPr>
-              <a:t>By the end of this block: your own pull request in the open-source Accessibility Agents project.</a:t>
+              <a:t>By the end of this block: your agent in the open-source AHG 2026 collection, committed in your name.</a:t>
             </a:r>
           </a:p>
           <a:p>
@@ -7223,7 +7229,7 @@
               <a:rPr sz="2000" b="0">
                 <a:latin typeface="Arial"/>
               </a:rPr>
-              <a:t>1. Open letitglow.app/workshop/ahg-2026/share in your browser, and choose your my-agent/SKILL.md.</a:t>
+              <a:t>1. Open letitglow.app/ahg/share, and choose your my-agent/SKILL.md.</a:t>
             </a:r>
           </a:p>
           <a:p>
@@ -7234,7 +7240,7 @@
               <a:rPr sz="2000" b="0">
                 <a:latin typeface="Arial"/>
               </a:rPr>
-              <a:t>2. Press Open GitHub with my agent. GitHub opens with your agent filled in.</a:t>
+              <a:t>2. Press Open the share form on GitHub. The form opens, already filled in.</a:t>
             </a:r>
           </a:p>
           <a:p>
@@ -7245,7 +7251,7 @@
               <a:rPr sz="2000" b="0">
                 <a:latin typeface="Arial"/>
               </a:rPr>
-              <a:t>3. Press Propose changes. GitHub makes your own copy, called a fork.</a:t>
+              <a:t>3. Tick the privacy box, and press Submit new issue.</a:t>
             </a:r>
           </a:p>
           <a:p>
@@ -7256,7 +7262,7 @@
               <a:rPr sz="2000" b="0">
                 <a:latin typeface="Arial"/>
               </a:rPr>
-              <a:t>4. Press Create pull request, then Create pull request again.</a:t>
+              <a:t>4. Within a minute, the reply: Your agent is in.</a:t>
             </a:r>
           </a:p>
           <a:p>
@@ -7267,7 +7273,7 @@
               <a:rPr sz="2000" b="0">
                 <a:latin typeface="Arial"/>
               </a:rPr>
-              <a:t>That is your contribution. Buttons only. No code.</a:t>
+              <a:t>You did this once already, with your practice agent. Same again.</a:t>
             </a:r>
           </a:p>
         </p:txBody>
@@ -7426,7 +7432,7 @@
               <a:rPr sz="3600" b="1">
                 <a:latin typeface="Arial"/>
               </a:rPr>
-              <a:t>Merged, with your name on it</a:t>
+              <a:t>In the collection, with your name on it</a:t>
             </a:r>
           </a:p>
         </p:txBody>
@@ -7469,7 +7475,7 @@
               <a:rPr sz="2000" b="0">
                 <a:latin typeface="Arial"/>
               </a:rPr>
-              <a:t>As your pull requests arrive, I review and merge them, here, on the screen.</a:t>
+              <a:t>As your agents arrive, the collection grows, here, on the screen.</a:t>
             </a:r>
           </a:p>
           <a:p>
@@ -7480,7 +7486,7 @@
               <a:rPr sz="2800" b="1">
                 <a:latin typeface="Arial"/>
               </a:rPr>
-              <a:t>Every agent merged today lives in community/ahg-2026 in the Accessibility Agents project, for anyone in higher education to use and improve.</a:t>
+              <a:t>Tonight every one of them goes into the Accessibility Agents project, with every author credited, for anyone in higher education to use and improve.</a:t>
             </a:r>
           </a:p>
         </p:txBody>
@@ -7581,7 +7587,7 @@
               <a:rPr sz="2000" b="0">
                 <a:latin typeface="Arial"/>
               </a:rPr>
-              <a:t>1. In Copilot Chat, type /run-the-office.</a:t>
+              <a:t>1. In Copilot Chat in VS Code, type /run-the-office.</a:t>
             </a:r>
           </a:p>
           <a:p>
@@ -7830,7 +7836,7 @@
               <a:rPr sz="2000" b="0">
                 <a:latin typeface="Arial"/>
               </a:rPr>
-              <a:t>One more run, on the screen: the office team with every agent this room merged.</a:t>
+              <a:t>One more run, on the screen: the office team with every agent this room shared.</a:t>
             </a:r>
           </a:p>
           <a:p>
@@ -8804,7 +8810,7 @@
               <a:rPr sz="2000" b="0">
                 <a:latin typeface="Arial"/>
               </a:rPr>
-              <a:t>5. Your agent, shared: a pull request to an open-source project, with your name on it.</a:t>
+              <a:t>5. Your agent, shared: in an open-source collection, with your name on it.</a:t>
             </a:r>
           </a:p>
           <a:p>
@@ -8923,7 +8929,7 @@
               <a:rPr sz="2000" b="0">
                 <a:latin typeface="Arial"/>
               </a:rPr>
-              <a:t>Your laptop, with VS Code, the AHG 2026 profile and your GitHub account. Not set up yet? A helper is coming to you.</a:t>
+              <a:t>Everything is at letitglow.app/ahg. Not set up yet? A helper is coming to you.</a:t>
             </a:r>
           </a:p>
           <a:p>

--- a/docs/ahg-2026/slides.pptx
+++ b/docs/ahg-2026/slides.pptx
@@ -627,6 +627,12 @@
           <a:p/>
           <a:p>
             <a:r>
+              <a:t>Say that the browser path is the same conversation: the block 2 text from letitglow.app/ahg/assistant pasted into ChatGPT asks the same questions in the same order.</a:t>
+            </a:r>
+          </a:p>
+          <a:p/>
+          <a:p>
+            <a:r>
               <a:t>Joke if the room is warm: Maria's coffee machine has been out of order since August. Her agent does not drink coffee, which is its main advantage.</a:t>
             </a:r>
           </a:p>
@@ -785,7 +791,7 @@
           <a:p/>
           <a:p>
             <a:r>
-              <a:t>Say where we are on the journey: step 3 of 7, "Your agent at work: Copilot uses it on one course document." Then show what they will have at the end of this block before anyone starts.</a:t>
+              <a:t>Say where we are on the journey: step 3 of 7, "Your agent at work: your AI uses it on one course document." Then show what they will have at the end of this block before anyone starts.</a:t>
             </a:r>
           </a:p>
           <a:p/>
@@ -1614,6 +1620,12 @@
               <a:t>This is building an agent team: they added a specialist, and their coordinator is running it. Copilot announces each file as it finishes, so screen reader users hear progress, not silence.</a:t>
             </a:r>
           </a:p>
+          <a:p/>
+          <a:p>
+            <a:r>
+              <a:t>On the browser path the same coordinator and specialists travel inside the block 6 text, so ChatGPT or any assistant runs the same team. If an assistant stops part way, type continue.</a:t>
+            </a:r>
+          </a:p>
         </p:txBody>
       </p:sp>
       <p:sp>
@@ -2268,6 +2280,12 @@
           <a:p>
             <a:r>
               <a:t>If anyone is not set up, do not wait for them. Helpers sit with them while the room carries on; the morning is designed so they catch up by lunch.</a:t>
+            </a:r>
+          </a:p>
+          <a:p/>
+          <a:p>
+            <a:r>
+              <a:t>Say the three paths once: VS Code on a laptop, VS Code for the Web at vscode.dev, or the browser path with ChatGPT or another assistant at letitglow.app/ahg/assistant. Same blocks, same agent, same share. Anyone whose VS Code will not cooperate moves to the browser path and loses nothing.</a:t>
             </a:r>
           </a:p>
         </p:txBody>
@@ -6047,7 +6065,7 @@
               <a:rPr sz="3600" b="1">
                 <a:latin typeface="Arial"/>
               </a:rPr>
-              <a:t>Copilot asks, you answer</a:t>
+              <a:t>Your AI asks, you answer</a:t>
             </a:r>
           </a:p>
         </p:txBody>
@@ -6090,7 +6108,7 @@
               <a:rPr sz="2000" b="0">
                 <a:latin typeface="Arial"/>
               </a:rPr>
-              <a:t>1. Open Copilot Chat: Control+Alt+I on Windows, Command+Control+I on a Mac.</a:t>
+              <a:t>1. In VS Code: open Copilot Chat (Control+Alt+I, or Control+Command+I on a Mac) and type /design-my-agent.</a:t>
             </a:r>
           </a:p>
           <a:p>
@@ -6101,7 +6119,7 @@
               <a:rPr sz="2000" b="0">
                 <a:latin typeface="Arial"/>
               </a:rPr>
-              <a:t>2. Type /design-my-agent and press Enter.</a:t>
+              <a:t>2. In a browser: copy the block 2 text from letitglow.app/ahg/assistant and paste it into your assistant.</a:t>
             </a:r>
           </a:p>
           <a:p>
@@ -6123,7 +6141,7 @@
               <a:rPr sz="2000" b="0">
                 <a:latin typeface="Arial"/>
               </a:rPr>
-              <a:t>4. Copilot writes your answers into my-agent/SKILL.md and reads it back.</a:t>
+              <a:t>4. VS Code writes your agent into my-agent/SKILL.md. In a browser it comes back in a box with a Copy button: download it from the share page.</a:t>
             </a:r>
           </a:p>
           <a:p>
@@ -6134,7 +6152,7 @@
               <a:rPr sz="2000" b="0">
                 <a:latin typeface="Arial"/>
               </a:rPr>
-              <a:t>You are on track if Copilot tells you one thing your agent does well.</a:t>
+              <a:t>You are on track if your AI tells you one thing your agent does well.</a:t>
             </a:r>
           </a:p>
           <a:p>
@@ -6145,7 +6163,7 @@
               <a:rPr sz="2000" b="0">
                 <a:latin typeface="Arial"/>
               </a:rPr>
-              <a:t>Stuck? Copy a ready-made agent from examples/agents into my-agent. That counts. You are still in.</a:t>
+              <a:t>Stuck? Start from a ready-made agent in examples/agents. That counts. You are still in.</a:t>
             </a:r>
           </a:p>
         </p:txBody>
@@ -6246,7 +6264,7 @@
               <a:rPr sz="2000" b="0">
                 <a:latin typeface="Arial"/>
               </a:rPr>
-              <a:t>1. In Copilot Chat, type /try-my-agent.</a:t>
+              <a:t>1. In VS Code, type /try-my-agent. In a browser, paste the block 3 text.</a:t>
             </a:r>
           </a:p>
           <a:p>
@@ -6596,7 +6614,7 @@
               <a:rPr sz="2000" b="0">
                 <a:latin typeface="Arial"/>
               </a:rPr>
-              <a:t>1. In Copilot Chat, type /ground-my-agent.</a:t>
+              <a:t>1. In VS Code, type /ground-my-agent. In a browser, paste the block 4 text.</a:t>
             </a:r>
           </a:p>
           <a:p>
@@ -6618,7 +6636,7 @@
               <a:rPr sz="2000" b="0">
                 <a:latin typeface="Arial"/>
               </a:rPr>
-              <a:t>3. Your agent reads that file's checker report from sample-course/evidence: GLOW for documents, axe for the web page.</a:t>
+              <a:t>3. Your agent reads that file's checker report: GLOW for documents, axe for the web page.</a:t>
             </a:r>
           </a:p>
           <a:p>
@@ -7229,7 +7247,7 @@
               <a:rPr sz="2000" b="0">
                 <a:latin typeface="Arial"/>
               </a:rPr>
-              <a:t>1. Open letitglow.app/ahg/share, and choose your my-agent/SKILL.md.</a:t>
+              <a:t>1. Open letitglow.app/ahg/share, and choose your SKILL.md, or paste your agent in.</a:t>
             </a:r>
           </a:p>
           <a:p>
@@ -7587,7 +7605,7 @@
               <a:rPr sz="2000" b="0">
                 <a:latin typeface="Arial"/>
               </a:rPr>
-              <a:t>1. In Copilot Chat in VS Code, type /run-the-office.</a:t>
+              <a:t>1. In VS Code, type /run-the-office. In a browser, paste the block 6 text.</a:t>
             </a:r>
           </a:p>
           <a:p>
@@ -7941,7 +7959,7 @@
               <a:rPr sz="1800">
                 <a:latin typeface="Arial"/>
               </a:rPr>
-              <a:t>1. In Copilot Chat, type /my-30-day-plan.</a:t>
+              <a:t>1. In VS Code, type /my-30-day-plan. In a browser, paste the block 7 text.</a:t>
             </a:r>
           </a:p>
           <a:p>
@@ -8788,7 +8806,7 @@
               <a:rPr sz="2000" b="0">
                 <a:latin typeface="Arial"/>
               </a:rPr>
-              <a:t>3. Your agent at work: Copilot uses it on one course document.</a:t>
+              <a:t>3. Your agent at work: your AI uses it on one course document.</a:t>
             </a:r>
           </a:p>
           <a:p>
@@ -8930,6 +8948,15 @@
                 <a:latin typeface="Arial"/>
               </a:rPr>
               <a:t>Everything is at letitglow.app/ahg. Not set up yet? A helper is coming to you.</a:t>
+            </a:r>
+          </a:p>
+          <a:p>
+            <a:pPr lvl="1"/>
+            <a:r>
+              <a:rPr sz="2000" b="0">
+                <a:latin typeface="Arial"/>
+              </a:rPr>
+              <a:t>Three paths, one day: VS Code on your laptop, VS Code at vscode.dev, or any AI assistant in your browser.</a:t>
             </a:r>
           </a:p>
           <a:p>

--- a/docs/ahg-2026/slides.pptx
+++ b/docs/ahg-2026/slides.pptx
@@ -31,6 +31,7 @@
     <p:sldId id="279" r:id="rId31"/>
     <p:sldId id="280" r:id="rId32"/>
     <p:sldId id="281" r:id="rId33"/>
+    <p:sldId id="282" r:id="rId34"/>
   </p:sldIdLst>
   <p:sldSz cx="12191695" cy="6858000" type="screen4x3"/>
   <p:notesSz cx="6858000" cy="9144000"/>
@@ -785,13 +786,13 @@
           <a:lstStyle/>
           <a:p>
             <a:r>
-              <a:t>[Block 3 of 7 - 11:50-12:15 - 25 minutes]</a:t>
+              <a:t>[Block 3 of 7 - 11:40-12:15 - 35 minutes]</a:t>
             </a:r>
           </a:p>
           <a:p/>
           <a:p>
             <a:r>
-              <a:t>Say where we are on the journey: step 3 of 7, "Your agent at work: your AI uses it on one course document." Then show what they will have at the end of this block before anyone starts.</a:t>
+              <a:t>Say where we are on the journey: step 3 of 7, "Your agent at work: your AI uses it on one course document, and you revise it." Then show what they will have at the end of this block before anyone starts.</a:t>
             </a:r>
           </a:p>
           <a:p/>
@@ -1031,7 +1032,7 @@
           <a:lstStyle/>
           <a:p>
             <a:r>
-              <a:t>[Block 4 of 7 - 1:15-2:10 - 55 minutes]</a:t>
+              <a:t>[Block 4 of 7 - 1:15-2:05 - 50 minutes]</a:t>
             </a:r>
           </a:p>
           <a:p/>
@@ -1353,25 +1354,25 @@
           <a:lstStyle/>
           <a:p>
             <a:r>
-              <a:t>[Block 5 of 7 - 2:20-3:00 - 40 minutes]</a:t>
+              <a:t>[Block 5 of 7 - 2:15-3:05 - 50 minutes]</a:t>
             </a:r>
           </a:p>
           <a:p/>
           <a:p>
             <a:r>
-              <a:t>Say where we are on the journey: step 5 of 7, "Your agent, shared: in an open-source collection, with your name on it." Then show what they will have at the end of this block before anyone starts.</a:t>
+              <a:t>Say where we are on the journey: step 5 of 7, "Your agent in the team: the whole course, at once." Then show what they will have at the end of this block before anyone starts.</a:t>
             </a:r>
           </a:p>
           <a:p/>
           <a:p>
             <a:r>
-              <a:t>Everyone shared a practice agent before the day, so this is the second time, not the first. Say so; it changes the room.</a:t>
+              <a:t>This is building an agent team: they added a specialist, and their coordinator is running it. Copilot announces each file as it finishes, so screen reader users hear progress, not silence.</a:t>
             </a:r>
           </a:p>
           <a:p/>
           <a:p>
             <a:r>
-              <a:t>Helpers watch the issues labelled needs-a-hand and go to those people first. A Nearly there reply always says exactly what to fix.</a:t>
+              <a:t>On the browser path the same coordinator and specialists travel inside the block 5 text, so ChatGPT or any assistant runs the same team. If an assistant stops part way, type continue.</a:t>
             </a:r>
           </a:p>
         </p:txBody>
@@ -1523,19 +1524,13 @@
           <a:lstStyle/>
           <a:p>
             <a:r>
-              <a:t>[Open source, live]</a:t>
+              <a:t>[What scale looks like]</a:t>
             </a:r>
           </a:p>
           <a:p/>
           <a:p>
             <a:r>
-              <a:t>Project agents/README.md in github.com/Community-Access/ahg-2026 and refresh it as agents arrive. Read each name and agent title out loud. Applause is allowed and encouraged.</a:t>
-            </a:r>
-          </a:p>
-          <a:p/>
-          <a:p>
-            <a:r>
-              <a:t>Each agent is committed in its author's name, so it shows on their own GitHub profile. Started from a ready-made agent? It still counts. Say so: what matters is that it is yours now.</a:t>
+              <a:t>Ask: what would it take to run this across ten courses? Let them answer. The honest answer is a person's review time, which is exactly where it should go.</a:t>
             </a:r>
           </a:p>
         </p:txBody>
@@ -1605,25 +1600,25 @@
           <a:lstStyle/>
           <a:p>
             <a:r>
-              <a:t>[Block 6 of 7 - 3:00-3:45 - 45 minutes]</a:t>
+              <a:t>[The real thing]</a:t>
             </a:r>
           </a:p>
           <a:p/>
           <a:p>
             <a:r>
-              <a:t>Say where we are on the journey: step 6 of 7, "Your agent in the team: the whole course, at once." Then show what they will have at the end of this block before anyone starts.</a:t>
+              <a:t>Fifteen minutes, on the projector, in VS Code with the kit open. Start a new chat and ask: use document-accessibility-wizard to review the PSY 101 course, using the files in sample-course/evidence.</a:t>
             </a:r>
           </a:p>
           <a:p/>
           <a:p>
             <a:r>
-              <a:t>This is building an agent team: they added a specialist, and their coordinator is running it. Copilot announces each file as it finishes, so screen reader users hear progress, not silence.</a:t>
+              <a:t>Point out that the skills that need scanners say so and ask for checker results, as accessibility-agents-in-the-kit.md explains. Never let it claim a scan it did not run.</a:t>
             </a:r>
           </a:p>
           <a:p/>
           <a:p>
             <a:r>
-              <a:t>On the browser path the same coordinator and specialists travel inside the block 6 text, so ChatGPT or any assistant runs the same team. If an assistant stops part way, type continue.</a:t>
+              <a:t>Close with: your agent goes into this project tonight, credited to you. That is the next block.</a:t>
             </a:r>
           </a:p>
         </p:txBody>
@@ -1693,13 +1688,25 @@
           <a:lstStyle/>
           <a:p>
             <a:r>
-              <a:t>[What scale looks like]</a:t>
+              <a:t>[Block 6 of 7 - 3:05-3:40 - 35 minutes]</a:t>
             </a:r>
           </a:p>
           <a:p/>
           <a:p>
             <a:r>
-              <a:t>Ask: what would it take to run this across ten courses? Let them answer. The honest answer is a person's review time, which is exactly where it should go.</a:t>
+              <a:t>Say where we are on the journey: step 6 of 7, "Your agent, shared: your best version, in an open-source collection, with your name on it." Then show what they will have at the end of this block before anyone starts.</a:t>
+            </a:r>
+          </a:p>
+          <a:p/>
+          <a:p>
+            <a:r>
+              <a:t>Everyone shared a practice agent before the day, so this is the second time, not the first. Say so; it changes the room.</a:t>
+            </a:r>
+          </a:p>
+          <a:p/>
+          <a:p>
+            <a:r>
+              <a:t>Helpers watch the issues labelled needs-a-hand and go to those people first. A Nearly there reply always says exactly what to fix.</a:t>
             </a:r>
           </a:p>
         </p:txBody>
@@ -1769,19 +1776,19 @@
           <a:lstStyle/>
           <a:p>
             <a:r>
-              <a:t>[Agents in action]</a:t>
+              <a:t>[Open source, live]</a:t>
             </a:r>
           </a:p>
           <a:p/>
           <a:p>
             <a:r>
-              <a:t>Copy every agents/&lt;login&gt;/&lt;name&gt;/ folder from the ahg-2026 repository into a room/ folder in your kit, then run /run-the-office on the projector. Read out each agent's name as the coordinator calls it.</a:t>
+              <a:t>Project agents/README.md in github.com/Community-Access/ahg-2026 and refresh it as agents arrive. Read each name and agent title out loud. Applause is allowed and encouraged.</a:t>
             </a:r>
           </a:p>
           <a:p/>
           <a:p>
             <a:r>
-              <a:t>If the run is slow, narrate it. If it stumbles, say what happened and why; a real failure explained well teaches more than a perfect demo.</a:t>
+              <a:t>Each agent is committed in its author's name, so it shows on their own GitHub profile. Started from a ready-made agent? It still counts. Say so: what matters is that it is yours now.</a:t>
             </a:r>
           </a:p>
         </p:txBody>
@@ -1851,19 +1858,19 @@
           <a:lstStyle/>
           <a:p>
             <a:r>
-              <a:t>[Block 7 of 7 - 3:45-4:15 - 30 minutes]</a:t>
+              <a:t>[Agents in action]</a:t>
             </a:r>
           </a:p>
           <a:p/>
           <a:p>
             <a:r>
-              <a:t>Say where we are on the journey: step 7 of 7, "Your campus: a 30-day plan." Then show what they will have at the end of this block before anyone starts.</a:t>
+              <a:t>Last thing in this block. Copy every agents/&lt;login&gt;/&lt;name&gt;/ folder from the ahg-2026 repository into a room/ folder in your kit, then run /run-the-office on the projector. Read out each agent's name as the coordinator calls it.</a:t>
             </a:r>
           </a:p>
           <a:p/>
           <a:p>
             <a:r>
-              <a:t>Small is the point. "Run the planner on the next five requests" beats "transform our office".</a:t>
+              <a:t>If the run is slow, narrate it. If it stumbles, say what happened and why; a real failure explained well teaches more than a perfect demo.</a:t>
             </a:r>
           </a:p>
         </p:txBody>
@@ -1933,19 +1940,19 @@
           <a:lstStyle/>
           <a:p>
             <a:r>
-              <a:t>[4:15]</a:t>
+              <a:t>[Block 7 of 7 - 3:40-4:15 - 35 minutes]</a:t>
             </a:r>
           </a:p>
           <a:p/>
           <a:p>
             <a:r>
-              <a:t>Project the wall from GLOW. Read three aloud. Do not comment on them, do not rank them.</a:t>
+              <a:t>Say where we are on the journey: step 7 of 7, "Your campus: a 30-day plan." Then show what they will have at the end of this block before anyone starts.</a:t>
             </a:r>
           </a:p>
           <a:p/>
           <a:p>
             <a:r>
-              <a:t>Then go straight to the evaluation. The last five minutes belong to it.</a:t>
+              <a:t>Small is the point. "Run the planner on the next five requests" beats "transform our office".</a:t>
             </a:r>
           </a:p>
         </p:txBody>
@@ -2015,6 +2022,88 @@
           <a:lstStyle/>
           <a:p>
             <a:r>
+              <a:t>[4:15]</a:t>
+            </a:r>
+          </a:p>
+          <a:p/>
+          <a:p>
+            <a:r>
+              <a:t>Project the wall from GLOW. Read three aloud. Do not comment on them, do not rank them.</a:t>
+            </a:r>
+          </a:p>
+          <a:p/>
+          <a:p>
+            <a:r>
+              <a:t>Then go straight to the evaluation. The last five minutes belong to it.</a:t>
+            </a:r>
+          </a:p>
+        </p:txBody>
+      </p:sp>
+      <p:sp>
+        <p:nvSpPr>
+          <p:cNvPr id="4" name="Slide Number Placeholder 3"/>
+          <p:cNvSpPr>
+            <a:spLocks noGrp="1"/>
+          </p:cNvSpPr>
+          <p:nvPr>
+            <p:ph type="sldNum" idx="5" sz="quarter"/>
+          </p:nvPr>
+        </p:nvSpPr>
+        <p:spPr/>
+      </p:sp>
+    </p:spTree>
+  </p:cSld>
+  <p:clrMapOvr>
+    <a:masterClrMapping/>
+  </p:clrMapOvr>
+</p:notes>
+</file>
+
+<file path=ppt/notesSlides/notesSlide27.xml><?xml version="1.0" encoding="utf-8"?>
+<p:notes xmlns:a="http://schemas.openxmlformats.org/drawingml/2006/main" xmlns:p="http://schemas.openxmlformats.org/presentationml/2006/main" xmlns:r="http://schemas.openxmlformats.org/officeDocument/2006/relationships">
+  <p:cSld>
+    <p:spTree>
+      <p:nvGrpSpPr>
+        <p:cNvPr id="1" name=""/>
+        <p:cNvGrpSpPr/>
+        <p:nvPr/>
+      </p:nvGrpSpPr>
+      <p:grpSpPr>
+        <a:xfrm>
+          <a:off x="0" y="0"/>
+          <a:ext cx="0" cy="0"/>
+          <a:chOff x="0" y="0"/>
+          <a:chExt cx="0" cy="0"/>
+        </a:xfrm>
+      </p:grpSpPr>
+      <p:sp>
+        <p:nvSpPr>
+          <p:cNvPr id="2" name="Slide Image Placeholder 1"/>
+          <p:cNvSpPr>
+            <a:spLocks noGrp="1"/>
+          </p:cNvSpPr>
+          <p:nvPr>
+            <p:ph type="sldImg" idx="2"/>
+          </p:nvPr>
+        </p:nvSpPr>
+        <p:spPr/>
+      </p:sp>
+      <p:sp>
+        <p:nvSpPr>
+          <p:cNvPr id="3" name="Notes Placeholder 2"/>
+          <p:cNvSpPr>
+            <a:spLocks noGrp="1"/>
+          </p:cNvSpPr>
+          <p:nvPr>
+            <p:ph type="body" idx="3" sz="quarter"/>
+          </p:nvPr>
+        </p:nvSpPr>
+        <p:spPr/>
+        <p:txBody>
+          <a:bodyPr/>
+          <a:lstStyle/>
+          <a:p>
+            <a:r>
               <a:t>[4:25 - Thank you]</a:t>
             </a:r>
           </a:p>
@@ -2607,13 +2696,13 @@
           <a:lstStyle/>
           <a:p>
             <a:r>
-              <a:t>[Block 2 of 7 - 10:50-11:50 - 60 minutes]</a:t>
+              <a:t>[Block 2 of 7 - 10:50-11:40 - 50 minutes]</a:t>
             </a:r>
           </a:p>
           <a:p/>
           <a:p>
             <a:r>
-              <a:t>Say where we are on the journey: step 2 of 7, "Your agent: five plain-English answers." Then show what they will have at the end of this block before anyone starts.</a:t>
+              <a:t>Say where we are on the journey: step 2 of 7, "Your agent: six plain-English answers." Then show what they will have at the end of this block before anyone starts.</a:t>
             </a:r>
           </a:p>
           <a:p/>
@@ -5761,7 +5850,7 @@
               <a:rPr sz="3600" b="1">
                 <a:latin typeface="Arial"/>
               </a:rPr>
-              <a:t>Maria's five answers</a:t>
+              <a:t>Maria's six answers</a:t>
             </a:r>
           </a:p>
         </p:txBody>
@@ -5815,7 +5904,7 @@
         </p:nvGraphicFramePr>
         <p:xfrm>
           <a:off x="548640" y="2560320"/>
-          <a:ext cx="11064240" cy="2743200"/>
+          <a:ext cx="11064240" cy="3154679"/>
         </p:xfrm>
         <a:graphic>
           <a:graphicData uri="http://schemas.openxmlformats.org/drawingml/2006/table">
@@ -5827,7 +5916,7 @@
                 <a:gridCol w="5532120"/>
                 <a:gridCol w="5532120"/>
               </a:tblGrid>
-              <a:tr h="457200">
+              <a:tr h="450668">
                 <a:tc>
                   <a:txBody>
                     <a:bodyPr/>
@@ -5859,7 +5948,7 @@
                   <a:tcPr/>
                 </a:tc>
               </a:tr>
-              <a:tr h="457200">
+              <a:tr h="450668">
                 <a:tc>
                   <a:txBody>
                     <a:bodyPr/>
@@ -5891,7 +5980,7 @@
                   <a:tcPr/>
                 </a:tc>
               </a:tr>
-              <a:tr h="457200">
+              <a:tr h="450668">
                 <a:tc>
                   <a:txBody>
                     <a:bodyPr/>
@@ -5923,7 +6012,7 @@
                   <a:tcPr/>
                 </a:tc>
               </a:tr>
-              <a:tr h="457200">
+              <a:tr h="450668">
                 <a:tc>
                   <a:txBody>
                     <a:bodyPr/>
@@ -5955,7 +6044,7 @@
                   <a:tcPr/>
                 </a:tc>
               </a:tr>
-              <a:tr h="457200">
+              <a:tr h="450668">
                 <a:tc>
                   <a:txBody>
                     <a:bodyPr/>
@@ -5987,7 +6076,39 @@
                   <a:tcPr/>
                 </a:tc>
               </a:tr>
-              <a:tr h="457200">
+              <a:tr h="450668">
+                <a:tc>
+                  <a:txBody>
+                    <a:bodyPr/>
+                    <a:lstStyle/>
+                    <a:p>
+                      <a:r>
+                        <a:rPr sz="1800">
+                          <a:latin typeface="Arial"/>
+                        </a:rPr>
+                        <a:t>Example</a:t>
+                      </a:r>
+                    </a:p>
+                  </a:txBody>
+                  <a:tcPr/>
+                </a:tc>
+                <a:tc>
+                  <a:txBody>
+                    <a:bodyPr/>
+                    <a:lstStyle/>
+                    <a:p>
+                      <a:r>
+                        <a:rPr sz="1800">
+                          <a:latin typeface="Arial"/>
+                        </a:rPr>
+                        <a:t>The scanned reading: get the text, then 18 point large print</a:t>
+                      </a:r>
+                    </a:p>
+                  </a:txBody>
+                  <a:tcPr/>
+                </a:tc>
+              </a:tr>
+              <a:tr h="450671">
                 <a:tc>
                   <a:txBody>
                     <a:bodyPr/>
@@ -6242,7 +6363,7 @@
               <a:rPr sz="1800" b="0">
                 <a:latin typeface="Arial"/>
               </a:rPr>
-              <a:t>Block 3 of 7 - 11:50-12:15 - 25 minutes</a:t>
+              <a:t>Block 3 of 7 - 11:40-12:15 - 35 minutes</a:t>
             </a:r>
           </a:p>
           <a:p>
@@ -6253,7 +6374,7 @@
               <a:rPr sz="2000" b="0">
                 <a:latin typeface="Arial"/>
               </a:rPr>
-              <a:t>By the end of this block: your agent's first answer on a real course document.</a:t>
+              <a:t>By the end of this block: your agent's first answer on a real course document, and version 2.</a:t>
             </a:r>
           </a:p>
           <a:p>
@@ -6287,6 +6408,17 @@
                 <a:latin typeface="Arial"/>
               </a:rPr>
               <a:t>3. Read what your agent says.</a:t>
+            </a:r>
+          </a:p>
+          <a:p>
+            <a:pPr lvl="1">
+              <a:buNone/>
+            </a:pPr>
+            <a:r>
+              <a:rPr sz="2000" b="0">
+                <a:latin typeface="Arial"/>
+              </a:rPr>
+              <a:t>4. Then /review-my-agent, or the review text: one change, version 2.</a:t>
             </a:r>
           </a:p>
           <a:p>
@@ -6592,7 +6724,7 @@
               <a:rPr sz="1800" b="0">
                 <a:latin typeface="Arial"/>
               </a:rPr>
-              <a:t>Block 4 of 7 - 1:15-2:10 - 55 minutes</a:t>
+              <a:t>Block 4 of 7 - 1:15-2:05 - 50 minutes</a:t>
             </a:r>
           </a:p>
           <a:p>
@@ -6648,6 +6780,17 @@
                 <a:latin typeface="Arial"/>
               </a:rPr>
               <a:t>4. Compare the two answers.</a:t>
+            </a:r>
+          </a:p>
+          <a:p>
+            <a:pPr lvl="1">
+              <a:buNone/>
+            </a:pPr>
+            <a:r>
+              <a:rPr sz="2000" b="0">
+                <a:latin typeface="Arial"/>
+              </a:rPr>
+              <a:t>5. Then /review-my-agent again: version 3.</a:t>
             </a:r>
           </a:p>
         </p:txBody>
@@ -7103,7 +7246,7 @@
               <a:rPr sz="3600" b="1">
                 <a:latin typeface="Arial"/>
               </a:rPr>
-              <a:t>Back at 2:20</a:t>
+              <a:t>Back at 2:15</a:t>
             </a:r>
           </a:p>
         </p:txBody>
@@ -7146,7 +7289,7 @@
               <a:rPr sz="2000" b="0">
                 <a:latin typeface="Arial"/>
               </a:rPr>
-              <a:t>Next, your agent goes public. Nicely.</a:t>
+              <a:t>Next, your agent joins a team. Then it goes public.</a:t>
             </a:r>
           </a:p>
         </p:txBody>
@@ -7193,7 +7336,7 @@
               <a:rPr sz="3600" b="1">
                 <a:latin typeface="Arial"/>
               </a:rPr>
-              <a:t>Share it</a:t>
+              <a:t>Build the office</a:t>
             </a:r>
           </a:p>
         </p:txBody>
@@ -7225,7 +7368,7 @@
               <a:rPr sz="1800" b="0">
                 <a:latin typeface="Arial"/>
               </a:rPr>
-              <a:t>Block 5 of 7 - 2:20-3:00 - 40 minutes</a:t>
+              <a:t>Block 5 of 7 - 2:15-3:05 - 50 minutes</a:t>
             </a:r>
           </a:p>
           <a:p>
@@ -7236,7 +7379,7 @@
               <a:rPr sz="2000" b="0">
                 <a:latin typeface="Arial"/>
               </a:rPr>
-              <a:t>By the end of this block: your agent in the open-source AHG 2026 collection, committed in your name.</a:t>
+              <a:t>By the end of this block: your agent working inside a team, across the whole course, and one team report.</a:t>
             </a:r>
           </a:p>
           <a:p>
@@ -7247,7 +7390,7 @@
               <a:rPr sz="2000" b="0">
                 <a:latin typeface="Arial"/>
               </a:rPr>
-              <a:t>1. Open letitglow.app/ahg/share, and choose your SKILL.md, or paste your agent in.</a:t>
+              <a:t>1. In VS Code, type /run-the-office. In a browser, paste the block 5 text.</a:t>
             </a:r>
           </a:p>
           <a:p>
@@ -7258,7 +7401,7 @@
               <a:rPr sz="2000" b="0">
                 <a:latin typeface="Arial"/>
               </a:rPr>
-              <a:t>2. Press Open the share form on GitHub. The form opens, already filled in.</a:t>
+              <a:t>2. The coordinator sends each course file to its specialists, and yours where it fits.</a:t>
             </a:r>
           </a:p>
           <a:p>
@@ -7269,7 +7412,7 @@
               <a:rPr sz="2000" b="0">
                 <a:latin typeface="Arial"/>
               </a:rPr>
-              <a:t>3. Tick the privacy box, and press Submit new issue.</a:t>
+              <a:t>3. The standards reviewer checks everyone's work.</a:t>
             </a:r>
           </a:p>
           <a:p>
@@ -7280,18 +7423,18 @@
               <a:rPr sz="2000" b="0">
                 <a:latin typeface="Arial"/>
               </a:rPr>
-              <a:t>4. Within a minute, the reply: Your agent is in.</a:t>
-            </a:r>
-          </a:p>
-          <a:p>
-            <a:pPr marL="0" indent="0">
+              <a:t>4. You get the team report, with your agent's section in it.</a:t>
+            </a:r>
+          </a:p>
+          <a:p>
+            <a:pPr lvl="1">
               <a:buNone/>
             </a:pPr>
             <a:r>
               <a:rPr sz="2000" b="0">
                 <a:latin typeface="Arial"/>
               </a:rPr>
-              <a:t>You did this once already, with your practice agent. Same again.</a:t>
+              <a:t>5. Then /review-my-agent, or the review text: version 4, your best.</a:t>
             </a:r>
           </a:p>
         </p:txBody>
@@ -7450,7 +7593,7 @@
               <a:rPr sz="3600" b="1">
                 <a:latin typeface="Arial"/>
               </a:rPr>
-              <a:t>In the collection, with your name on it</a:t>
+              <a:t>One course, one report</a:t>
             </a:r>
           </a:p>
         </p:txBody>
@@ -7482,7 +7625,43 @@
               <a:rPr sz="1800" b="0">
                 <a:latin typeface="Arial"/>
               </a:rPr>
-              <a:t>Open source, live</a:t>
+              <a:t>What scale looks like</a:t>
+            </a:r>
+          </a:p>
+          <a:p>
+            <a:pPr lvl="1"/>
+            <a:r>
+              <a:rPr sz="2000" b="0">
+                <a:latin typeface="Arial"/>
+              </a:rPr>
+              <a:t>Seven files, eight specialists, plus yours.</a:t>
+            </a:r>
+          </a:p>
+          <a:p>
+            <a:pPr lvl="1"/>
+            <a:r>
+              <a:rPr sz="2000" b="0">
+                <a:latin typeface="Arial"/>
+              </a:rPr>
+              <a:t>Every finding: evidence, a WCAG 2.2 criterion with its link, and a named reviewer.</a:t>
+            </a:r>
+          </a:p>
+          <a:p>
+            <a:pPr lvl="1"/>
+            <a:r>
+              <a:rPr sz="2000" b="0">
+                <a:latin typeface="Arial"/>
+              </a:rPr>
+              <a:t>A list of what no checker could see, for a person.</a:t>
+            </a:r>
+          </a:p>
+          <a:p>
+            <a:pPr lvl="1"/>
+            <a:r>
+              <a:rPr sz="2000" b="0">
+                <a:latin typeface="Arial"/>
+              </a:rPr>
+              <a:t>Three lines at the top that a director will actually read.</a:t>
             </a:r>
           </a:p>
           <a:p>
@@ -7490,21 +7669,10 @@
               <a:buNone/>
             </a:pPr>
             <a:r>
-              <a:rPr sz="2000" b="0">
-                <a:latin typeface="Arial"/>
-              </a:rPr>
-              <a:t>As your agents arrive, the collection grows, here, on the screen.</a:t>
-            </a:r>
-          </a:p>
-          <a:p>
-            <a:pPr marL="0" indent="0">
-              <a:buNone/>
-            </a:pPr>
-            <a:r>
               <a:rPr sz="2800" b="1">
                 <a:latin typeface="Arial"/>
               </a:rPr>
-              <a:t>Tonight every one of them goes into the Accessibility Agents project, with every author credited, for anyone in higher education to use and improve.</a:t>
+              <a:t>That is quality, accountability and transparency, at scale. It is also a Tuesday.</a:t>
             </a:r>
           </a:p>
         </p:txBody>
@@ -7551,7 +7719,7 @@
               <a:rPr sz="3600" b="1">
                 <a:latin typeface="Arial"/>
               </a:rPr>
-              <a:t>Build the office</a:t>
+              <a:t>The full Accessibility Agents team</a:t>
             </a:r>
           </a:p>
         </p:txBody>
@@ -7583,7 +7751,7 @@
               <a:rPr sz="1800" b="0">
                 <a:latin typeface="Arial"/>
               </a:rPr>
-              <a:t>Block 6 of 7 - 3:00-3:45 - 45 minutes</a:t>
+              <a:t>The real thing</a:t>
             </a:r>
           </a:p>
           <a:p>
@@ -7594,51 +7762,34 @@
               <a:rPr sz="2000" b="0">
                 <a:latin typeface="Arial"/>
               </a:rPr>
-              <a:t>By the end of this block: your agent working inside a team, across the whole course, and one team report.</a:t>
-            </a:r>
-          </a:p>
-          <a:p>
-            <a:pPr lvl="1">
-              <a:buNone/>
-            </a:pPr>
+              <a:t>The office you just ran is a small version of a real open-source project: Accessibility Agents.</a:t>
+            </a:r>
+          </a:p>
+          <a:p>
+            <a:pPr lvl="1"/>
             <a:r>
               <a:rPr sz="2000" b="0">
                 <a:latin typeface="Arial"/>
               </a:rPr>
-              <a:t>1. In VS Code, type /run-the-office. In a browser, paste the block 6 text.</a:t>
-            </a:r>
-          </a:p>
-          <a:p>
-            <a:pPr lvl="1">
-              <a:buNone/>
-            </a:pPr>
+              <a:t>Six entry points, and 107 specialist, helper and reference skills behind them.</a:t>
+            </a:r>
+          </a:p>
+          <a:p>
+            <a:pPr lvl="1"/>
             <a:r>
               <a:rPr sz="2000" b="0">
                 <a:latin typeface="Arial"/>
               </a:rPr>
-              <a:t>2. The coordinator sends each course file to its specialists, and yours where it fits.</a:t>
-            </a:r>
-          </a:p>
-          <a:p>
-            <a:pPr lvl="1">
-              <a:buNone/>
-            </a:pPr>
+              <a:t>The same course, on the screen: web, Word, PowerPoint, Excel and PDF.</a:t>
+            </a:r>
+          </a:p>
+          <a:p>
+            <a:pPr lvl="1"/>
             <a:r>
               <a:rPr sz="2000" b="0">
                 <a:latin typeface="Arial"/>
               </a:rPr>
-              <a:t>3. The standards reviewer checks everyone's work.</a:t>
-            </a:r>
-          </a:p>
-          <a:p>
-            <a:pPr lvl="1">
-              <a:buNone/>
-            </a:pPr>
-            <a:r>
-              <a:rPr sz="2000" b="0">
-                <a:latin typeface="Arial"/>
-              </a:rPr>
-              <a:t>4. You get the team report, with your agent's section in it.</a:t>
+              <a:t>It is already in your kit, in .github/skills. Ask for document-accessibility-wizard by name.</a:t>
             </a:r>
           </a:p>
         </p:txBody>
@@ -7685,7 +7836,7 @@
               <a:rPr sz="3600" b="1">
                 <a:latin typeface="Arial"/>
               </a:rPr>
-              <a:t>One course, one report</a:t>
+              <a:t>Share it</a:t>
             </a:r>
           </a:p>
         </p:txBody>
@@ -7717,43 +7868,62 @@
               <a:rPr sz="1800" b="0">
                 <a:latin typeface="Arial"/>
               </a:rPr>
-              <a:t>What scale looks like</a:t>
-            </a:r>
-          </a:p>
-          <a:p>
-            <a:pPr lvl="1"/>
+              <a:t>Block 6 of 7 - 3:05-3:40 - 35 minutes</a:t>
+            </a:r>
+          </a:p>
+          <a:p>
+            <a:pPr marL="0" indent="0">
+              <a:buNone/>
+            </a:pPr>
             <a:r>
               <a:rPr sz="2000" b="0">
                 <a:latin typeface="Arial"/>
               </a:rPr>
-              <a:t>Seven files, eight specialists, plus yours.</a:t>
-            </a:r>
-          </a:p>
-          <a:p>
-            <a:pPr lvl="1"/>
+              <a:t>By the end of this block: your best version in the open-source AHG 2026 collection, committed in your name.</a:t>
+            </a:r>
+          </a:p>
+          <a:p>
+            <a:pPr lvl="1">
+              <a:buNone/>
+            </a:pPr>
             <a:r>
               <a:rPr sz="2000" b="0">
                 <a:latin typeface="Arial"/>
               </a:rPr>
-              <a:t>Every finding: evidence, a WCAG 2.2 criterion with its link, and a named reviewer.</a:t>
-            </a:r>
-          </a:p>
-          <a:p>
-            <a:pPr lvl="1"/>
+              <a:t>1. Open letitglow.app/ahg/share, and choose your newest SKILL.md, version 4, or paste it in.</a:t>
+            </a:r>
+          </a:p>
+          <a:p>
+            <a:pPr lvl="1">
+              <a:buNone/>
+            </a:pPr>
             <a:r>
               <a:rPr sz="2000" b="0">
                 <a:latin typeface="Arial"/>
               </a:rPr>
-              <a:t>A list of what no checker could see, for a person.</a:t>
-            </a:r>
-          </a:p>
-          <a:p>
-            <a:pPr lvl="1"/>
+              <a:t>2. Press Open the share form on GitHub. The form opens, already filled in.</a:t>
+            </a:r>
+          </a:p>
+          <a:p>
+            <a:pPr lvl="1">
+              <a:buNone/>
+            </a:pPr>
             <a:r>
               <a:rPr sz="2000" b="0">
                 <a:latin typeface="Arial"/>
               </a:rPr>
-              <a:t>Three lines at the top that a director will actually read.</a:t>
+              <a:t>3. Tick the privacy box, and press Submit new issue.</a:t>
+            </a:r>
+          </a:p>
+          <a:p>
+            <a:pPr lvl="1">
+              <a:buNone/>
+            </a:pPr>
+            <a:r>
+              <a:rPr sz="2000" b="0">
+                <a:latin typeface="Arial"/>
+              </a:rPr>
+              <a:t>4. Within a minute, the reply: Your agent is in.</a:t>
             </a:r>
           </a:p>
           <a:p>
@@ -7761,10 +7931,10 @@
               <a:buNone/>
             </a:pPr>
             <a:r>
-              <a:rPr sz="2800" b="1">
-                <a:latin typeface="Arial"/>
-              </a:rPr>
-              <a:t>That is quality, accountability and transparency, at scale. It is also a Tuesday.</a:t>
+              <a:rPr sz="2000" b="0">
+                <a:latin typeface="Arial"/>
+              </a:rPr>
+              <a:t>You did this once already, with your practice agent. Same again.</a:t>
             </a:r>
           </a:p>
         </p:txBody>
@@ -7811,7 +7981,7 @@
               <a:rPr sz="3600" b="1">
                 <a:latin typeface="Arial"/>
               </a:rPr>
-              <a:t>Everyone's agents, together</a:t>
+              <a:t>In the collection, with your name on it</a:t>
             </a:r>
           </a:p>
         </p:txBody>
@@ -7843,7 +8013,7 @@
               <a:rPr sz="1800" b="0">
                 <a:latin typeface="Arial"/>
               </a:rPr>
-              <a:t>Agents in action</a:t>
+              <a:t>Open source, live</a:t>
             </a:r>
           </a:p>
           <a:p>
@@ -7854,7 +8024,7 @@
               <a:rPr sz="2000" b="0">
                 <a:latin typeface="Arial"/>
               </a:rPr>
-              <a:t>One more run, on the screen: the office team with every agent this room shared.</a:t>
+              <a:t>As your agents arrive, the collection grows, here, on the screen.</a:t>
             </a:r>
           </a:p>
           <a:p>
@@ -7862,10 +8032,10 @@
               <a:buNone/>
             </a:pPr>
             <a:r>
-              <a:rPr sz="2000" b="0">
-                <a:latin typeface="Arial"/>
-              </a:rPr>
-              <a:t>Listen for yours.</a:t>
+              <a:rPr sz="2800" b="1">
+                <a:latin typeface="Arial"/>
+              </a:rPr>
+              <a:t>Tonight every one of them goes into the Accessibility Agents project, with every author credited, for anyone in higher education to use and improve.</a:t>
             </a:r>
           </a:p>
         </p:txBody>
@@ -7912,6 +8082,107 @@
               <a:rPr sz="3600" b="1">
                 <a:latin typeface="Arial"/>
               </a:rPr>
+              <a:t>Everyone's agents, together</a:t>
+            </a:r>
+          </a:p>
+        </p:txBody>
+      </p:sp>
+      <p:sp>
+        <p:nvSpPr>
+          <p:cNvPr id="3" name="Content Placeholder 2"/>
+          <p:cNvSpPr>
+            <a:spLocks noGrp="1"/>
+          </p:cNvSpPr>
+          <p:nvPr>
+            <p:ph idx="1"/>
+          </p:nvPr>
+        </p:nvSpPr>
+        <p:spPr>
+          <a:xfrm>
+            <a:off x="548640" y="1554480"/>
+            <a:ext cx="11064240" cy="4937760"/>
+          </a:xfrm>
+        </p:spPr>
+        <p:txBody>
+          <a:bodyPr wrap="square"/>
+          <a:lstStyle/>
+          <a:p>
+            <a:pPr marL="0" indent="0">
+              <a:buNone/>
+            </a:pPr>
+            <a:r>
+              <a:rPr sz="1800" b="0">
+                <a:latin typeface="Arial"/>
+              </a:rPr>
+              <a:t>Agents in action</a:t>
+            </a:r>
+          </a:p>
+          <a:p>
+            <a:pPr marL="0" indent="0">
+              <a:buNone/>
+            </a:pPr>
+            <a:r>
+              <a:rPr sz="2000" b="0">
+                <a:latin typeface="Arial"/>
+              </a:rPr>
+              <a:t>One more run, on the screen: the office team with every agent this room shared.</a:t>
+            </a:r>
+          </a:p>
+          <a:p>
+            <a:pPr marL="0" indent="0">
+              <a:buNone/>
+            </a:pPr>
+            <a:r>
+              <a:rPr sz="2000" b="0">
+                <a:latin typeface="Arial"/>
+              </a:rPr>
+              <a:t>Listen for yours.</a:t>
+            </a:r>
+          </a:p>
+        </p:txBody>
+      </p:sp>
+    </p:spTree>
+  </p:cSld>
+  <p:clrMapOvr>
+    <a:masterClrMapping/>
+  </p:clrMapOvr>
+</p:sld>
+</file>
+
+<file path=ppt/slides/slide25.xml><?xml version="1.0" encoding="utf-8"?>
+<p:sld xmlns:a="http://schemas.openxmlformats.org/drawingml/2006/main" xmlns:p="http://schemas.openxmlformats.org/presentationml/2006/main" xmlns:r="http://schemas.openxmlformats.org/officeDocument/2006/relationships">
+  <p:cSld>
+    <p:spTree>
+      <p:nvGrpSpPr>
+        <p:cNvPr id="1" name=""/>
+        <p:cNvGrpSpPr/>
+        <p:nvPr/>
+      </p:nvGrpSpPr>
+      <p:grpSpPr/>
+      <p:sp>
+        <p:nvSpPr>
+          <p:cNvPr id="2" name="Title 1"/>
+          <p:cNvSpPr>
+            <a:spLocks noGrp="1"/>
+          </p:cNvSpPr>
+          <p:nvPr>
+            <p:ph type="title"/>
+          </p:nvPr>
+        </p:nvSpPr>
+        <p:spPr>
+          <a:xfrm>
+            <a:off x="548640" y="365760"/>
+            <a:ext cx="11064240" cy="1097280"/>
+          </a:xfrm>
+        </p:spPr>
+        <p:txBody>
+          <a:bodyPr/>
+          <a:lstStyle/>
+          <a:p>
+            <a:r>
+              <a:rPr sz="3600" b="1">
+                <a:latin typeface="Arial"/>
+              </a:rPr>
               <a:t>Take it home</a:t>
             </a:r>
           </a:p>
@@ -7943,7 +8214,7 @@
               <a:rPr sz="1800">
                 <a:latin typeface="Arial"/>
               </a:rPr>
-              <a:t>Block 7 of 7 - 3:45-4:15 - 30 minutes</a:t>
+              <a:t>Block 7 of 7 - 3:40-4:15 - 35 minutes</a:t>
             </a:r>
           </a:p>
           <a:p>
@@ -8174,7 +8445,7 @@
 </p:sld>
 </file>
 
-<file path=ppt/slides/slide25.xml><?xml version="1.0" encoding="utf-8"?>
+<file path=ppt/slides/slide26.xml><?xml version="1.0" encoding="utf-8"?>
 <p:sld xmlns:a="http://schemas.openxmlformats.org/drawingml/2006/main" xmlns:p="http://schemas.openxmlformats.org/presentationml/2006/main" xmlns:r="http://schemas.openxmlformats.org/officeDocument/2006/relationships">
   <p:cSld>
     <p:spTree>
@@ -8264,7 +8535,7 @@
 </p:sld>
 </file>
 
-<file path=ppt/slides/slide26.xml><?xml version="1.0" encoding="utf-8"?>
+<file path=ppt/slides/slide27.xml><?xml version="1.0" encoding="utf-8"?>
 <p:sld xmlns:a="http://schemas.openxmlformats.org/drawingml/2006/main" xmlns:p="http://schemas.openxmlformats.org/presentationml/2006/main" xmlns:r="http://schemas.openxmlformats.org/officeDocument/2006/relationships">
   <p:cSld>
     <p:spTree>
@@ -8795,7 +9066,7 @@
               <a:rPr sz="2000" b="0">
                 <a:latin typeface="Arial"/>
               </a:rPr>
-              <a:t>2. Your agent: five plain-English answers.</a:t>
+              <a:t>2. Your agent: six plain-English answers.</a:t>
             </a:r>
           </a:p>
           <a:p>
@@ -8806,7 +9077,7 @@
               <a:rPr sz="2000" b="0">
                 <a:latin typeface="Arial"/>
               </a:rPr>
-              <a:t>3. Your agent at work: your AI uses it on one course document.</a:t>
+              <a:t>3. Your agent at work: your AI uses it on one course document, and you revise it.</a:t>
             </a:r>
           </a:p>
           <a:p>
@@ -8828,7 +9099,7 @@
               <a:rPr sz="2000" b="0">
                 <a:latin typeface="Arial"/>
               </a:rPr>
-              <a:t>5. Your agent, shared: in an open-source collection, with your name on it.</a:t>
+              <a:t>5. Your agent in the team: the whole course, at once.</a:t>
             </a:r>
           </a:p>
           <a:p>
@@ -8839,7 +9110,7 @@
               <a:rPr sz="2000" b="0">
                 <a:latin typeface="Arial"/>
               </a:rPr>
-              <a:t>6. Your agent in the team: the whole course, at once.</a:t>
+              <a:t>6. Your agent, shared: your best version, in an open-source collection, with your name on it.</a:t>
             </a:r>
           </a:p>
           <a:p>
@@ -8938,7 +9209,7 @@
               <a:rPr sz="2000" b="0">
                 <a:latin typeface="Arial"/>
               </a:rPr>
-              <a:t>10:30 to 4:30 Mountain Time. Lunch at 12:15. A break at 2:10.</a:t>
+              <a:t>10:30 to 4:30 Mountain Time. Lunch at 12:15. A break at 2:05.</a:t>
             </a:r>
           </a:p>
           <a:p>
@@ -9219,6 +9490,15 @@
               <a:rPr sz="2000" b="0">
                 <a:latin typeface="Arial"/>
               </a:rPr>
+              <a:t>Example: One short, good answer, so it sees the shape you want.</a:t>
+            </a:r>
+          </a:p>
+          <a:p>
+            <a:pPr lvl="1"/>
+            <a:r>
+              <a:rPr sz="2000" b="0">
+                <a:latin typeface="Arial"/>
+              </a:rPr>
               <a:t>Human review: Who checks it before anything goes out.</a:t>
             </a:r>
           </a:p>
@@ -9230,7 +9510,7 @@
               <a:rPr sz="2800" b="1">
                 <a:latin typeface="Arial"/>
               </a:rPr>
-              <a:t>An agent is those five answers, written in plain English. Writing one is writing, not coding.</a:t>
+              <a:t>An agent is those six answers, written in plain English. Writing one is writing, not coding.</a:t>
             </a:r>
           </a:p>
         </p:txBody>
@@ -9741,7 +10021,7 @@
               <a:rPr sz="1800" b="0">
                 <a:latin typeface="Arial"/>
               </a:rPr>
-              <a:t>Block 2 of 7 - 10:50-11:50 - 60 minutes</a:t>
+              <a:t>Block 2 of 7 - 10:50-11:40 - 50 minutes</a:t>
             </a:r>
           </a:p>
           <a:p>

--- a/docs/ahg-2026/slides.pptx
+++ b/docs/ahg-2026/slides.pptx
@@ -1454,7 +1454,7 @@
           <a:p/>
           <a:p>
             <a:r>
-              <a:t>Title II's rule points to WCAG 2.1 AA; 2.2 is the current standard and includes everything 2.1 does. Say it once and move on.</a:t>
+              <a:t>Title II's rule points to WCAG 2.1 AA; 2.2 is the current standard and includes everything 2.1 does. The Department of Justice's interim final rule of 20 April 2026 moved the dates to 26 April 2027 for entities of 50,000 people or more and 26 April 2028 for smaller ones (ada.gov, the web rule page). Check that page the week before in case the dates move again. Say it once and move on.</a:t>
             </a:r>
           </a:p>
         </p:txBody>
@@ -2275,6 +2275,12 @@
           <a:p>
             <a:r>
               <a:t>Read all seven, slowly. This list comes back at the start of every block with one step marked, so nobody ever wonders where we are.</a:t>
+            </a:r>
+          </a:p>
+          <a:p/>
+          <a:p>
+            <a:r>
+              <a:t>Then read the six outcomes once. They come back at 4:15, when everyone's 30-day plan reads them back with what they made today.</a:t>
             </a:r>
           </a:p>
           <a:p/>
@@ -7524,7 +7530,7 @@
               <a:rPr sz="2000" b="0">
                 <a:latin typeface="Arial"/>
               </a:rPr>
-              <a:t>WCAG 2.2 is the standard. Title II made it a deadline for public colleges and universities.</a:t>
+              <a:t>WCAG 2.2 is the current standard. Title II requires WCAG 2.1 AA of public colleges and universities, from April 2027 for most.</a:t>
             </a:r>
           </a:p>
           <a:p>
@@ -7912,7 +7918,7 @@
               <a:rPr sz="2000" b="0">
                 <a:latin typeface="Arial"/>
               </a:rPr>
-              <a:t>3. Tick the privacy box, and press Submit new issue.</a:t>
+              <a:t>3. Select the privacy check box, and press Submit new issue.</a:t>
             </a:r>
           </a:p>
           <a:p>
@@ -9122,6 +9128,71 @@
                 <a:latin typeface="Arial"/>
               </a:rPr>
               <a:t>7. Your campus: a 30-day plan.</a:t>
+            </a:r>
+          </a:p>
+          <a:p>
+            <a:pPr marL="0" indent="0">
+              <a:buNone/>
+            </a:pPr>
+            <a:r>
+              <a:rPr sz="2000" b="0">
+                <a:latin typeface="Arial"/>
+              </a:rPr>
+              <a:t>By 4:30 you will be able to:</a:t>
+            </a:r>
+          </a:p>
+          <a:p>
+            <a:pPr lvl="1"/>
+            <a:r>
+              <a:rPr sz="2000" b="0">
+                <a:latin typeface="Arial"/>
+              </a:rPr>
+              <a:t>Describe an accessibility task as an agent.</a:t>
+            </a:r>
+          </a:p>
+          <a:p>
+            <a:pPr lvl="1"/>
+            <a:r>
+              <a:rPr sz="2000" b="0">
+                <a:latin typeface="Arial"/>
+              </a:rPr>
+              <a:t>Ground an agent's answers in checker evidence, citing WCAG 2.2.</a:t>
+            </a:r>
+          </a:p>
+          <a:p>
+            <a:pPr lvl="1"/>
+            <a:r>
+              <a:rPr sz="2000" b="0">
+                <a:latin typeface="Arial"/>
+              </a:rPr>
+              <a:t>Name what no checker finds, and write the review step that catches it.</a:t>
+            </a:r>
+          </a:p>
+          <a:p>
+            <a:pPr lvl="1"/>
+            <a:r>
+              <a:rPr sz="2000" b="0">
+                <a:latin typeface="Arial"/>
+              </a:rPr>
+              <a:t>Explain how a team of specialists and a coordinator scales the work.</a:t>
+            </a:r>
+          </a:p>
+          <a:p>
+            <a:pPr lvl="1"/>
+            <a:r>
+              <a:rPr sz="2000" b="0">
+                <a:latin typeface="Arial"/>
+              </a:rPr>
+              <a:t>Contribute to an open-source project, credited in your name.</a:t>
+            </a:r>
+          </a:p>
+          <a:p>
+            <a:pPr lvl="1"/>
+            <a:r>
+              <a:rPr sz="2000" b="0">
+                <a:latin typeface="Arial"/>
+              </a:rPr>
+              <a:t>Plan one workflow to try on your own campus in 30 days.</a:t>
             </a:r>
           </a:p>
         </p:txBody>
